--- a/nabd/presentation/nabd-overview.pptx
+++ b/nabd/presentation/nabd-overview.pptx
@@ -1925,7 +1925,7 @@
     <p:bg>
       <p:bgPr>
         <a:solidFill>
-          <a:srgbClr val="12241F"/>
+          <a:srgbClr val="0F172A"/>
         </a:solidFill>
       </p:bgPr>
     </p:bg>
@@ -1958,11 +1958,11 @@
             <a:avLst/>
           </a:prstGeom>
           <a:solidFill>
-            <a:srgbClr val="1D6B58"/>
+            <a:srgbClr val="10B981"/>
           </a:solidFill>
           <a:ln w="12700">
             <a:solidFill>
-              <a:srgbClr val="1D6B58"/>
+              <a:srgbClr val="10B981"/>
             </a:solidFill>
             <a:prstDash val="solid"/>
           </a:ln>
@@ -2058,7 +2058,7 @@
             <a:r>
               <a:rPr lang="ar-SA" altLang="en-US" sz="2400" dirty="0">
                 <a:solidFill>
-                  <a:srgbClr val="BFE3D6"/>
+                  <a:srgbClr val="A7F3D0"/>
                 </a:solidFill>
                 <a:latin typeface="Arial" pitchFamily="34" charset="0"/>
                 <a:ea typeface="Arial" pitchFamily="34" charset="-122"/>
@@ -2097,7 +2097,7 @@
             <a:r>
               <a:rPr lang="ar-SA" altLang="en-US" sz="1500" dirty="0">
                 <a:solidFill>
-                  <a:srgbClr val="A9C4BA"/>
+                  <a:srgbClr val="CBD5E1"/>
                 </a:solidFill>
                 <a:latin typeface="Arial" pitchFamily="34" charset="0"/>
                 <a:ea typeface="Arial" pitchFamily="34" charset="-122"/>
@@ -2136,7 +2136,7 @@
             <a:r>
               <a:rPr lang="ar-SA" altLang="en-US" sz="1100" dirty="0">
                 <a:solidFill>
-                  <a:srgbClr val="7FA396"/>
+                  <a:srgbClr val="94A3B8"/>
                 </a:solidFill>
                 <a:latin typeface="Arial" pitchFamily="34" charset="0"/>
                 <a:ea typeface="Arial" pitchFamily="34" charset="-122"/>
@@ -2207,7 +2207,7 @@
             <a:r>
               <a:rPr lang="ar-SA" altLang="en-US" sz="3000" b="1" dirty="0">
                 <a:solidFill>
-                  <a:srgbClr val="12241F"/>
+                  <a:srgbClr val="0F172A"/>
                 </a:solidFill>
                 <a:latin typeface="Arial" pitchFamily="34" charset="0"/>
                 <a:ea typeface="Arial" pitchFamily="34" charset="-122"/>
@@ -2246,7 +2246,7 @@
             <a:r>
               <a:rPr lang="ar-SA" altLang="en-US" sz="1400" dirty="0">
                 <a:solidFill>
-                  <a:srgbClr val="4A5C56"/>
+                  <a:srgbClr val="475569"/>
                 </a:solidFill>
                 <a:latin typeface="Arial" pitchFamily="34" charset="0"/>
                 <a:ea typeface="Arial" pitchFamily="34" charset="-122"/>
@@ -2275,7 +2275,7 @@
           <a:noFill/>
           <a:ln w="25400">
             <a:solidFill>
-              <a:srgbClr val="D9E1DC"/>
+              <a:srgbClr val="E2E8F0"/>
             </a:solidFill>
             <a:prstDash val="solid"/>
           </a:ln>
@@ -2296,7 +2296,7 @@
             <a:avLst/>
           </a:prstGeom>
           <a:solidFill>
-            <a:srgbClr val="1D6B58"/>
+            <a:srgbClr val="10B981"/>
           </a:solidFill>
           <a:ln w="25400">
             <a:solidFill>
@@ -2333,7 +2333,7 @@
             <a:r>
               <a:rPr lang="ar-SA" altLang="en-US" sz="1100" dirty="0">
                 <a:solidFill>
-                  <a:srgbClr val="7A8A84"/>
+                  <a:srgbClr val="64748B"/>
                 </a:solidFill>
                 <a:latin typeface="Arial" pitchFamily="34" charset="0"/>
                 <a:ea typeface="Arial" pitchFamily="34" charset="-122"/>
@@ -2372,7 +2372,7 @@
             <a:r>
               <a:rPr lang="ar-SA" altLang="en-US" sz="1500" b="1" dirty="0">
                 <a:solidFill>
-                  <a:srgbClr val="12241F"/>
+                  <a:srgbClr val="0F172A"/>
                 </a:solidFill>
                 <a:latin typeface="Arial" pitchFamily="34" charset="0"/>
                 <a:ea typeface="Arial" pitchFamily="34" charset="-122"/>
@@ -2411,7 +2411,7 @@
             <a:r>
               <a:rPr lang="ar-SA" altLang="en-US" sz="1100" dirty="0">
                 <a:solidFill>
-                  <a:srgbClr val="4A5C56"/>
+                  <a:srgbClr val="475569"/>
                 </a:solidFill>
                 <a:latin typeface="Arial" pitchFamily="34" charset="0"/>
                 <a:ea typeface="Arial" pitchFamily="34" charset="-122"/>
@@ -2438,7 +2438,7 @@
             <a:avLst/>
           </a:prstGeom>
           <a:solidFill>
-            <a:srgbClr val="1D6B58"/>
+            <a:srgbClr val="10B981"/>
           </a:solidFill>
           <a:ln w="25400">
             <a:solidFill>
@@ -2475,7 +2475,7 @@
             <a:r>
               <a:rPr lang="ar-SA" altLang="en-US" sz="1100" dirty="0">
                 <a:solidFill>
-                  <a:srgbClr val="7A8A84"/>
+                  <a:srgbClr val="64748B"/>
                 </a:solidFill>
                 <a:latin typeface="Arial" pitchFamily="34" charset="0"/>
                 <a:ea typeface="Arial" pitchFamily="34" charset="-122"/>
@@ -2514,7 +2514,7 @@
             <a:r>
               <a:rPr lang="ar-SA" altLang="en-US" sz="1500" b="1" dirty="0">
                 <a:solidFill>
-                  <a:srgbClr val="12241F"/>
+                  <a:srgbClr val="0F172A"/>
                 </a:solidFill>
                 <a:latin typeface="Arial" pitchFamily="34" charset="0"/>
                 <a:ea typeface="Arial" pitchFamily="34" charset="-122"/>
@@ -2553,7 +2553,7 @@
             <a:r>
               <a:rPr lang="ar-SA" altLang="en-US" sz="1100" dirty="0">
                 <a:solidFill>
-                  <a:srgbClr val="4A5C56"/>
+                  <a:srgbClr val="475569"/>
                 </a:solidFill>
                 <a:latin typeface="Arial" pitchFamily="34" charset="0"/>
                 <a:ea typeface="Arial" pitchFamily="34" charset="-122"/>
@@ -2580,7 +2580,7 @@
             <a:avLst/>
           </a:prstGeom>
           <a:solidFill>
-            <a:srgbClr val="1D6B58"/>
+            <a:srgbClr val="10B981"/>
           </a:solidFill>
           <a:ln w="25400">
             <a:solidFill>
@@ -2617,7 +2617,7 @@
             <a:r>
               <a:rPr lang="ar-SA" altLang="en-US" sz="1100" dirty="0">
                 <a:solidFill>
-                  <a:srgbClr val="7A8A84"/>
+                  <a:srgbClr val="64748B"/>
                 </a:solidFill>
                 <a:latin typeface="Arial" pitchFamily="34" charset="0"/>
                 <a:ea typeface="Arial" pitchFamily="34" charset="-122"/>
@@ -2656,7 +2656,7 @@
             <a:r>
               <a:rPr lang="ar-SA" altLang="en-US" sz="1500" b="1" dirty="0">
                 <a:solidFill>
-                  <a:srgbClr val="12241F"/>
+                  <a:srgbClr val="0F172A"/>
                 </a:solidFill>
                 <a:latin typeface="Arial" pitchFamily="34" charset="0"/>
                 <a:ea typeface="Arial" pitchFamily="34" charset="-122"/>
@@ -2695,7 +2695,7 @@
             <a:r>
               <a:rPr lang="ar-SA" altLang="en-US" sz="1100" dirty="0">
                 <a:solidFill>
-                  <a:srgbClr val="4A5C56"/>
+                  <a:srgbClr val="475569"/>
                 </a:solidFill>
                 <a:latin typeface="Arial" pitchFamily="34" charset="0"/>
                 <a:ea typeface="Arial" pitchFamily="34" charset="-122"/>
@@ -2722,7 +2722,7 @@
             <a:avLst/>
           </a:prstGeom>
           <a:solidFill>
-            <a:srgbClr val="1D6B58"/>
+            <a:srgbClr val="10B981"/>
           </a:solidFill>
           <a:ln w="25400">
             <a:solidFill>
@@ -2759,7 +2759,7 @@
             <a:r>
               <a:rPr lang="ar-SA" altLang="en-US" sz="1100" dirty="0">
                 <a:solidFill>
-                  <a:srgbClr val="7A8A84"/>
+                  <a:srgbClr val="64748B"/>
                 </a:solidFill>
                 <a:latin typeface="Arial" pitchFamily="34" charset="0"/>
                 <a:ea typeface="Arial" pitchFamily="34" charset="-122"/>
@@ -2798,7 +2798,7 @@
             <a:r>
               <a:rPr lang="ar-SA" altLang="en-US" sz="1500" b="1" dirty="0">
                 <a:solidFill>
-                  <a:srgbClr val="12241F"/>
+                  <a:srgbClr val="0F172A"/>
                 </a:solidFill>
                 <a:latin typeface="Arial" pitchFamily="34" charset="0"/>
                 <a:ea typeface="Arial" pitchFamily="34" charset="-122"/>
@@ -2837,7 +2837,7 @@
             <a:r>
               <a:rPr lang="ar-SA" altLang="en-US" sz="1100" dirty="0">
                 <a:solidFill>
-                  <a:srgbClr val="4A5C56"/>
+                  <a:srgbClr val="475569"/>
                 </a:solidFill>
                 <a:latin typeface="Arial" pitchFamily="34" charset="0"/>
                 <a:ea typeface="Arial" pitchFamily="34" charset="-122"/>
@@ -2864,7 +2864,7 @@
             <a:avLst/>
           </a:prstGeom>
           <a:solidFill>
-            <a:srgbClr val="A8660F"/>
+            <a:srgbClr val="FACC15"/>
           </a:solidFill>
           <a:ln w="25400">
             <a:solidFill>
@@ -2901,7 +2901,7 @@
             <a:r>
               <a:rPr lang="ar-SA" altLang="en-US" sz="1100" dirty="0">
                 <a:solidFill>
-                  <a:srgbClr val="7A8A84"/>
+                  <a:srgbClr val="64748B"/>
                 </a:solidFill>
                 <a:latin typeface="Arial" pitchFamily="34" charset="0"/>
                 <a:ea typeface="Arial" pitchFamily="34" charset="-122"/>
@@ -2940,7 +2940,7 @@
             <a:r>
               <a:rPr lang="ar-SA" altLang="en-US" sz="1500" b="1" dirty="0">
                 <a:solidFill>
-                  <a:srgbClr val="12241F"/>
+                  <a:srgbClr val="0F172A"/>
                 </a:solidFill>
                 <a:latin typeface="Arial" pitchFamily="34" charset="0"/>
                 <a:ea typeface="Arial" pitchFamily="34" charset="-122"/>
@@ -2979,7 +2979,7 @@
             <a:r>
               <a:rPr lang="ar-SA" altLang="en-US" sz="1100" dirty="0">
                 <a:solidFill>
-                  <a:srgbClr val="4A5C56"/>
+                  <a:srgbClr val="475569"/>
                 </a:solidFill>
                 <a:latin typeface="Arial" pitchFamily="34" charset="0"/>
                 <a:ea typeface="Arial" pitchFamily="34" charset="-122"/>
@@ -3008,11 +3008,11 @@
             </a:avLst>
           </a:prstGeom>
           <a:solidFill>
-            <a:srgbClr val="F8EAD3"/>
+            <a:srgbClr val="FEF9C3"/>
           </a:solidFill>
           <a:ln w="12700">
             <a:solidFill>
-              <a:srgbClr val="F8EAD3"/>
+              <a:srgbClr val="FEF9C3"/>
             </a:solidFill>
             <a:prstDash val="solid"/>
           </a:ln>
@@ -3045,7 +3045,7 @@
             <a:r>
               <a:rPr lang="ar-SA" altLang="en-US" sz="1250" b="1" dirty="0">
                 <a:solidFill>
-                  <a:srgbClr val="A8660F"/>
+                  <a:srgbClr val="A16207"/>
                 </a:solidFill>
                 <a:latin typeface="Arial" pitchFamily="34" charset="0"/>
                 <a:ea typeface="Arial" pitchFamily="34" charset="-122"/>
@@ -3084,7 +3084,7 @@
             <a:r>
               <a:rPr lang="ar-SA" altLang="en-US" sz="900" dirty="0">
                 <a:solidFill>
-                  <a:srgbClr val="7A8A84"/>
+                  <a:srgbClr val="64748B"/>
                 </a:solidFill>
                 <a:latin typeface="Arial" pitchFamily="34" charset="0"/>
                 <a:ea typeface="Arial" pitchFamily="34" charset="-122"/>
@@ -3123,7 +3123,7 @@
             <a:r>
               <a:rPr lang="en-US" sz="900" dirty="0">
                 <a:solidFill>
-                  <a:srgbClr val="7A8A84"/>
+                  <a:srgbClr val="64748B"/>
                 </a:solidFill>
                 <a:latin typeface="Arial" pitchFamily="34" charset="0"/>
                 <a:ea typeface="Arial" pitchFamily="34" charset="-122"/>
@@ -3149,7 +3149,7 @@
     <p:bg>
       <p:bgPr>
         <a:solidFill>
-          <a:srgbClr val="F4F7F5"/>
+          <a:srgbClr val="F8FAFC"/>
         </a:solidFill>
       </p:bgPr>
     </p:bg>
@@ -3194,7 +3194,7 @@
             <a:r>
               <a:rPr lang="ar-SA" altLang="en-US" sz="3000" b="1" dirty="0">
                 <a:solidFill>
-                  <a:srgbClr val="12241F"/>
+                  <a:srgbClr val="0F172A"/>
                 </a:solidFill>
                 <a:latin typeface="Arial" pitchFamily="34" charset="0"/>
                 <a:ea typeface="Arial" pitchFamily="34" charset="-122"/>
@@ -3233,7 +3233,7 @@
             <a:r>
               <a:rPr lang="ar-SA" altLang="en-US" sz="1400" dirty="0">
                 <a:solidFill>
-                  <a:srgbClr val="4A5C56"/>
+                  <a:srgbClr val="475569"/>
                 </a:solidFill>
                 <a:latin typeface="Arial" pitchFamily="34" charset="0"/>
                 <a:ea typeface="Arial" pitchFamily="34" charset="-122"/>
@@ -3266,7 +3266,7 @@
           </a:solidFill>
           <a:ln w="9525">
             <a:solidFill>
-              <a:srgbClr val="D9E1DC"/>
+              <a:srgbClr val="E2E8F0"/>
             </a:solidFill>
             <a:prstDash val="solid"/>
           </a:ln>
@@ -3306,7 +3306,7 @@
             <a:r>
               <a:rPr lang="ar-SA" altLang="en-US" sz="3000" b="1" dirty="0">
                 <a:solidFill>
-                  <a:srgbClr val="1D6B58"/>
+                  <a:srgbClr val="047857"/>
                 </a:solidFill>
                 <a:latin typeface="Arial" pitchFamily="34" charset="0"/>
                 <a:ea typeface="Arial" pitchFamily="34" charset="-122"/>
@@ -3345,7 +3345,7 @@
             <a:r>
               <a:rPr lang="ar-SA" altLang="en-US" sz="1400" b="1" dirty="0">
                 <a:solidFill>
-                  <a:srgbClr val="12241F"/>
+                  <a:srgbClr val="0F172A"/>
                 </a:solidFill>
                 <a:latin typeface="Arial" pitchFamily="34" charset="0"/>
                 <a:ea typeface="Arial" pitchFamily="34" charset="-122"/>
@@ -3384,7 +3384,7 @@
             <a:r>
               <a:rPr lang="ar-SA" altLang="en-US" sz="1100" dirty="0">
                 <a:solidFill>
-                  <a:srgbClr val="4A5C56"/>
+                  <a:srgbClr val="475569"/>
                 </a:solidFill>
                 <a:latin typeface="Arial" pitchFamily="34" charset="0"/>
                 <a:ea typeface="Arial" pitchFamily="34" charset="-122"/>
@@ -3417,7 +3417,7 @@
           </a:solidFill>
           <a:ln w="9525">
             <a:solidFill>
-              <a:srgbClr val="D9E1DC"/>
+              <a:srgbClr val="E2E8F0"/>
             </a:solidFill>
             <a:prstDash val="solid"/>
           </a:ln>
@@ -3457,7 +3457,7 @@
             <a:r>
               <a:rPr lang="ar-SA" altLang="en-US" sz="3000" b="1" dirty="0">
                 <a:solidFill>
-                  <a:srgbClr val="1D6B58"/>
+                  <a:srgbClr val="047857"/>
                 </a:solidFill>
                 <a:latin typeface="Arial" pitchFamily="34" charset="0"/>
                 <a:ea typeface="Arial" pitchFamily="34" charset="-122"/>
@@ -3496,7 +3496,7 @@
             <a:r>
               <a:rPr lang="ar-SA" altLang="en-US" sz="1400" b="1" dirty="0">
                 <a:solidFill>
-                  <a:srgbClr val="12241F"/>
+                  <a:srgbClr val="0F172A"/>
                 </a:solidFill>
                 <a:latin typeface="Arial" pitchFamily="34" charset="0"/>
                 <a:ea typeface="Arial" pitchFamily="34" charset="-122"/>
@@ -3535,7 +3535,7 @@
             <a:r>
               <a:rPr lang="ar-SA" altLang="en-US" sz="1100" dirty="0">
                 <a:solidFill>
-                  <a:srgbClr val="4A5C56"/>
+                  <a:srgbClr val="475569"/>
                 </a:solidFill>
                 <a:latin typeface="Arial" pitchFamily="34" charset="0"/>
                 <a:ea typeface="Arial" pitchFamily="34" charset="-122"/>
@@ -3568,7 +3568,7 @@
           </a:solidFill>
           <a:ln w="9525">
             <a:solidFill>
-              <a:srgbClr val="D9E1DC"/>
+              <a:srgbClr val="E2E8F0"/>
             </a:solidFill>
             <a:prstDash val="solid"/>
           </a:ln>
@@ -3608,7 +3608,7 @@
             <a:r>
               <a:rPr lang="ar-SA" altLang="en-US" sz="3000" b="1" dirty="0">
                 <a:solidFill>
-                  <a:srgbClr val="1D6B58"/>
+                  <a:srgbClr val="047857"/>
                 </a:solidFill>
                 <a:latin typeface="Arial" pitchFamily="34" charset="0"/>
                 <a:ea typeface="Arial" pitchFamily="34" charset="-122"/>
@@ -3647,7 +3647,7 @@
             <a:r>
               <a:rPr lang="ar-SA" altLang="en-US" sz="1400" b="1" dirty="0">
                 <a:solidFill>
-                  <a:srgbClr val="12241F"/>
+                  <a:srgbClr val="0F172A"/>
                 </a:solidFill>
                 <a:latin typeface="Arial" pitchFamily="34" charset="0"/>
                 <a:ea typeface="Arial" pitchFamily="34" charset="-122"/>
@@ -3686,7 +3686,7 @@
             <a:r>
               <a:rPr lang="ar-SA" altLang="en-US" sz="1100" dirty="0">
                 <a:solidFill>
-                  <a:srgbClr val="4A5C56"/>
+                  <a:srgbClr val="475569"/>
                 </a:solidFill>
                 <a:latin typeface="Arial" pitchFamily="34" charset="0"/>
                 <a:ea typeface="Arial" pitchFamily="34" charset="-122"/>
@@ -3719,7 +3719,7 @@
           </a:solidFill>
           <a:ln w="9525">
             <a:solidFill>
-              <a:srgbClr val="D9E1DC"/>
+              <a:srgbClr val="E2E8F0"/>
             </a:solidFill>
             <a:prstDash val="solid"/>
           </a:ln>
@@ -3759,7 +3759,7 @@
             <a:r>
               <a:rPr lang="ar-SA" altLang="en-US" sz="3000" b="1" dirty="0">
                 <a:solidFill>
-                  <a:srgbClr val="1D6B58"/>
+                  <a:srgbClr val="047857"/>
                 </a:solidFill>
                 <a:latin typeface="Arial" pitchFamily="34" charset="0"/>
                 <a:ea typeface="Arial" pitchFamily="34" charset="-122"/>
@@ -3798,7 +3798,7 @@
             <a:r>
               <a:rPr lang="ar-SA" altLang="en-US" sz="1400" b="1" dirty="0">
                 <a:solidFill>
-                  <a:srgbClr val="12241F"/>
+                  <a:srgbClr val="0F172A"/>
                 </a:solidFill>
                 <a:latin typeface="Arial" pitchFamily="34" charset="0"/>
                 <a:ea typeface="Arial" pitchFamily="34" charset="-122"/>
@@ -3837,7 +3837,7 @@
             <a:r>
               <a:rPr lang="ar-SA" altLang="en-US" sz="1100" dirty="0">
                 <a:solidFill>
-                  <a:srgbClr val="4A5C56"/>
+                  <a:srgbClr val="475569"/>
                 </a:solidFill>
                 <a:latin typeface="Arial" pitchFamily="34" charset="0"/>
                 <a:ea typeface="Arial" pitchFamily="34" charset="-122"/>
@@ -3876,7 +3876,7 @@
             <a:r>
               <a:rPr lang="ar-SA" altLang="en-US" sz="1250" b="1" dirty="0">
                 <a:solidFill>
-                  <a:srgbClr val="12241F"/>
+                  <a:srgbClr val="0F172A"/>
                 </a:solidFill>
                 <a:latin typeface="Arial" pitchFamily="34" charset="0"/>
                 <a:ea typeface="Arial" pitchFamily="34" charset="-122"/>
@@ -3915,7 +3915,7 @@
             <a:r>
               <a:rPr lang="ar-SA" altLang="en-US" sz="900" dirty="0">
                 <a:solidFill>
-                  <a:srgbClr val="7A8A84"/>
+                  <a:srgbClr val="64748B"/>
                 </a:solidFill>
                 <a:latin typeface="Arial" pitchFamily="34" charset="0"/>
                 <a:ea typeface="Arial" pitchFamily="34" charset="-122"/>
@@ -3954,7 +3954,7 @@
             <a:r>
               <a:rPr lang="en-US" sz="900" dirty="0">
                 <a:solidFill>
-                  <a:srgbClr val="7A8A84"/>
+                  <a:srgbClr val="64748B"/>
                 </a:solidFill>
                 <a:latin typeface="Arial" pitchFamily="34" charset="0"/>
                 <a:ea typeface="Arial" pitchFamily="34" charset="-122"/>
@@ -4025,7 +4025,7 @@
             <a:r>
               <a:rPr lang="ar-SA" altLang="en-US" sz="3000" b="1" dirty="0">
                 <a:solidFill>
-                  <a:srgbClr val="12241F"/>
+                  <a:srgbClr val="0F172A"/>
                 </a:solidFill>
                 <a:latin typeface="Arial" pitchFamily="34" charset="0"/>
                 <a:ea typeface="Arial" pitchFamily="34" charset="-122"/>
@@ -4064,7 +4064,7 @@
             <a:r>
               <a:rPr lang="ar-SA" altLang="en-US" sz="1400" dirty="0">
                 <a:solidFill>
-                  <a:srgbClr val="4A5C56"/>
+                  <a:srgbClr val="475569"/>
                 </a:solidFill>
                 <a:latin typeface="Arial" pitchFamily="34" charset="0"/>
                 <a:ea typeface="Arial" pitchFamily="34" charset="-122"/>
@@ -4093,11 +4093,11 @@
             </a:avLst>
           </a:prstGeom>
           <a:solidFill>
-            <a:srgbClr val="F4F7F5"/>
+            <a:srgbClr val="F8FAFC"/>
           </a:solidFill>
           <a:ln w="12700">
             <a:solidFill>
-              <a:srgbClr val="D9E1DC"/>
+              <a:srgbClr val="E2E8F0"/>
             </a:solidFill>
             <a:prstDash val="solid"/>
           </a:ln>
@@ -4154,7 +4154,7 @@
             <a:r>
               <a:rPr lang="ar-SA" altLang="en-US" sz="1350" b="1" dirty="0">
                 <a:solidFill>
-                  <a:srgbClr val="12241F"/>
+                  <a:srgbClr val="0F172A"/>
                 </a:solidFill>
                 <a:latin typeface="Arial" pitchFamily="34" charset="0"/>
                 <a:ea typeface="Arial" pitchFamily="34" charset="-122"/>
@@ -4217,7 +4217,7 @@
             <a:r>
               <a:rPr lang="ar-SA" altLang="en-US" sz="1150" dirty="0">
                 <a:solidFill>
-                  <a:srgbClr val="4A5C56"/>
+                  <a:srgbClr val="475569"/>
                 </a:solidFill>
                 <a:latin typeface="Arial" pitchFamily="34" charset="0"/>
                 <a:ea typeface="Arial" pitchFamily="34" charset="-122"/>
@@ -4250,7 +4250,7 @@
           </a:solidFill>
           <a:ln w="12700">
             <a:solidFill>
-              <a:srgbClr val="D9E1DC"/>
+              <a:srgbClr val="E2E8F0"/>
             </a:solidFill>
             <a:prstDash val="solid"/>
           </a:ln>
@@ -4307,7 +4307,7 @@
             <a:r>
               <a:rPr lang="ar-SA" altLang="en-US" sz="1350" b="1" dirty="0">
                 <a:solidFill>
-                  <a:srgbClr val="12241F"/>
+                  <a:srgbClr val="0F172A"/>
                 </a:solidFill>
                 <a:latin typeface="Arial" pitchFamily="34" charset="0"/>
                 <a:ea typeface="Arial" pitchFamily="34" charset="-122"/>
@@ -4370,7 +4370,7 @@
             <a:r>
               <a:rPr lang="ar-SA" altLang="en-US" sz="1150" dirty="0">
                 <a:solidFill>
-                  <a:srgbClr val="4A5C56"/>
+                  <a:srgbClr val="475569"/>
                 </a:solidFill>
                 <a:latin typeface="Arial" pitchFamily="34" charset="0"/>
                 <a:ea typeface="Arial" pitchFamily="34" charset="-122"/>
@@ -4399,11 +4399,11 @@
             </a:avLst>
           </a:prstGeom>
           <a:solidFill>
-            <a:srgbClr val="F4F7F5"/>
+            <a:srgbClr val="F8FAFC"/>
           </a:solidFill>
           <a:ln w="12700">
             <a:solidFill>
-              <a:srgbClr val="D9E1DC"/>
+              <a:srgbClr val="E2E8F0"/>
             </a:solidFill>
             <a:prstDash val="solid"/>
           </a:ln>
@@ -4460,7 +4460,7 @@
             <a:r>
               <a:rPr lang="ar-SA" altLang="en-US" sz="1350" b="1" dirty="0">
                 <a:solidFill>
-                  <a:srgbClr val="12241F"/>
+                  <a:srgbClr val="0F172A"/>
                 </a:solidFill>
                 <a:latin typeface="Arial" pitchFamily="34" charset="0"/>
                 <a:ea typeface="Arial" pitchFamily="34" charset="-122"/>
@@ -4523,7 +4523,7 @@
             <a:r>
               <a:rPr lang="ar-SA" altLang="en-US" sz="1150" dirty="0">
                 <a:solidFill>
-                  <a:srgbClr val="4A5C56"/>
+                  <a:srgbClr val="475569"/>
                 </a:solidFill>
                 <a:latin typeface="Arial" pitchFamily="34" charset="0"/>
                 <a:ea typeface="Arial" pitchFamily="34" charset="-122"/>
@@ -4556,7 +4556,7 @@
           </a:solidFill>
           <a:ln w="12700">
             <a:solidFill>
-              <a:srgbClr val="D9E1DC"/>
+              <a:srgbClr val="E2E8F0"/>
             </a:solidFill>
             <a:prstDash val="solid"/>
           </a:ln>
@@ -4613,7 +4613,7 @@
             <a:r>
               <a:rPr lang="ar-SA" altLang="en-US" sz="1350" b="1" dirty="0">
                 <a:solidFill>
-                  <a:srgbClr val="12241F"/>
+                  <a:srgbClr val="0F172A"/>
                 </a:solidFill>
                 <a:latin typeface="Arial" pitchFamily="34" charset="0"/>
                 <a:ea typeface="Arial" pitchFamily="34" charset="-122"/>
@@ -4676,7 +4676,7 @@
             <a:r>
               <a:rPr lang="ar-SA" altLang="en-US" sz="1150" dirty="0">
                 <a:solidFill>
-                  <a:srgbClr val="4A5C56"/>
+                  <a:srgbClr val="475569"/>
                 </a:solidFill>
                 <a:latin typeface="Arial" pitchFamily="34" charset="0"/>
                 <a:ea typeface="Arial" pitchFamily="34" charset="-122"/>
@@ -4715,7 +4715,7 @@
             <a:r>
               <a:rPr lang="ar-SA" altLang="en-US" sz="900" dirty="0">
                 <a:solidFill>
-                  <a:srgbClr val="7A8A84"/>
+                  <a:srgbClr val="64748B"/>
                 </a:solidFill>
                 <a:latin typeface="Arial" pitchFamily="34" charset="0"/>
                 <a:ea typeface="Arial" pitchFamily="34" charset="-122"/>
@@ -4754,7 +4754,7 @@
             <a:r>
               <a:rPr lang="en-US" sz="900" dirty="0">
                 <a:solidFill>
-                  <a:srgbClr val="7A8A84"/>
+                  <a:srgbClr val="64748B"/>
                 </a:solidFill>
                 <a:latin typeface="Arial" pitchFamily="34" charset="0"/>
                 <a:ea typeface="Arial" pitchFamily="34" charset="-122"/>
@@ -4780,7 +4780,7 @@
     <p:bg>
       <p:bgPr>
         <a:solidFill>
-          <a:srgbClr val="12241F"/>
+          <a:srgbClr val="0F172A"/>
         </a:solidFill>
       </p:bgPr>
     </p:bg>
@@ -4813,11 +4813,11 @@
             <a:avLst/>
           </a:prstGeom>
           <a:solidFill>
-            <a:srgbClr val="1D6B58"/>
+            <a:srgbClr val="10B981"/>
           </a:solidFill>
           <a:ln w="12700">
             <a:solidFill>
-              <a:srgbClr val="1D6B58"/>
+              <a:srgbClr val="10B981"/>
             </a:solidFill>
             <a:prstDash val="solid"/>
           </a:ln>
@@ -4901,11 +4901,11 @@
             <a:avLst/>
           </a:prstGeom>
           <a:solidFill>
-            <a:srgbClr val="2E8A73"/>
+            <a:srgbClr val="34D399"/>
           </a:solidFill>
           <a:ln w="12700">
             <a:solidFill>
-              <a:srgbClr val="2E8A73"/>
+              <a:srgbClr val="34D399"/>
             </a:solidFill>
             <a:prstDash val="solid"/>
           </a:ln>
@@ -4938,7 +4938,7 @@
             <a:r>
               <a:rPr lang="ar-SA" altLang="en-US" sz="1600" dirty="0">
                 <a:solidFill>
-                  <a:srgbClr val="D6EAE2"/>
+                  <a:srgbClr val="E2E8F0"/>
                 </a:solidFill>
                 <a:latin typeface="Arial" pitchFamily="34" charset="0"/>
                 <a:ea typeface="Arial" pitchFamily="34" charset="-122"/>
@@ -4965,11 +4965,11 @@
             <a:avLst/>
           </a:prstGeom>
           <a:solidFill>
-            <a:srgbClr val="2E8A73"/>
+            <a:srgbClr val="34D399"/>
           </a:solidFill>
           <a:ln w="12700">
             <a:solidFill>
-              <a:srgbClr val="2E8A73"/>
+              <a:srgbClr val="34D399"/>
             </a:solidFill>
             <a:prstDash val="solid"/>
           </a:ln>
@@ -5002,7 +5002,7 @@
             <a:r>
               <a:rPr lang="ar-SA" altLang="en-US" sz="1600" dirty="0">
                 <a:solidFill>
-                  <a:srgbClr val="D6EAE2"/>
+                  <a:srgbClr val="E2E8F0"/>
                 </a:solidFill>
                 <a:latin typeface="Arial" pitchFamily="34" charset="0"/>
                 <a:ea typeface="Arial" pitchFamily="34" charset="-122"/>
@@ -5029,11 +5029,11 @@
             <a:avLst/>
           </a:prstGeom>
           <a:solidFill>
-            <a:srgbClr val="2E8A73"/>
+            <a:srgbClr val="34D399"/>
           </a:solidFill>
           <a:ln w="12700">
             <a:solidFill>
-              <a:srgbClr val="2E8A73"/>
+              <a:srgbClr val="34D399"/>
             </a:solidFill>
             <a:prstDash val="solid"/>
           </a:ln>
@@ -5066,7 +5066,7 @@
             <a:r>
               <a:rPr lang="ar-SA" altLang="en-US" sz="1600" dirty="0">
                 <a:solidFill>
-                  <a:srgbClr val="D6EAE2"/>
+                  <a:srgbClr val="E2E8F0"/>
                 </a:solidFill>
                 <a:latin typeface="Arial" pitchFamily="34" charset="0"/>
                 <a:ea typeface="Arial" pitchFamily="34" charset="-122"/>
@@ -5093,11 +5093,11 @@
             <a:avLst/>
           </a:prstGeom>
           <a:solidFill>
-            <a:srgbClr val="2E8A73"/>
+            <a:srgbClr val="34D399"/>
           </a:solidFill>
           <a:ln w="12700">
             <a:solidFill>
-              <a:srgbClr val="2E8A73"/>
+              <a:srgbClr val="34D399"/>
             </a:solidFill>
             <a:prstDash val="solid"/>
           </a:ln>
@@ -5130,7 +5130,7 @@
             <a:r>
               <a:rPr lang="ar-SA" altLang="en-US" sz="1600" dirty="0">
                 <a:solidFill>
-                  <a:srgbClr val="D6EAE2"/>
+                  <a:srgbClr val="E2E8F0"/>
                 </a:solidFill>
                 <a:latin typeface="Arial" pitchFamily="34" charset="0"/>
                 <a:ea typeface="Arial" pitchFamily="34" charset="-122"/>
@@ -5169,7 +5169,7 @@
             <a:r>
               <a:rPr lang="ar-SA" altLang="en-US" sz="1400" i="1" dirty="0">
                 <a:solidFill>
-                  <a:srgbClr val="BFE3D6"/>
+                  <a:srgbClr val="A7F3D0"/>
                 </a:solidFill>
                 <a:latin typeface="Arial" pitchFamily="34" charset="0"/>
                 <a:ea typeface="Arial" pitchFamily="34" charset="-122"/>
@@ -5240,7 +5240,7 @@
             <a:r>
               <a:rPr lang="ar-SA" altLang="en-US" sz="3000" b="1" dirty="0">
                 <a:solidFill>
-                  <a:srgbClr val="12241F"/>
+                  <a:srgbClr val="0F172A"/>
                 </a:solidFill>
                 <a:latin typeface="Arial" pitchFamily="34" charset="0"/>
                 <a:ea typeface="Arial" pitchFamily="34" charset="-122"/>
@@ -5279,7 +5279,7 @@
             <a:r>
               <a:rPr lang="ar-SA" altLang="en-US" sz="1400" dirty="0">
                 <a:solidFill>
-                  <a:srgbClr val="4A5C56"/>
+                  <a:srgbClr val="475569"/>
                 </a:solidFill>
                 <a:latin typeface="Arial" pitchFamily="34" charset="0"/>
                 <a:ea typeface="Arial" pitchFamily="34" charset="-122"/>
@@ -5308,11 +5308,11 @@
             </a:avLst>
           </a:prstGeom>
           <a:solidFill>
-            <a:srgbClr val="F4F7F5"/>
+            <a:srgbClr val="F8FAFC"/>
           </a:solidFill>
           <a:ln w="9525">
             <a:solidFill>
-              <a:srgbClr val="D9E1DC"/>
+              <a:srgbClr val="E2E8F0"/>
             </a:solidFill>
             <a:prstDash val="solid"/>
           </a:ln>
@@ -5340,11 +5340,11 @@
             <a:avLst/>
           </a:prstGeom>
           <a:solidFill>
-            <a:srgbClr val="DCEDE6"/>
+            <a:srgbClr val="D1FAE5"/>
           </a:solidFill>
           <a:ln w="12700">
             <a:solidFill>
-              <a:srgbClr val="DCEDE6"/>
+              <a:srgbClr val="D1FAE5"/>
             </a:solidFill>
             <a:prstDash val="solid"/>
           </a:ln>
@@ -5401,7 +5401,7 @@
             <a:r>
               <a:rPr lang="ar-SA" altLang="en-US" sz="1700" b="1" dirty="0">
                 <a:solidFill>
-                  <a:srgbClr val="12241F"/>
+                  <a:srgbClr val="0F172A"/>
                 </a:solidFill>
                 <a:latin typeface="Arial" pitchFamily="34" charset="0"/>
                 <a:ea typeface="Arial" pitchFamily="34" charset="-122"/>
@@ -5440,7 +5440,7 @@
             <a:r>
               <a:rPr lang="ar-SA" altLang="en-US" sz="1250" dirty="0">
                 <a:solidFill>
-                  <a:srgbClr val="4A5C56"/>
+                  <a:srgbClr val="475569"/>
                 </a:solidFill>
                 <a:latin typeface="Arial" pitchFamily="34" charset="0"/>
                 <a:ea typeface="Arial" pitchFamily="34" charset="-122"/>
@@ -5469,11 +5469,11 @@
             </a:avLst>
           </a:prstGeom>
           <a:solidFill>
-            <a:srgbClr val="F4F7F5"/>
+            <a:srgbClr val="F8FAFC"/>
           </a:solidFill>
           <a:ln w="9525">
             <a:solidFill>
-              <a:srgbClr val="D9E1DC"/>
+              <a:srgbClr val="E2E8F0"/>
             </a:solidFill>
             <a:prstDash val="solid"/>
           </a:ln>
@@ -5501,11 +5501,11 @@
             <a:avLst/>
           </a:prstGeom>
           <a:solidFill>
-            <a:srgbClr val="DCEDE6"/>
+            <a:srgbClr val="D1FAE5"/>
           </a:solidFill>
           <a:ln w="12700">
             <a:solidFill>
-              <a:srgbClr val="DCEDE6"/>
+              <a:srgbClr val="D1FAE5"/>
             </a:solidFill>
             <a:prstDash val="solid"/>
           </a:ln>
@@ -5562,7 +5562,7 @@
             <a:r>
               <a:rPr lang="ar-SA" altLang="en-US" sz="1700" b="1" dirty="0">
                 <a:solidFill>
-                  <a:srgbClr val="12241F"/>
+                  <a:srgbClr val="0F172A"/>
                 </a:solidFill>
                 <a:latin typeface="Arial" pitchFamily="34" charset="0"/>
                 <a:ea typeface="Arial" pitchFamily="34" charset="-122"/>
@@ -5601,7 +5601,7 @@
             <a:r>
               <a:rPr lang="ar-SA" altLang="en-US" sz="1250" dirty="0">
                 <a:solidFill>
-                  <a:srgbClr val="4A5C56"/>
+                  <a:srgbClr val="475569"/>
                 </a:solidFill>
                 <a:latin typeface="Arial" pitchFamily="34" charset="0"/>
                 <a:ea typeface="Arial" pitchFamily="34" charset="-122"/>
@@ -5630,11 +5630,11 @@
             </a:avLst>
           </a:prstGeom>
           <a:solidFill>
-            <a:srgbClr val="F4F7F5"/>
+            <a:srgbClr val="F8FAFC"/>
           </a:solidFill>
           <a:ln w="9525">
             <a:solidFill>
-              <a:srgbClr val="D9E1DC"/>
+              <a:srgbClr val="E2E8F0"/>
             </a:solidFill>
             <a:prstDash val="solid"/>
           </a:ln>
@@ -5662,11 +5662,11 @@
             <a:avLst/>
           </a:prstGeom>
           <a:solidFill>
-            <a:srgbClr val="DCEDE6"/>
+            <a:srgbClr val="D1FAE5"/>
           </a:solidFill>
           <a:ln w="12700">
             <a:solidFill>
-              <a:srgbClr val="DCEDE6"/>
+              <a:srgbClr val="D1FAE5"/>
             </a:solidFill>
             <a:prstDash val="solid"/>
           </a:ln>
@@ -5723,7 +5723,7 @@
             <a:r>
               <a:rPr lang="ar-SA" altLang="en-US" sz="1700" b="1" dirty="0">
                 <a:solidFill>
-                  <a:srgbClr val="12241F"/>
+                  <a:srgbClr val="0F172A"/>
                 </a:solidFill>
                 <a:latin typeface="Arial" pitchFamily="34" charset="0"/>
                 <a:ea typeface="Arial" pitchFamily="34" charset="-122"/>
@@ -5762,7 +5762,7 @@
             <a:r>
               <a:rPr lang="ar-SA" altLang="en-US" sz="1250" dirty="0">
                 <a:solidFill>
-                  <a:srgbClr val="4A5C56"/>
+                  <a:srgbClr val="475569"/>
                 </a:solidFill>
                 <a:latin typeface="Arial" pitchFamily="34" charset="0"/>
                 <a:ea typeface="Arial" pitchFamily="34" charset="-122"/>
@@ -5791,11 +5791,11 @@
             </a:avLst>
           </a:prstGeom>
           <a:solidFill>
-            <a:srgbClr val="F4F7F5"/>
+            <a:srgbClr val="F8FAFC"/>
           </a:solidFill>
           <a:ln w="9525">
             <a:solidFill>
-              <a:srgbClr val="D9E1DC"/>
+              <a:srgbClr val="E2E8F0"/>
             </a:solidFill>
             <a:prstDash val="solid"/>
           </a:ln>
@@ -5823,11 +5823,11 @@
             <a:avLst/>
           </a:prstGeom>
           <a:solidFill>
-            <a:srgbClr val="DCEDE6"/>
+            <a:srgbClr val="D1FAE5"/>
           </a:solidFill>
           <a:ln w="12700">
             <a:solidFill>
-              <a:srgbClr val="DCEDE6"/>
+              <a:srgbClr val="D1FAE5"/>
             </a:solidFill>
             <a:prstDash val="solid"/>
           </a:ln>
@@ -5884,7 +5884,7 @@
             <a:r>
               <a:rPr lang="ar-SA" altLang="en-US" sz="1700" b="1" dirty="0">
                 <a:solidFill>
-                  <a:srgbClr val="12241F"/>
+                  <a:srgbClr val="0F172A"/>
                 </a:solidFill>
                 <a:latin typeface="Arial" pitchFamily="34" charset="0"/>
                 <a:ea typeface="Arial" pitchFamily="34" charset="-122"/>
@@ -5923,7 +5923,7 @@
             <a:r>
               <a:rPr lang="ar-SA" altLang="en-US" sz="1250" dirty="0">
                 <a:solidFill>
-                  <a:srgbClr val="4A5C56"/>
+                  <a:srgbClr val="475569"/>
                 </a:solidFill>
                 <a:latin typeface="Arial" pitchFamily="34" charset="0"/>
                 <a:ea typeface="Arial" pitchFamily="34" charset="-122"/>
@@ -5962,7 +5962,7 @@
             <a:r>
               <a:rPr lang="ar-SA" altLang="en-US" sz="900" dirty="0">
                 <a:solidFill>
-                  <a:srgbClr val="7A8A84"/>
+                  <a:srgbClr val="64748B"/>
                 </a:solidFill>
                 <a:latin typeface="Arial" pitchFamily="34" charset="0"/>
                 <a:ea typeface="Arial" pitchFamily="34" charset="-122"/>
@@ -6001,7 +6001,7 @@
             <a:r>
               <a:rPr lang="en-US" sz="900" dirty="0">
                 <a:solidFill>
-                  <a:srgbClr val="7A8A84"/>
+                  <a:srgbClr val="64748B"/>
                 </a:solidFill>
                 <a:latin typeface="Arial" pitchFamily="34" charset="0"/>
                 <a:ea typeface="Arial" pitchFamily="34" charset="-122"/>
@@ -6072,7 +6072,7 @@
             <a:r>
               <a:rPr lang="ar-SA" altLang="en-US" sz="3000" b="1" dirty="0">
                 <a:solidFill>
-                  <a:srgbClr val="12241F"/>
+                  <a:srgbClr val="0F172A"/>
                 </a:solidFill>
                 <a:latin typeface="Arial" pitchFamily="34" charset="0"/>
                 <a:ea typeface="Arial" pitchFamily="34" charset="-122"/>
@@ -6111,7 +6111,7 @@
             <a:r>
               <a:rPr lang="ar-SA" altLang="en-US" sz="1400" dirty="0">
                 <a:solidFill>
-                  <a:srgbClr val="4A5C56"/>
+                  <a:srgbClr val="475569"/>
                 </a:solidFill>
                 <a:latin typeface="Arial" pitchFamily="34" charset="0"/>
                 <a:ea typeface="Arial" pitchFamily="34" charset="-122"/>
@@ -6140,11 +6140,11 @@
             </a:avLst>
           </a:prstGeom>
           <a:solidFill>
-            <a:srgbClr val="F4F7F5"/>
+            <a:srgbClr val="F8FAFC"/>
           </a:solidFill>
           <a:ln w="9525">
             <a:solidFill>
-              <a:srgbClr val="D9E1DC"/>
+              <a:srgbClr val="E2E8F0"/>
             </a:solidFill>
             <a:prstDash val="solid"/>
           </a:ln>
@@ -6184,7 +6184,7 @@
             <a:r>
               <a:rPr lang="ar-SA" altLang="en-US" sz="1600" b="1" dirty="0">
                 <a:solidFill>
-                  <a:srgbClr val="7A8A84"/>
+                  <a:srgbClr val="64748B"/>
                 </a:solidFill>
                 <a:latin typeface="Arial" pitchFamily="34" charset="0"/>
                 <a:ea typeface="Arial" pitchFamily="34" charset="-122"/>
@@ -6211,11 +6211,11 @@
             <a:avLst/>
           </a:prstGeom>
           <a:solidFill>
-            <a:srgbClr val="7A8A84"/>
+            <a:srgbClr val="64748B"/>
           </a:solidFill>
           <a:ln w="12700">
             <a:solidFill>
-              <a:srgbClr val="7A8A84"/>
+              <a:srgbClr val="64748B"/>
             </a:solidFill>
             <a:prstDash val="solid"/>
           </a:ln>
@@ -6248,7 +6248,7 @@
             <a:r>
               <a:rPr lang="ar-SA" altLang="en-US" sz="1400" dirty="0">
                 <a:solidFill>
-                  <a:srgbClr val="4A5C56"/>
+                  <a:srgbClr val="475569"/>
                 </a:solidFill>
                 <a:latin typeface="Arial" pitchFamily="34" charset="0"/>
                 <a:ea typeface="Arial" pitchFamily="34" charset="-122"/>
@@ -6275,11 +6275,11 @@
             <a:avLst/>
           </a:prstGeom>
           <a:solidFill>
-            <a:srgbClr val="7A8A84"/>
+            <a:srgbClr val="64748B"/>
           </a:solidFill>
           <a:ln w="12700">
             <a:solidFill>
-              <a:srgbClr val="7A8A84"/>
+              <a:srgbClr val="64748B"/>
             </a:solidFill>
             <a:prstDash val="solid"/>
           </a:ln>
@@ -6312,7 +6312,7 @@
             <a:r>
               <a:rPr lang="ar-SA" altLang="en-US" sz="1400" dirty="0">
                 <a:solidFill>
-                  <a:srgbClr val="4A5C56"/>
+                  <a:srgbClr val="475569"/>
                 </a:solidFill>
                 <a:latin typeface="Arial" pitchFamily="34" charset="0"/>
                 <a:ea typeface="Arial" pitchFamily="34" charset="-122"/>
@@ -6339,11 +6339,11 @@
             <a:avLst/>
           </a:prstGeom>
           <a:solidFill>
-            <a:srgbClr val="7A8A84"/>
+            <a:srgbClr val="64748B"/>
           </a:solidFill>
           <a:ln w="12700">
             <a:solidFill>
-              <a:srgbClr val="7A8A84"/>
+              <a:srgbClr val="64748B"/>
             </a:solidFill>
             <a:prstDash val="solid"/>
           </a:ln>
@@ -6376,7 +6376,7 @@
             <a:r>
               <a:rPr lang="ar-SA" altLang="en-US" sz="1400" dirty="0">
                 <a:solidFill>
-                  <a:srgbClr val="4A5C56"/>
+                  <a:srgbClr val="475569"/>
                 </a:solidFill>
                 <a:latin typeface="Arial" pitchFamily="34" charset="0"/>
                 <a:ea typeface="Arial" pitchFamily="34" charset="-122"/>
@@ -6403,11 +6403,11 @@
             <a:avLst/>
           </a:prstGeom>
           <a:solidFill>
-            <a:srgbClr val="7A8A84"/>
+            <a:srgbClr val="64748B"/>
           </a:solidFill>
           <a:ln w="12700">
             <a:solidFill>
-              <a:srgbClr val="7A8A84"/>
+              <a:srgbClr val="64748B"/>
             </a:solidFill>
             <a:prstDash val="solid"/>
           </a:ln>
@@ -6440,7 +6440,7 @@
             <a:r>
               <a:rPr lang="ar-SA" altLang="en-US" sz="1400" dirty="0">
                 <a:solidFill>
-                  <a:srgbClr val="4A5C56"/>
+                  <a:srgbClr val="475569"/>
                 </a:solidFill>
                 <a:latin typeface="Arial" pitchFamily="34" charset="0"/>
                 <a:ea typeface="Arial" pitchFamily="34" charset="-122"/>
@@ -6467,11 +6467,11 @@
             <a:avLst/>
           </a:prstGeom>
           <a:solidFill>
-            <a:srgbClr val="7A8A84"/>
+            <a:srgbClr val="64748B"/>
           </a:solidFill>
           <a:ln w="12700">
             <a:solidFill>
-              <a:srgbClr val="7A8A84"/>
+              <a:srgbClr val="64748B"/>
             </a:solidFill>
             <a:prstDash val="solid"/>
           </a:ln>
@@ -6504,7 +6504,7 @@
             <a:r>
               <a:rPr lang="ar-SA" altLang="en-US" sz="1400" dirty="0">
                 <a:solidFill>
-                  <a:srgbClr val="4A5C56"/>
+                  <a:srgbClr val="475569"/>
                 </a:solidFill>
                 <a:latin typeface="Arial" pitchFamily="34" charset="0"/>
                 <a:ea typeface="Arial" pitchFamily="34" charset="-122"/>
@@ -6533,11 +6533,11 @@
             </a:avLst>
           </a:prstGeom>
           <a:solidFill>
-            <a:srgbClr val="1D6B58"/>
+            <a:srgbClr val="0F172A"/>
           </a:solidFill>
           <a:ln w="12700">
             <a:solidFill>
-              <a:srgbClr val="1D6B58"/>
+              <a:srgbClr val="0F172A"/>
             </a:solidFill>
             <a:prstDash val="solid"/>
           </a:ln>
@@ -6570,7 +6570,7 @@
             <a:r>
               <a:rPr lang="ar-SA" altLang="en-US" sz="1600" b="1" dirty="0">
                 <a:solidFill>
-                  <a:srgbClr val="FFFFFF"/>
+                  <a:srgbClr val="34D399"/>
                 </a:solidFill>
                 <a:latin typeface="Arial" pitchFamily="34" charset="0"/>
                 <a:ea typeface="Arial" pitchFamily="34" charset="-122"/>
@@ -6597,11 +6597,11 @@
             <a:avLst/>
           </a:prstGeom>
           <a:solidFill>
-            <a:srgbClr val="BFE3D6"/>
+            <a:srgbClr val="10B981"/>
           </a:solidFill>
           <a:ln w="12700">
             <a:solidFill>
-              <a:srgbClr val="BFE3D6"/>
+              <a:srgbClr val="10B981"/>
             </a:solidFill>
             <a:prstDash val="solid"/>
           </a:ln>
@@ -6661,11 +6661,11 @@
             <a:avLst/>
           </a:prstGeom>
           <a:solidFill>
-            <a:srgbClr val="BFE3D6"/>
+            <a:srgbClr val="10B981"/>
           </a:solidFill>
           <a:ln w="12700">
             <a:solidFill>
-              <a:srgbClr val="BFE3D6"/>
+              <a:srgbClr val="10B981"/>
             </a:solidFill>
             <a:prstDash val="solid"/>
           </a:ln>
@@ -6725,11 +6725,11 @@
             <a:avLst/>
           </a:prstGeom>
           <a:solidFill>
-            <a:srgbClr val="BFE3D6"/>
+            <a:srgbClr val="10B981"/>
           </a:solidFill>
           <a:ln w="12700">
             <a:solidFill>
-              <a:srgbClr val="BFE3D6"/>
+              <a:srgbClr val="10B981"/>
             </a:solidFill>
             <a:prstDash val="solid"/>
           </a:ln>
@@ -6789,11 +6789,11 @@
             <a:avLst/>
           </a:prstGeom>
           <a:solidFill>
-            <a:srgbClr val="BFE3D6"/>
+            <a:srgbClr val="10B981"/>
           </a:solidFill>
           <a:ln w="12700">
             <a:solidFill>
-              <a:srgbClr val="BFE3D6"/>
+              <a:srgbClr val="10B981"/>
             </a:solidFill>
             <a:prstDash val="solid"/>
           </a:ln>
@@ -6853,11 +6853,11 @@
             <a:avLst/>
           </a:prstGeom>
           <a:solidFill>
-            <a:srgbClr val="BFE3D6"/>
+            <a:srgbClr val="10B981"/>
           </a:solidFill>
           <a:ln w="12700">
             <a:solidFill>
-              <a:srgbClr val="BFE3D6"/>
+              <a:srgbClr val="10B981"/>
             </a:solidFill>
             <a:prstDash val="solid"/>
           </a:ln>
@@ -6929,7 +6929,7 @@
             <a:r>
               <a:rPr lang="ar-SA" altLang="en-US" sz="900" dirty="0">
                 <a:solidFill>
-                  <a:srgbClr val="7A8A84"/>
+                  <a:srgbClr val="64748B"/>
                 </a:solidFill>
                 <a:latin typeface="Arial" pitchFamily="34" charset="0"/>
                 <a:ea typeface="Arial" pitchFamily="34" charset="-122"/>
@@ -6968,7 +6968,7 @@
             <a:r>
               <a:rPr lang="en-US" sz="900" dirty="0">
                 <a:solidFill>
-                  <a:srgbClr val="7A8A84"/>
+                  <a:srgbClr val="64748B"/>
                 </a:solidFill>
                 <a:latin typeface="Arial" pitchFamily="34" charset="0"/>
                 <a:ea typeface="Arial" pitchFamily="34" charset="-122"/>
@@ -6994,7 +6994,7 @@
     <p:bg>
       <p:bgPr>
         <a:solidFill>
-          <a:srgbClr val="F4F7F5"/>
+          <a:srgbClr val="F8FAFC"/>
         </a:solidFill>
       </p:bgPr>
     </p:bg>
@@ -7039,7 +7039,7 @@
             <a:r>
               <a:rPr lang="ar-SA" altLang="en-US" sz="3000" b="1" dirty="0">
                 <a:solidFill>
-                  <a:srgbClr val="12241F"/>
+                  <a:srgbClr val="0F172A"/>
                 </a:solidFill>
                 <a:latin typeface="Arial" pitchFamily="34" charset="0"/>
                 <a:ea typeface="Arial" pitchFamily="34" charset="-122"/>
@@ -7078,7 +7078,7 @@
             <a:r>
               <a:rPr lang="ar-SA" altLang="en-US" sz="1400" dirty="0">
                 <a:solidFill>
-                  <a:srgbClr val="4A5C56"/>
+                  <a:srgbClr val="475569"/>
                 </a:solidFill>
                 <a:latin typeface="Arial" pitchFamily="34" charset="0"/>
                 <a:ea typeface="Arial" pitchFamily="34" charset="-122"/>
@@ -7105,11 +7105,11 @@
             <a:avLst/>
           </a:prstGeom>
           <a:solidFill>
-            <a:srgbClr val="1D6B58"/>
+            <a:srgbClr val="10B981"/>
           </a:solidFill>
           <a:ln w="12700">
             <a:solidFill>
-              <a:srgbClr val="1D6B58"/>
+              <a:srgbClr val="10B981"/>
             </a:solidFill>
             <a:prstDash val="solid"/>
           </a:ln>
@@ -7166,7 +7166,7 @@
             <a:r>
               <a:rPr lang="ar-SA" altLang="en-US" sz="1500" b="1" dirty="0">
                 <a:solidFill>
-                  <a:srgbClr val="12241F"/>
+                  <a:srgbClr val="0F172A"/>
                 </a:solidFill>
                 <a:latin typeface="Arial" pitchFamily="34" charset="0"/>
                 <a:ea typeface="Arial" pitchFamily="34" charset="-122"/>
@@ -7205,7 +7205,7 @@
             <a:r>
               <a:rPr lang="ar-SA" altLang="en-US" sz="1100" dirty="0">
                 <a:solidFill>
-                  <a:srgbClr val="4A5C56"/>
+                  <a:srgbClr val="475569"/>
                 </a:solidFill>
                 <a:latin typeface="Arial" pitchFamily="34" charset="0"/>
                 <a:ea typeface="Arial" pitchFamily="34" charset="-122"/>
@@ -7256,11 +7256,11 @@
             <a:avLst/>
           </a:prstGeom>
           <a:solidFill>
-            <a:srgbClr val="1D6B58"/>
+            <a:srgbClr val="10B981"/>
           </a:solidFill>
           <a:ln w="12700">
             <a:solidFill>
-              <a:srgbClr val="1D6B58"/>
+              <a:srgbClr val="10B981"/>
             </a:solidFill>
             <a:prstDash val="solid"/>
           </a:ln>
@@ -7317,7 +7317,7 @@
             <a:r>
               <a:rPr lang="ar-SA" altLang="en-US" sz="1500" b="1" dirty="0">
                 <a:solidFill>
-                  <a:srgbClr val="12241F"/>
+                  <a:srgbClr val="0F172A"/>
                 </a:solidFill>
                 <a:latin typeface="Arial" pitchFamily="34" charset="0"/>
                 <a:ea typeface="Arial" pitchFamily="34" charset="-122"/>
@@ -7356,7 +7356,7 @@
             <a:r>
               <a:rPr lang="ar-SA" altLang="en-US" sz="1100" dirty="0">
                 <a:solidFill>
-                  <a:srgbClr val="4A5C56"/>
+                  <a:srgbClr val="475569"/>
                 </a:solidFill>
                 <a:latin typeface="Arial" pitchFamily="34" charset="0"/>
                 <a:ea typeface="Arial" pitchFamily="34" charset="-122"/>
@@ -7407,11 +7407,11 @@
             <a:avLst/>
           </a:prstGeom>
           <a:solidFill>
-            <a:srgbClr val="1D6B58"/>
+            <a:srgbClr val="10B981"/>
           </a:solidFill>
           <a:ln w="12700">
             <a:solidFill>
-              <a:srgbClr val="1D6B58"/>
+              <a:srgbClr val="10B981"/>
             </a:solidFill>
             <a:prstDash val="solid"/>
           </a:ln>
@@ -7468,7 +7468,7 @@
             <a:r>
               <a:rPr lang="ar-SA" altLang="en-US" sz="1500" b="1" dirty="0">
                 <a:solidFill>
-                  <a:srgbClr val="12241F"/>
+                  <a:srgbClr val="0F172A"/>
                 </a:solidFill>
                 <a:latin typeface="Arial" pitchFamily="34" charset="0"/>
                 <a:ea typeface="Arial" pitchFamily="34" charset="-122"/>
@@ -7507,7 +7507,7 @@
             <a:r>
               <a:rPr lang="ar-SA" altLang="en-US" sz="1100" dirty="0">
                 <a:solidFill>
-                  <a:srgbClr val="4A5C56"/>
+                  <a:srgbClr val="475569"/>
                 </a:solidFill>
                 <a:latin typeface="Arial" pitchFamily="34" charset="0"/>
                 <a:ea typeface="Arial" pitchFamily="34" charset="-122"/>
@@ -7558,11 +7558,11 @@
             <a:avLst/>
           </a:prstGeom>
           <a:solidFill>
-            <a:srgbClr val="1D6B58"/>
+            <a:srgbClr val="10B981"/>
           </a:solidFill>
           <a:ln w="12700">
             <a:solidFill>
-              <a:srgbClr val="1D6B58"/>
+              <a:srgbClr val="10B981"/>
             </a:solidFill>
             <a:prstDash val="solid"/>
           </a:ln>
@@ -7619,7 +7619,7 @@
             <a:r>
               <a:rPr lang="ar-SA" altLang="en-US" sz="1500" b="1" dirty="0">
                 <a:solidFill>
-                  <a:srgbClr val="12241F"/>
+                  <a:srgbClr val="0F172A"/>
                 </a:solidFill>
                 <a:latin typeface="Arial" pitchFamily="34" charset="0"/>
                 <a:ea typeface="Arial" pitchFamily="34" charset="-122"/>
@@ -7658,7 +7658,7 @@
             <a:r>
               <a:rPr lang="ar-SA" altLang="en-US" sz="1100" dirty="0">
                 <a:solidFill>
-                  <a:srgbClr val="4A5C56"/>
+                  <a:srgbClr val="475569"/>
                 </a:solidFill>
                 <a:latin typeface="Arial" pitchFamily="34" charset="0"/>
                 <a:ea typeface="Arial" pitchFamily="34" charset="-122"/>
@@ -7709,11 +7709,11 @@
             <a:avLst/>
           </a:prstGeom>
           <a:solidFill>
-            <a:srgbClr val="1D6B58"/>
+            <a:srgbClr val="10B981"/>
           </a:solidFill>
           <a:ln w="12700">
             <a:solidFill>
-              <a:srgbClr val="1D6B58"/>
+              <a:srgbClr val="10B981"/>
             </a:solidFill>
             <a:prstDash val="solid"/>
           </a:ln>
@@ -7770,7 +7770,7 @@
             <a:r>
               <a:rPr lang="ar-SA" altLang="en-US" sz="1500" b="1" dirty="0">
                 <a:solidFill>
-                  <a:srgbClr val="12241F"/>
+                  <a:srgbClr val="0F172A"/>
                 </a:solidFill>
                 <a:latin typeface="Arial" pitchFamily="34" charset="0"/>
                 <a:ea typeface="Arial" pitchFamily="34" charset="-122"/>
@@ -7809,7 +7809,7 @@
             <a:r>
               <a:rPr lang="ar-SA" altLang="en-US" sz="1100" dirty="0">
                 <a:solidFill>
-                  <a:srgbClr val="4A5C56"/>
+                  <a:srgbClr val="475569"/>
                 </a:solidFill>
                 <a:latin typeface="Arial" pitchFamily="34" charset="0"/>
                 <a:ea typeface="Arial" pitchFamily="34" charset="-122"/>
@@ -7860,11 +7860,11 @@
             <a:avLst/>
           </a:prstGeom>
           <a:solidFill>
-            <a:srgbClr val="1D6B58"/>
+            <a:srgbClr val="10B981"/>
           </a:solidFill>
           <a:ln w="12700">
             <a:solidFill>
-              <a:srgbClr val="1D6B58"/>
+              <a:srgbClr val="10B981"/>
             </a:solidFill>
             <a:prstDash val="solid"/>
           </a:ln>
@@ -7921,7 +7921,7 @@
             <a:r>
               <a:rPr lang="ar-SA" altLang="en-US" sz="1500" b="1" dirty="0">
                 <a:solidFill>
-                  <a:srgbClr val="12241F"/>
+                  <a:srgbClr val="0F172A"/>
                 </a:solidFill>
                 <a:latin typeface="Arial" pitchFamily="34" charset="0"/>
                 <a:ea typeface="Arial" pitchFamily="34" charset="-122"/>
@@ -7960,7 +7960,7 @@
             <a:r>
               <a:rPr lang="ar-SA" altLang="en-US" sz="1100" dirty="0">
                 <a:solidFill>
-                  <a:srgbClr val="4A5C56"/>
+                  <a:srgbClr val="475569"/>
                 </a:solidFill>
                 <a:latin typeface="Arial" pitchFamily="34" charset="0"/>
                 <a:ea typeface="Arial" pitchFamily="34" charset="-122"/>
@@ -8011,11 +8011,11 @@
             <a:avLst/>
           </a:prstGeom>
           <a:solidFill>
-            <a:srgbClr val="A8660F"/>
+            <a:srgbClr val="FACC15"/>
           </a:solidFill>
           <a:ln w="12700">
             <a:solidFill>
-              <a:srgbClr val="A8660F"/>
+              <a:srgbClr val="FACC15"/>
             </a:solidFill>
             <a:prstDash val="solid"/>
           </a:ln>
@@ -8072,7 +8072,7 @@
             <a:r>
               <a:rPr lang="ar-SA" altLang="en-US" sz="1500" b="1" dirty="0">
                 <a:solidFill>
-                  <a:srgbClr val="12241F"/>
+                  <a:srgbClr val="0F172A"/>
                 </a:solidFill>
                 <a:latin typeface="Arial" pitchFamily="34" charset="0"/>
                 <a:ea typeface="Arial" pitchFamily="34" charset="-122"/>
@@ -8111,7 +8111,7 @@
             <a:r>
               <a:rPr lang="ar-SA" altLang="en-US" sz="1100" dirty="0">
                 <a:solidFill>
-                  <a:srgbClr val="4A5C56"/>
+                  <a:srgbClr val="475569"/>
                 </a:solidFill>
                 <a:latin typeface="Arial" pitchFamily="34" charset="0"/>
                 <a:ea typeface="Arial" pitchFamily="34" charset="-122"/>
@@ -8144,7 +8144,7 @@
           </a:solidFill>
           <a:ln w="12700">
             <a:solidFill>
-              <a:srgbClr val="D9E1DC"/>
+              <a:srgbClr val="E2E8F0"/>
             </a:solidFill>
             <a:prstDash val="solid"/>
           </a:ln>
@@ -8177,7 +8177,7 @@
             <a:r>
               <a:rPr lang="ar-SA" altLang="en-US" sz="1250" b="1" dirty="0">
                 <a:solidFill>
-                  <a:srgbClr val="1D6B58"/>
+                  <a:srgbClr val="047857"/>
                 </a:solidFill>
                 <a:latin typeface="Arial" pitchFamily="34" charset="0"/>
                 <a:ea typeface="Arial" pitchFamily="34" charset="-122"/>
@@ -8216,7 +8216,7 @@
             <a:r>
               <a:rPr lang="ar-SA" altLang="en-US" sz="900" dirty="0">
                 <a:solidFill>
-                  <a:srgbClr val="7A8A84"/>
+                  <a:srgbClr val="64748B"/>
                 </a:solidFill>
                 <a:latin typeface="Arial" pitchFamily="34" charset="0"/>
                 <a:ea typeface="Arial" pitchFamily="34" charset="-122"/>
@@ -8255,7 +8255,7 @@
             <a:r>
               <a:rPr lang="en-US" sz="900" dirty="0">
                 <a:solidFill>
-                  <a:srgbClr val="7A8A84"/>
+                  <a:srgbClr val="64748B"/>
                 </a:solidFill>
                 <a:latin typeface="Arial" pitchFamily="34" charset="0"/>
                 <a:ea typeface="Arial" pitchFamily="34" charset="-122"/>
@@ -8326,7 +8326,7 @@
             <a:r>
               <a:rPr lang="ar-SA" altLang="en-US" sz="3000" b="1" dirty="0">
                 <a:solidFill>
-                  <a:srgbClr val="12241F"/>
+                  <a:srgbClr val="0F172A"/>
                 </a:solidFill>
                 <a:latin typeface="Arial" pitchFamily="34" charset="0"/>
                 <a:ea typeface="Arial" pitchFamily="34" charset="-122"/>
@@ -8365,7 +8365,7 @@
             <a:r>
               <a:rPr lang="ar-SA" altLang="en-US" sz="1400" dirty="0">
                 <a:solidFill>
-                  <a:srgbClr val="4A5C56"/>
+                  <a:srgbClr val="475569"/>
                 </a:solidFill>
                 <a:latin typeface="Arial" pitchFamily="34" charset="0"/>
                 <a:ea typeface="Arial" pitchFamily="34" charset="-122"/>
@@ -8398,7 +8398,7 @@
           </a:solidFill>
           <a:ln w="9525">
             <a:solidFill>
-              <a:srgbClr val="D9E1DC"/>
+              <a:srgbClr val="E2E8F0"/>
             </a:solidFill>
             <a:prstDash val="solid"/>
           </a:ln>
@@ -8428,11 +8428,11 @@
             </a:avLst>
           </a:prstGeom>
           <a:solidFill>
-            <a:srgbClr val="F8EAD3"/>
+            <a:srgbClr val="FEF9C3"/>
           </a:solidFill>
           <a:ln w="12700">
             <a:solidFill>
-              <a:srgbClr val="F8EAD3"/>
+              <a:srgbClr val="FEF9C3"/>
             </a:solidFill>
             <a:prstDash val="solid"/>
           </a:ln>
@@ -8465,7 +8465,7 @@
             <a:r>
               <a:rPr lang="ar-SA" altLang="en-US" sz="1200" b="1" dirty="0">
                 <a:solidFill>
-                  <a:srgbClr val="A8660F"/>
+                  <a:srgbClr val="A16207"/>
                 </a:solidFill>
                 <a:latin typeface="Arial" pitchFamily="34" charset="0"/>
                 <a:ea typeface="Arial" pitchFamily="34" charset="-122"/>
@@ -8504,7 +8504,7 @@
             <a:r>
               <a:rPr lang="ar-SA" altLang="en-US" sz="1800" b="1" dirty="0">
                 <a:solidFill>
-                  <a:srgbClr val="12241F"/>
+                  <a:srgbClr val="0F172A"/>
                 </a:solidFill>
                 <a:latin typeface="Arial" pitchFamily="34" charset="0"/>
                 <a:ea typeface="Arial" pitchFamily="34" charset="-122"/>
@@ -8543,7 +8543,7 @@
             <a:r>
               <a:rPr lang="ar-SA" altLang="en-US" sz="1250" dirty="0">
                 <a:solidFill>
-                  <a:srgbClr val="4A5C56"/>
+                  <a:srgbClr val="475569"/>
                 </a:solidFill>
                 <a:latin typeface="Arial" pitchFamily="34" charset="0"/>
                 <a:ea typeface="Arial" pitchFamily="34" charset="-122"/>
@@ -8582,7 +8582,7 @@
             <a:r>
               <a:rPr lang="ar-SA" altLang="en-US" sz="1250" dirty="0">
                 <a:solidFill>
-                  <a:srgbClr val="4A5C56"/>
+                  <a:srgbClr val="475569"/>
                 </a:solidFill>
                 <a:latin typeface="Arial" pitchFamily="34" charset="0"/>
                 <a:ea typeface="Arial" pitchFamily="34" charset="-122"/>
@@ -8621,7 +8621,7 @@
             <a:r>
               <a:rPr lang="ar-SA" altLang="en-US" sz="1400" b="1" dirty="0">
                 <a:solidFill>
-                  <a:srgbClr val="1D6B58"/>
+                  <a:srgbClr val="047857"/>
                 </a:solidFill>
                 <a:latin typeface="Arial" pitchFamily="34" charset="0"/>
                 <a:ea typeface="Arial" pitchFamily="34" charset="-122"/>
@@ -8650,11 +8650,11 @@
             </a:avLst>
           </a:prstGeom>
           <a:solidFill>
-            <a:srgbClr val="1D6B58"/>
+            <a:srgbClr val="10B981"/>
           </a:solidFill>
           <a:ln w="12700">
             <a:solidFill>
-              <a:srgbClr val="1D6B58"/>
+              <a:srgbClr val="10B981"/>
             </a:solidFill>
             <a:prstDash val="solid"/>
           </a:ln>
@@ -8687,7 +8687,7 @@
             <a:r>
               <a:rPr lang="ar-SA" altLang="en-US" sz="1300" b="1" dirty="0">
                 <a:solidFill>
-                  <a:srgbClr val="FFFFFF"/>
+                  <a:srgbClr val="0F172A"/>
                 </a:solidFill>
                 <a:latin typeface="Arial" pitchFamily="34" charset="0"/>
                 <a:ea typeface="Arial" pitchFamily="34" charset="-122"/>
@@ -8716,11 +8716,11 @@
             </a:avLst>
           </a:prstGeom>
           <a:solidFill>
-            <a:srgbClr val="F4F7F5"/>
+            <a:srgbClr val="F8FAFC"/>
           </a:solidFill>
           <a:ln w="9525">
             <a:solidFill>
-              <a:srgbClr val="D9E1DC"/>
+              <a:srgbClr val="E2E8F0"/>
             </a:solidFill>
             <a:prstDash val="solid"/>
           </a:ln>
@@ -8760,7 +8760,7 @@
             <a:r>
               <a:rPr lang="ar-SA" altLang="en-US" sz="1300" b="1" dirty="0">
                 <a:solidFill>
-                  <a:srgbClr val="7A8A84"/>
+                  <a:srgbClr val="64748B"/>
                 </a:solidFill>
                 <a:latin typeface="Arial" pitchFamily="34" charset="0"/>
                 <a:ea typeface="Arial" pitchFamily="34" charset="-122"/>
@@ -8799,7 +8799,7 @@
             <a:r>
               <a:rPr lang="ar-SA" altLang="en-US" sz="3600" b="1" dirty="0">
                 <a:solidFill>
-                  <a:srgbClr val="23794A"/>
+                  <a:srgbClr val="15803D"/>
                 </a:solidFill>
                 <a:latin typeface="Arial" pitchFamily="34" charset="0"/>
                 <a:ea typeface="Arial" pitchFamily="34" charset="-122"/>
@@ -8838,7 +8838,7 @@
             <a:r>
               <a:rPr lang="ar-SA" altLang="en-US" sz="1100" dirty="0">
                 <a:solidFill>
-                  <a:srgbClr val="4A5C56"/>
+                  <a:srgbClr val="475569"/>
                 </a:solidFill>
                 <a:latin typeface="Arial" pitchFamily="34" charset="0"/>
                 <a:ea typeface="Arial" pitchFamily="34" charset="-122"/>
@@ -8877,7 +8877,7 @@
             <a:r>
               <a:rPr lang="ar-SA" altLang="en-US" sz="2600" b="1" dirty="0">
                 <a:solidFill>
-                  <a:srgbClr val="7A8A84"/>
+                  <a:srgbClr val="64748B"/>
                 </a:solidFill>
                 <a:latin typeface="Arial" pitchFamily="34" charset="0"/>
                 <a:ea typeface="Arial" pitchFamily="34" charset="-122"/>
@@ -8916,7 +8916,7 @@
             <a:r>
               <a:rPr lang="ar-SA" altLang="en-US" sz="1100" dirty="0">
                 <a:solidFill>
-                  <a:srgbClr val="4A5C56"/>
+                  <a:srgbClr val="475569"/>
                 </a:solidFill>
                 <a:latin typeface="Arial" pitchFamily="34" charset="0"/>
                 <a:ea typeface="Arial" pitchFamily="34" charset="-122"/>
@@ -8955,7 +8955,7 @@
             <a:r>
               <a:rPr lang="ar-SA" altLang="en-US" sz="1400" b="1" dirty="0">
                 <a:solidFill>
-                  <a:srgbClr val="23794A"/>
+                  <a:srgbClr val="15803D"/>
                 </a:solidFill>
                 <a:latin typeface="Arial" pitchFamily="34" charset="0"/>
                 <a:ea typeface="Arial" pitchFamily="34" charset="-122"/>
@@ -8994,7 +8994,7 @@
             <a:r>
               <a:rPr lang="ar-SA" altLang="en-US" sz="900" dirty="0">
                 <a:solidFill>
-                  <a:srgbClr val="7A8A84"/>
+                  <a:srgbClr val="64748B"/>
                 </a:solidFill>
                 <a:latin typeface="Arial" pitchFamily="34" charset="0"/>
                 <a:ea typeface="Arial" pitchFamily="34" charset="-122"/>
@@ -9033,7 +9033,7 @@
             <a:r>
               <a:rPr lang="en-US" sz="900" dirty="0">
                 <a:solidFill>
-                  <a:srgbClr val="7A8A84"/>
+                  <a:srgbClr val="64748B"/>
                 </a:solidFill>
                 <a:latin typeface="Arial" pitchFamily="34" charset="0"/>
                 <a:ea typeface="Arial" pitchFamily="34" charset="-122"/>
@@ -9104,7 +9104,7 @@
             <a:r>
               <a:rPr lang="ar-SA" altLang="en-US" sz="3000" b="1" dirty="0">
                 <a:solidFill>
-                  <a:srgbClr val="12241F"/>
+                  <a:srgbClr val="0F172A"/>
                 </a:solidFill>
                 <a:latin typeface="Arial" pitchFamily="34" charset="0"/>
                 <a:ea typeface="Arial" pitchFamily="34" charset="-122"/>
@@ -9143,7 +9143,7 @@
             <a:r>
               <a:rPr lang="ar-SA" altLang="en-US" sz="1400" dirty="0">
                 <a:solidFill>
-                  <a:srgbClr val="4A5C56"/>
+                  <a:srgbClr val="475569"/>
                 </a:solidFill>
                 <a:latin typeface="Arial" pitchFamily="34" charset="0"/>
                 <a:ea typeface="Arial" pitchFamily="34" charset="-122"/>
@@ -9172,11 +9172,11 @@
             </a:avLst>
           </a:prstGeom>
           <a:solidFill>
-            <a:srgbClr val="F4F7F5"/>
+            <a:srgbClr val="F8FAFC"/>
           </a:solidFill>
           <a:ln w="9525">
             <a:solidFill>
-              <a:srgbClr val="D9E1DC"/>
+              <a:srgbClr val="E2E8F0"/>
             </a:solidFill>
             <a:prstDash val="solid"/>
           </a:ln>
@@ -9204,11 +9204,11 @@
             <a:avLst/>
           </a:prstGeom>
           <a:solidFill>
-            <a:srgbClr val="DCEDE6"/>
+            <a:srgbClr val="D1FAE5"/>
           </a:solidFill>
           <a:ln w="12700">
             <a:solidFill>
-              <a:srgbClr val="DCEDE6"/>
+              <a:srgbClr val="D1FAE5"/>
             </a:solidFill>
             <a:prstDash val="solid"/>
           </a:ln>
@@ -9265,7 +9265,7 @@
             <a:r>
               <a:rPr lang="ar-SA" altLang="en-US" sz="1500" b="1" dirty="0">
                 <a:solidFill>
-                  <a:srgbClr val="12241F"/>
+                  <a:srgbClr val="0F172A"/>
                 </a:solidFill>
                 <a:latin typeface="Arial" pitchFamily="34" charset="0"/>
                 <a:ea typeface="Arial" pitchFamily="34" charset="-122"/>
@@ -9304,7 +9304,7 @@
             <a:r>
               <a:rPr lang="ar-SA" altLang="en-US" sz="1150" dirty="0">
                 <a:solidFill>
-                  <a:srgbClr val="4A5C56"/>
+                  <a:srgbClr val="475569"/>
                 </a:solidFill>
                 <a:latin typeface="Arial" pitchFamily="34" charset="0"/>
                 <a:ea typeface="Arial" pitchFamily="34" charset="-122"/>
@@ -9333,11 +9333,11 @@
             </a:avLst>
           </a:prstGeom>
           <a:solidFill>
-            <a:srgbClr val="F4F7F5"/>
+            <a:srgbClr val="F8FAFC"/>
           </a:solidFill>
           <a:ln w="9525">
             <a:solidFill>
-              <a:srgbClr val="D9E1DC"/>
+              <a:srgbClr val="E2E8F0"/>
             </a:solidFill>
             <a:prstDash val="solid"/>
           </a:ln>
@@ -9365,11 +9365,11 @@
             <a:avLst/>
           </a:prstGeom>
           <a:solidFill>
-            <a:srgbClr val="DCEDE6"/>
+            <a:srgbClr val="D1FAE5"/>
           </a:solidFill>
           <a:ln w="12700">
             <a:solidFill>
-              <a:srgbClr val="DCEDE6"/>
+              <a:srgbClr val="D1FAE5"/>
             </a:solidFill>
             <a:prstDash val="solid"/>
           </a:ln>
@@ -9426,7 +9426,7 @@
             <a:r>
               <a:rPr lang="ar-SA" altLang="en-US" sz="1500" b="1" dirty="0">
                 <a:solidFill>
-                  <a:srgbClr val="12241F"/>
+                  <a:srgbClr val="0F172A"/>
                 </a:solidFill>
                 <a:latin typeface="Arial" pitchFamily="34" charset="0"/>
                 <a:ea typeface="Arial" pitchFamily="34" charset="-122"/>
@@ -9465,7 +9465,7 @@
             <a:r>
               <a:rPr lang="ar-SA" altLang="en-US" sz="1150" dirty="0">
                 <a:solidFill>
-                  <a:srgbClr val="4A5C56"/>
+                  <a:srgbClr val="475569"/>
                 </a:solidFill>
                 <a:latin typeface="Arial" pitchFamily="34" charset="0"/>
                 <a:ea typeface="Arial" pitchFamily="34" charset="-122"/>
@@ -9494,11 +9494,11 @@
             </a:avLst>
           </a:prstGeom>
           <a:solidFill>
-            <a:srgbClr val="F4F7F5"/>
+            <a:srgbClr val="F8FAFC"/>
           </a:solidFill>
           <a:ln w="9525">
             <a:solidFill>
-              <a:srgbClr val="D9E1DC"/>
+              <a:srgbClr val="E2E8F0"/>
             </a:solidFill>
             <a:prstDash val="solid"/>
           </a:ln>
@@ -9526,11 +9526,11 @@
             <a:avLst/>
           </a:prstGeom>
           <a:solidFill>
-            <a:srgbClr val="DCEDE6"/>
+            <a:srgbClr val="D1FAE5"/>
           </a:solidFill>
           <a:ln w="12700">
             <a:solidFill>
-              <a:srgbClr val="DCEDE6"/>
+              <a:srgbClr val="D1FAE5"/>
             </a:solidFill>
             <a:prstDash val="solid"/>
           </a:ln>
@@ -9587,7 +9587,7 @@
             <a:r>
               <a:rPr lang="ar-SA" altLang="en-US" sz="1500" b="1" dirty="0">
                 <a:solidFill>
-                  <a:srgbClr val="12241F"/>
+                  <a:srgbClr val="0F172A"/>
                 </a:solidFill>
                 <a:latin typeface="Arial" pitchFamily="34" charset="0"/>
                 <a:ea typeface="Arial" pitchFamily="34" charset="-122"/>
@@ -9626,7 +9626,7 @@
             <a:r>
               <a:rPr lang="ar-SA" altLang="en-US" sz="1150" dirty="0">
                 <a:solidFill>
-                  <a:srgbClr val="4A5C56"/>
+                  <a:srgbClr val="475569"/>
                 </a:solidFill>
                 <a:latin typeface="Arial" pitchFamily="34" charset="0"/>
                 <a:ea typeface="Arial" pitchFamily="34" charset="-122"/>
@@ -9655,11 +9655,11 @@
             </a:avLst>
           </a:prstGeom>
           <a:solidFill>
-            <a:srgbClr val="F4F7F5"/>
+            <a:srgbClr val="F8FAFC"/>
           </a:solidFill>
           <a:ln w="9525">
             <a:solidFill>
-              <a:srgbClr val="D9E1DC"/>
+              <a:srgbClr val="E2E8F0"/>
             </a:solidFill>
             <a:prstDash val="solid"/>
           </a:ln>
@@ -9687,11 +9687,11 @@
             <a:avLst/>
           </a:prstGeom>
           <a:solidFill>
-            <a:srgbClr val="DCEDE6"/>
+            <a:srgbClr val="D1FAE5"/>
           </a:solidFill>
           <a:ln w="12700">
             <a:solidFill>
-              <a:srgbClr val="DCEDE6"/>
+              <a:srgbClr val="D1FAE5"/>
             </a:solidFill>
             <a:prstDash val="solid"/>
           </a:ln>
@@ -9748,7 +9748,7 @@
             <a:r>
               <a:rPr lang="ar-SA" altLang="en-US" sz="1500" b="1" dirty="0">
                 <a:solidFill>
-                  <a:srgbClr val="12241F"/>
+                  <a:srgbClr val="0F172A"/>
                 </a:solidFill>
                 <a:latin typeface="Arial" pitchFamily="34" charset="0"/>
                 <a:ea typeface="Arial" pitchFamily="34" charset="-122"/>
@@ -9787,7 +9787,7 @@
             <a:r>
               <a:rPr lang="ar-SA" altLang="en-US" sz="1150" dirty="0">
                 <a:solidFill>
-                  <a:srgbClr val="4A5C56"/>
+                  <a:srgbClr val="475569"/>
                 </a:solidFill>
                 <a:latin typeface="Arial" pitchFamily="34" charset="0"/>
                 <a:ea typeface="Arial" pitchFamily="34" charset="-122"/>
@@ -9816,11 +9816,11 @@
             </a:avLst>
           </a:prstGeom>
           <a:solidFill>
-            <a:srgbClr val="F4F7F5"/>
+            <a:srgbClr val="F8FAFC"/>
           </a:solidFill>
           <a:ln w="9525">
             <a:solidFill>
-              <a:srgbClr val="D9E1DC"/>
+              <a:srgbClr val="E2E8F0"/>
             </a:solidFill>
             <a:prstDash val="solid"/>
           </a:ln>
@@ -9848,11 +9848,11 @@
             <a:avLst/>
           </a:prstGeom>
           <a:solidFill>
-            <a:srgbClr val="DCEDE6"/>
+            <a:srgbClr val="D1FAE5"/>
           </a:solidFill>
           <a:ln w="12700">
             <a:solidFill>
-              <a:srgbClr val="DCEDE6"/>
+              <a:srgbClr val="D1FAE5"/>
             </a:solidFill>
             <a:prstDash val="solid"/>
           </a:ln>
@@ -9909,7 +9909,7 @@
             <a:r>
               <a:rPr lang="ar-SA" altLang="en-US" sz="1500" b="1" dirty="0">
                 <a:solidFill>
-                  <a:srgbClr val="12241F"/>
+                  <a:srgbClr val="0F172A"/>
                 </a:solidFill>
                 <a:latin typeface="Arial" pitchFamily="34" charset="0"/>
                 <a:ea typeface="Arial" pitchFamily="34" charset="-122"/>
@@ -9948,7 +9948,7 @@
             <a:r>
               <a:rPr lang="ar-SA" altLang="en-US" sz="1150" dirty="0">
                 <a:solidFill>
-                  <a:srgbClr val="4A5C56"/>
+                  <a:srgbClr val="475569"/>
                 </a:solidFill>
                 <a:latin typeface="Arial" pitchFamily="34" charset="0"/>
                 <a:ea typeface="Arial" pitchFamily="34" charset="-122"/>
@@ -9977,11 +9977,11 @@
             </a:avLst>
           </a:prstGeom>
           <a:solidFill>
-            <a:srgbClr val="F4F7F5"/>
+            <a:srgbClr val="F8FAFC"/>
           </a:solidFill>
           <a:ln w="9525">
             <a:solidFill>
-              <a:srgbClr val="D9E1DC"/>
+              <a:srgbClr val="E2E8F0"/>
             </a:solidFill>
             <a:prstDash val="solid"/>
           </a:ln>
@@ -10009,11 +10009,11 @@
             <a:avLst/>
           </a:prstGeom>
           <a:solidFill>
-            <a:srgbClr val="DCEDE6"/>
+            <a:srgbClr val="D1FAE5"/>
           </a:solidFill>
           <a:ln w="12700">
             <a:solidFill>
-              <a:srgbClr val="DCEDE6"/>
+              <a:srgbClr val="D1FAE5"/>
             </a:solidFill>
             <a:prstDash val="solid"/>
           </a:ln>
@@ -10070,7 +10070,7 @@
             <a:r>
               <a:rPr lang="ar-SA" altLang="en-US" sz="1500" b="1" dirty="0">
                 <a:solidFill>
-                  <a:srgbClr val="12241F"/>
+                  <a:srgbClr val="0F172A"/>
                 </a:solidFill>
                 <a:latin typeface="Arial" pitchFamily="34" charset="0"/>
                 <a:ea typeface="Arial" pitchFamily="34" charset="-122"/>
@@ -10109,7 +10109,7 @@
             <a:r>
               <a:rPr lang="ar-SA" altLang="en-US" sz="1150" dirty="0">
                 <a:solidFill>
-                  <a:srgbClr val="4A5C56"/>
+                  <a:srgbClr val="475569"/>
                 </a:solidFill>
                 <a:latin typeface="Arial" pitchFamily="34" charset="0"/>
                 <a:ea typeface="Arial" pitchFamily="34" charset="-122"/>
@@ -10148,7 +10148,7 @@
             <a:r>
               <a:rPr lang="ar-SA" altLang="en-US" sz="900" dirty="0">
                 <a:solidFill>
-                  <a:srgbClr val="7A8A84"/>
+                  <a:srgbClr val="64748B"/>
                 </a:solidFill>
                 <a:latin typeface="Arial" pitchFamily="34" charset="0"/>
                 <a:ea typeface="Arial" pitchFamily="34" charset="-122"/>
@@ -10187,7 +10187,7 @@
             <a:r>
               <a:rPr lang="en-US" sz="900" dirty="0">
                 <a:solidFill>
-                  <a:srgbClr val="7A8A84"/>
+                  <a:srgbClr val="64748B"/>
                 </a:solidFill>
                 <a:latin typeface="Arial" pitchFamily="34" charset="0"/>
                 <a:ea typeface="Arial" pitchFamily="34" charset="-122"/>
@@ -10258,7 +10258,7 @@
             <a:r>
               <a:rPr lang="ar-SA" altLang="en-US" sz="3000" b="1" dirty="0">
                 <a:solidFill>
-                  <a:srgbClr val="12241F"/>
+                  <a:srgbClr val="0F172A"/>
                 </a:solidFill>
                 <a:latin typeface="Arial" pitchFamily="34" charset="0"/>
                 <a:ea typeface="Arial" pitchFamily="34" charset="-122"/>
@@ -10297,7 +10297,7 @@
             <a:r>
               <a:rPr lang="ar-SA" altLang="en-US" sz="1400" dirty="0">
                 <a:solidFill>
-                  <a:srgbClr val="4A5C56"/>
+                  <a:srgbClr val="475569"/>
                 </a:solidFill>
                 <a:latin typeface="Arial" pitchFamily="34" charset="0"/>
                 <a:ea typeface="Arial" pitchFamily="34" charset="-122"/>
@@ -10326,11 +10326,11 @@
             </a:avLst>
           </a:prstGeom>
           <a:solidFill>
-            <a:srgbClr val="F4F7F5"/>
+            <a:srgbClr val="F8FAFC"/>
           </a:solidFill>
           <a:ln w="9525">
             <a:solidFill>
-              <a:srgbClr val="D9E1DC"/>
+              <a:srgbClr val="E2E8F0"/>
             </a:solidFill>
             <a:prstDash val="solid"/>
           </a:ln>
@@ -10370,7 +10370,7 @@
             <a:r>
               <a:rPr lang="ar-SA" altLang="en-US" sz="3000" b="1" dirty="0">
                 <a:solidFill>
-                  <a:srgbClr val="1D6B58"/>
+                  <a:srgbClr val="047857"/>
                 </a:solidFill>
                 <a:latin typeface="Arial" pitchFamily="34" charset="0"/>
                 <a:ea typeface="Arial" pitchFamily="34" charset="-122"/>
@@ -10409,7 +10409,7 @@
             <a:r>
               <a:rPr lang="ar-SA" altLang="en-US" sz="1200" dirty="0">
                 <a:solidFill>
-                  <a:srgbClr val="4A5C56"/>
+                  <a:srgbClr val="475569"/>
                 </a:solidFill>
                 <a:latin typeface="Arial" pitchFamily="34" charset="0"/>
                 <a:ea typeface="Arial" pitchFamily="34" charset="-122"/>
@@ -10438,11 +10438,11 @@
             </a:avLst>
           </a:prstGeom>
           <a:solidFill>
-            <a:srgbClr val="F4F7F5"/>
+            <a:srgbClr val="F8FAFC"/>
           </a:solidFill>
           <a:ln w="9525">
             <a:solidFill>
-              <a:srgbClr val="D9E1DC"/>
+              <a:srgbClr val="E2E8F0"/>
             </a:solidFill>
             <a:prstDash val="solid"/>
           </a:ln>
@@ -10482,7 +10482,7 @@
             <a:r>
               <a:rPr lang="ar-SA" altLang="en-US" sz="3000" b="1" dirty="0">
                 <a:solidFill>
-                  <a:srgbClr val="1D6B58"/>
+                  <a:srgbClr val="047857"/>
                 </a:solidFill>
                 <a:latin typeface="Arial" pitchFamily="34" charset="0"/>
                 <a:ea typeface="Arial" pitchFamily="34" charset="-122"/>
@@ -10521,7 +10521,7 @@
             <a:r>
               <a:rPr lang="ar-SA" altLang="en-US" sz="1200" dirty="0">
                 <a:solidFill>
-                  <a:srgbClr val="4A5C56"/>
+                  <a:srgbClr val="475569"/>
                 </a:solidFill>
                 <a:latin typeface="Arial" pitchFamily="34" charset="0"/>
                 <a:ea typeface="Arial" pitchFamily="34" charset="-122"/>
@@ -10550,11 +10550,11 @@
             </a:avLst>
           </a:prstGeom>
           <a:solidFill>
-            <a:srgbClr val="F4F7F5"/>
+            <a:srgbClr val="F8FAFC"/>
           </a:solidFill>
           <a:ln w="9525">
             <a:solidFill>
-              <a:srgbClr val="D9E1DC"/>
+              <a:srgbClr val="E2E8F0"/>
             </a:solidFill>
             <a:prstDash val="solid"/>
           </a:ln>
@@ -10594,7 +10594,7 @@
             <a:r>
               <a:rPr lang="ar-SA" altLang="en-US" sz="3000" b="1" dirty="0">
                 <a:solidFill>
-                  <a:srgbClr val="1D6B58"/>
+                  <a:srgbClr val="047857"/>
                 </a:solidFill>
                 <a:latin typeface="Arial" pitchFamily="34" charset="0"/>
                 <a:ea typeface="Arial" pitchFamily="34" charset="-122"/>
@@ -10633,7 +10633,7 @@
             <a:r>
               <a:rPr lang="ar-SA" altLang="en-US" sz="1200" dirty="0">
                 <a:solidFill>
-                  <a:srgbClr val="4A5C56"/>
+                  <a:srgbClr val="475569"/>
                 </a:solidFill>
                 <a:latin typeface="Arial" pitchFamily="34" charset="0"/>
                 <a:ea typeface="Arial" pitchFamily="34" charset="-122"/>
@@ -10672,7 +10672,7 @@
             <a:r>
               <a:rPr lang="ar-SA" altLang="en-US" sz="1400" b="1" dirty="0">
                 <a:solidFill>
-                  <a:srgbClr val="12241F"/>
+                  <a:srgbClr val="0F172A"/>
                 </a:solidFill>
                 <a:latin typeface="Arial" pitchFamily="34" charset="0"/>
                 <a:ea typeface="Arial" pitchFamily="34" charset="-122"/>
@@ -10711,7 +10711,7 @@
             <a:r>
               <a:rPr lang="ar-SA" altLang="en-US" sz="1250" dirty="0">
                 <a:solidFill>
-                  <a:srgbClr val="4A5C56"/>
+                  <a:srgbClr val="475569"/>
                 </a:solidFill>
                 <a:latin typeface="Arial" pitchFamily="34" charset="0"/>
                 <a:ea typeface="Arial" pitchFamily="34" charset="-122"/>
@@ -10750,7 +10750,7 @@
             <a:r>
               <a:rPr lang="ar-SA" altLang="en-US" sz="900" dirty="0">
                 <a:solidFill>
-                  <a:srgbClr val="7A8A84"/>
+                  <a:srgbClr val="64748B"/>
                 </a:solidFill>
                 <a:latin typeface="Arial" pitchFamily="34" charset="0"/>
                 <a:ea typeface="Arial" pitchFamily="34" charset="-122"/>
@@ -10789,7 +10789,7 @@
             <a:r>
               <a:rPr lang="ar-SA" altLang="en-US" sz="900" dirty="0">
                 <a:solidFill>
-                  <a:srgbClr val="7A8A84"/>
+                  <a:srgbClr val="64748B"/>
                 </a:solidFill>
                 <a:latin typeface="Arial" pitchFamily="34" charset="0"/>
                 <a:ea typeface="Arial" pitchFamily="34" charset="-122"/>
@@ -10828,7 +10828,7 @@
             <a:r>
               <a:rPr lang="en-US" sz="900" dirty="0">
                 <a:solidFill>
-                  <a:srgbClr val="7A8A84"/>
+                  <a:srgbClr val="64748B"/>
                 </a:solidFill>
                 <a:latin typeface="Arial" pitchFamily="34" charset="0"/>
                 <a:ea typeface="Arial" pitchFamily="34" charset="-122"/>
@@ -10854,7 +10854,7 @@
     <p:bg>
       <p:bgPr>
         <a:solidFill>
-          <a:srgbClr val="F4F7F5"/>
+          <a:srgbClr val="F8FAFC"/>
         </a:solidFill>
       </p:bgPr>
     </p:bg>
@@ -10899,7 +10899,7 @@
             <a:r>
               <a:rPr lang="ar-SA" altLang="en-US" sz="3000" b="1" dirty="0">
                 <a:solidFill>
-                  <a:srgbClr val="12241F"/>
+                  <a:srgbClr val="0F172A"/>
                 </a:solidFill>
                 <a:latin typeface="Arial" pitchFamily="34" charset="0"/>
                 <a:ea typeface="Arial" pitchFamily="34" charset="-122"/>
@@ -10938,7 +10938,7 @@
             <a:r>
               <a:rPr lang="ar-SA" altLang="en-US" sz="1400" dirty="0">
                 <a:solidFill>
-                  <a:srgbClr val="4A5C56"/>
+                  <a:srgbClr val="475569"/>
                 </a:solidFill>
                 <a:latin typeface="Arial" pitchFamily="34" charset="0"/>
                 <a:ea typeface="Arial" pitchFamily="34" charset="-122"/>
@@ -10971,7 +10971,7 @@
           </a:solidFill>
           <a:ln w="9525">
             <a:solidFill>
-              <a:srgbClr val="D9E1DC"/>
+              <a:srgbClr val="E2E8F0"/>
             </a:solidFill>
             <a:prstDash val="solid"/>
           </a:ln>
@@ -10999,11 +10999,11 @@
             <a:avLst/>
           </a:prstGeom>
           <a:solidFill>
-            <a:srgbClr val="DCEDE6"/>
+            <a:srgbClr val="D1FAE5"/>
           </a:solidFill>
           <a:ln w="12700">
             <a:solidFill>
-              <a:srgbClr val="DCEDE6"/>
+              <a:srgbClr val="D1FAE5"/>
             </a:solidFill>
             <a:prstDash val="solid"/>
           </a:ln>
@@ -11060,7 +11060,7 @@
             <a:r>
               <a:rPr lang="ar-SA" altLang="en-US" sz="1600" b="1" dirty="0">
                 <a:solidFill>
-                  <a:srgbClr val="12241F"/>
+                  <a:srgbClr val="0F172A"/>
                 </a:solidFill>
                 <a:latin typeface="Arial" pitchFamily="34" charset="0"/>
                 <a:ea typeface="Arial" pitchFamily="34" charset="-122"/>
@@ -11099,7 +11099,7 @@
             <a:r>
               <a:rPr lang="ar-SA" altLang="en-US" sz="1150" dirty="0">
                 <a:solidFill>
-                  <a:srgbClr val="4A5C56"/>
+                  <a:srgbClr val="475569"/>
                 </a:solidFill>
                 <a:latin typeface="Arial" pitchFamily="34" charset="0"/>
                 <a:ea typeface="Arial" pitchFamily="34" charset="-122"/>
@@ -11132,7 +11132,7 @@
           </a:solidFill>
           <a:ln w="9525">
             <a:solidFill>
-              <a:srgbClr val="D9E1DC"/>
+              <a:srgbClr val="E2E8F0"/>
             </a:solidFill>
             <a:prstDash val="solid"/>
           </a:ln>
@@ -11160,11 +11160,11 @@
             <a:avLst/>
           </a:prstGeom>
           <a:solidFill>
-            <a:srgbClr val="DCEDE6"/>
+            <a:srgbClr val="D1FAE5"/>
           </a:solidFill>
           <a:ln w="12700">
             <a:solidFill>
-              <a:srgbClr val="DCEDE6"/>
+              <a:srgbClr val="D1FAE5"/>
             </a:solidFill>
             <a:prstDash val="solid"/>
           </a:ln>
@@ -11221,7 +11221,7 @@
             <a:r>
               <a:rPr lang="ar-SA" altLang="en-US" sz="1600" b="1" dirty="0">
                 <a:solidFill>
-                  <a:srgbClr val="12241F"/>
+                  <a:srgbClr val="0F172A"/>
                 </a:solidFill>
                 <a:latin typeface="Arial" pitchFamily="34" charset="0"/>
                 <a:ea typeface="Arial" pitchFamily="34" charset="-122"/>
@@ -11260,7 +11260,7 @@
             <a:r>
               <a:rPr lang="ar-SA" altLang="en-US" sz="1150" dirty="0">
                 <a:solidFill>
-                  <a:srgbClr val="4A5C56"/>
+                  <a:srgbClr val="475569"/>
                 </a:solidFill>
                 <a:latin typeface="Arial" pitchFamily="34" charset="0"/>
                 <a:ea typeface="Arial" pitchFamily="34" charset="-122"/>
@@ -11293,7 +11293,7 @@
           </a:solidFill>
           <a:ln w="9525">
             <a:solidFill>
-              <a:srgbClr val="D9E1DC"/>
+              <a:srgbClr val="E2E8F0"/>
             </a:solidFill>
             <a:prstDash val="solid"/>
           </a:ln>
@@ -11321,11 +11321,11 @@
             <a:avLst/>
           </a:prstGeom>
           <a:solidFill>
-            <a:srgbClr val="DCEDE6"/>
+            <a:srgbClr val="D1FAE5"/>
           </a:solidFill>
           <a:ln w="12700">
             <a:solidFill>
-              <a:srgbClr val="DCEDE6"/>
+              <a:srgbClr val="D1FAE5"/>
             </a:solidFill>
             <a:prstDash val="solid"/>
           </a:ln>
@@ -11382,7 +11382,7 @@
             <a:r>
               <a:rPr lang="ar-SA" altLang="en-US" sz="1600" b="1" dirty="0">
                 <a:solidFill>
-                  <a:srgbClr val="12241F"/>
+                  <a:srgbClr val="0F172A"/>
                 </a:solidFill>
                 <a:latin typeface="Arial" pitchFamily="34" charset="0"/>
                 <a:ea typeface="Arial" pitchFamily="34" charset="-122"/>
@@ -11421,7 +11421,7 @@
             <a:r>
               <a:rPr lang="ar-SA" altLang="en-US" sz="1150" dirty="0">
                 <a:solidFill>
-                  <a:srgbClr val="4A5C56"/>
+                  <a:srgbClr val="475569"/>
                 </a:solidFill>
                 <a:latin typeface="Arial" pitchFamily="34" charset="0"/>
                 <a:ea typeface="Arial" pitchFamily="34" charset="-122"/>
@@ -11454,7 +11454,7 @@
           </a:solidFill>
           <a:ln w="9525">
             <a:solidFill>
-              <a:srgbClr val="D9E1DC"/>
+              <a:srgbClr val="E2E8F0"/>
             </a:solidFill>
             <a:prstDash val="solid"/>
           </a:ln>
@@ -11482,11 +11482,11 @@
             <a:avLst/>
           </a:prstGeom>
           <a:solidFill>
-            <a:srgbClr val="DCEDE6"/>
+            <a:srgbClr val="D1FAE5"/>
           </a:solidFill>
           <a:ln w="12700">
             <a:solidFill>
-              <a:srgbClr val="DCEDE6"/>
+              <a:srgbClr val="D1FAE5"/>
             </a:solidFill>
             <a:prstDash val="solid"/>
           </a:ln>
@@ -11543,7 +11543,7 @@
             <a:r>
               <a:rPr lang="ar-SA" altLang="en-US" sz="1600" b="1" dirty="0">
                 <a:solidFill>
-                  <a:srgbClr val="12241F"/>
+                  <a:srgbClr val="0F172A"/>
                 </a:solidFill>
                 <a:latin typeface="Arial" pitchFamily="34" charset="0"/>
                 <a:ea typeface="Arial" pitchFamily="34" charset="-122"/>
@@ -11582,7 +11582,7 @@
             <a:r>
               <a:rPr lang="ar-SA" altLang="en-US" sz="1150" dirty="0">
                 <a:solidFill>
-                  <a:srgbClr val="4A5C56"/>
+                  <a:srgbClr val="475569"/>
                 </a:solidFill>
                 <a:latin typeface="Arial" pitchFamily="34" charset="0"/>
                 <a:ea typeface="Arial" pitchFamily="34" charset="-122"/>
@@ -11621,7 +11621,7 @@
             <a:r>
               <a:rPr lang="ar-SA" altLang="en-US" sz="900" dirty="0">
                 <a:solidFill>
-                  <a:srgbClr val="7A8A84"/>
+                  <a:srgbClr val="64748B"/>
                 </a:solidFill>
                 <a:latin typeface="Arial" pitchFamily="34" charset="0"/>
                 <a:ea typeface="Arial" pitchFamily="34" charset="-122"/>
@@ -11660,7 +11660,7 @@
             <a:r>
               <a:rPr lang="en-US" sz="900" dirty="0">
                 <a:solidFill>
-                  <a:srgbClr val="7A8A84"/>
+                  <a:srgbClr val="64748B"/>
                 </a:solidFill>
                 <a:latin typeface="Arial" pitchFamily="34" charset="0"/>
                 <a:ea typeface="Arial" pitchFamily="34" charset="-122"/>
@@ -11731,7 +11731,7 @@
             <a:r>
               <a:rPr lang="ar-SA" altLang="en-US" sz="3000" b="1" dirty="0">
                 <a:solidFill>
-                  <a:srgbClr val="12241F"/>
+                  <a:srgbClr val="0F172A"/>
                 </a:solidFill>
                 <a:latin typeface="Arial" pitchFamily="34" charset="0"/>
                 <a:ea typeface="Arial" pitchFamily="34" charset="-122"/>
@@ -11770,7 +11770,7 @@
             <a:r>
               <a:rPr lang="ar-SA" altLang="en-US" sz="1400" dirty="0">
                 <a:solidFill>
-                  <a:srgbClr val="4A5C56"/>
+                  <a:srgbClr val="475569"/>
                 </a:solidFill>
                 <a:latin typeface="Arial" pitchFamily="34" charset="0"/>
                 <a:ea typeface="Arial" pitchFamily="34" charset="-122"/>
@@ -11799,11 +11799,11 @@
             </a:avLst>
           </a:prstGeom>
           <a:solidFill>
-            <a:srgbClr val="F4F7F5"/>
+            <a:srgbClr val="F8FAFC"/>
           </a:solidFill>
           <a:ln w="12700">
             <a:solidFill>
-              <a:srgbClr val="D9E1DC"/>
+              <a:srgbClr val="E2E8F0"/>
             </a:solidFill>
             <a:prstDash val="solid"/>
           </a:ln>
@@ -11836,7 +11836,7 @@
             <a:r>
               <a:rPr lang="ar-SA" altLang="en-US" sz="1600" b="1" dirty="0">
                 <a:solidFill>
-                  <a:srgbClr val="12241F"/>
+                  <a:srgbClr val="0F172A"/>
                 </a:solidFill>
                 <a:latin typeface="Arial" pitchFamily="34" charset="0"/>
                 <a:ea typeface="Arial" pitchFamily="34" charset="-122"/>
@@ -11875,7 +11875,7 @@
             <a:r>
               <a:rPr lang="ar-SA" altLang="en-US" sz="3000" b="1" dirty="0">
                 <a:solidFill>
-                  <a:srgbClr val="1D6B58"/>
+                  <a:srgbClr val="047857"/>
                 </a:solidFill>
                 <a:latin typeface="Arial" pitchFamily="34" charset="0"/>
                 <a:ea typeface="Arial" pitchFamily="34" charset="-122"/>
@@ -11914,7 +11914,7 @@
             <a:r>
               <a:rPr lang="ar-SA" altLang="en-US" sz="1100" dirty="0">
                 <a:solidFill>
-                  <a:srgbClr val="7A8A84"/>
+                  <a:srgbClr val="64748B"/>
                 </a:solidFill>
                 <a:latin typeface="Arial" pitchFamily="34" charset="0"/>
                 <a:ea typeface="Arial" pitchFamily="34" charset="-122"/>
@@ -11953,7 +11953,7 @@
             <a:r>
               <a:rPr lang="ar-SA" altLang="en-US" sz="1100" dirty="0">
                 <a:solidFill>
-                  <a:srgbClr val="4A5C56"/>
+                  <a:srgbClr val="475569"/>
                 </a:solidFill>
                 <a:latin typeface="Arial" pitchFamily="34" charset="0"/>
                 <a:ea typeface="Arial" pitchFamily="34" charset="-122"/>
@@ -11982,11 +11982,11 @@
             </a:avLst>
           </a:prstGeom>
           <a:solidFill>
-            <a:srgbClr val="1D6B58"/>
+            <a:srgbClr val="0F172A"/>
           </a:solidFill>
           <a:ln w="12700">
             <a:solidFill>
-              <a:srgbClr val="1D6B58"/>
+              <a:srgbClr val="0F172A"/>
             </a:solidFill>
             <a:prstDash val="solid"/>
           </a:ln>
@@ -12058,7 +12058,7 @@
             <a:r>
               <a:rPr lang="ar-SA" altLang="en-US" sz="3000" b="1" dirty="0">
                 <a:solidFill>
-                  <a:srgbClr val="FFFFFF"/>
+                  <a:srgbClr val="34D399"/>
                 </a:solidFill>
                 <a:latin typeface="Arial" pitchFamily="34" charset="0"/>
                 <a:ea typeface="Arial" pitchFamily="34" charset="-122"/>
@@ -12097,7 +12097,7 @@
             <a:r>
               <a:rPr lang="ar-SA" altLang="en-US" sz="1100" dirty="0">
                 <a:solidFill>
-                  <a:srgbClr val="CFE8DF"/>
+                  <a:srgbClr val="CBD5E1"/>
                 </a:solidFill>
                 <a:latin typeface="Arial" pitchFamily="34" charset="0"/>
                 <a:ea typeface="Arial" pitchFamily="34" charset="-122"/>
@@ -12165,11 +12165,11 @@
             </a:avLst>
           </a:prstGeom>
           <a:solidFill>
-            <a:srgbClr val="F4F7F5"/>
+            <a:srgbClr val="F8FAFC"/>
           </a:solidFill>
           <a:ln w="12700">
             <a:solidFill>
-              <a:srgbClr val="D9E1DC"/>
+              <a:srgbClr val="E2E8F0"/>
             </a:solidFill>
             <a:prstDash val="solid"/>
           </a:ln>
@@ -12202,7 +12202,7 @@
             <a:r>
               <a:rPr lang="ar-SA" altLang="en-US" sz="1600" b="1" dirty="0">
                 <a:solidFill>
-                  <a:srgbClr val="12241F"/>
+                  <a:srgbClr val="0F172A"/>
                 </a:solidFill>
                 <a:latin typeface="Arial" pitchFamily="34" charset="0"/>
                 <a:ea typeface="Arial" pitchFamily="34" charset="-122"/>
@@ -12241,7 +12241,7 @@
             <a:r>
               <a:rPr lang="ar-SA" altLang="en-US" sz="3000" b="1" dirty="0">
                 <a:solidFill>
-                  <a:srgbClr val="1D6B58"/>
+                  <a:srgbClr val="047857"/>
                 </a:solidFill>
                 <a:latin typeface="Arial" pitchFamily="34" charset="0"/>
                 <a:ea typeface="Arial" pitchFamily="34" charset="-122"/>
@@ -12280,7 +12280,7 @@
             <a:r>
               <a:rPr lang="ar-SA" altLang="en-US" sz="1100" dirty="0">
                 <a:solidFill>
-                  <a:srgbClr val="7A8A84"/>
+                  <a:srgbClr val="64748B"/>
                 </a:solidFill>
                 <a:latin typeface="Arial" pitchFamily="34" charset="0"/>
                 <a:ea typeface="Arial" pitchFamily="34" charset="-122"/>
@@ -12319,7 +12319,7 @@
             <a:r>
               <a:rPr lang="ar-SA" altLang="en-US" sz="1100" dirty="0">
                 <a:solidFill>
-                  <a:srgbClr val="4A5C56"/>
+                  <a:srgbClr val="475569"/>
                 </a:solidFill>
                 <a:latin typeface="Arial" pitchFamily="34" charset="0"/>
                 <a:ea typeface="Arial" pitchFamily="34" charset="-122"/>
@@ -12348,11 +12348,11 @@
             </a:avLst>
           </a:prstGeom>
           <a:solidFill>
-            <a:srgbClr val="F4F7F5"/>
+            <a:srgbClr val="F8FAFC"/>
           </a:solidFill>
           <a:ln w="12700">
             <a:solidFill>
-              <a:srgbClr val="D9E1DC"/>
+              <a:srgbClr val="E2E8F0"/>
             </a:solidFill>
             <a:prstDash val="solid"/>
           </a:ln>
@@ -12385,7 +12385,7 @@
             <a:r>
               <a:rPr lang="ar-SA" altLang="en-US" sz="1600" b="1" dirty="0">
                 <a:solidFill>
-                  <a:srgbClr val="12241F"/>
+                  <a:srgbClr val="0F172A"/>
                 </a:solidFill>
                 <a:latin typeface="Arial" pitchFamily="34" charset="0"/>
                 <a:ea typeface="Arial" pitchFamily="34" charset="-122"/>
@@ -12424,7 +12424,7 @@
             <a:r>
               <a:rPr lang="ar-SA" altLang="en-US" sz="3000" b="1" dirty="0">
                 <a:solidFill>
-                  <a:srgbClr val="1D6B58"/>
+                  <a:srgbClr val="047857"/>
                 </a:solidFill>
                 <a:latin typeface="Arial" pitchFamily="34" charset="0"/>
                 <a:ea typeface="Arial" pitchFamily="34" charset="-122"/>
@@ -12463,7 +12463,7 @@
             <a:r>
               <a:rPr lang="ar-SA" altLang="en-US" sz="1100" dirty="0">
                 <a:solidFill>
-                  <a:srgbClr val="7A8A84"/>
+                  <a:srgbClr val="64748B"/>
                 </a:solidFill>
                 <a:latin typeface="Arial" pitchFamily="34" charset="0"/>
                 <a:ea typeface="Arial" pitchFamily="34" charset="-122"/>
@@ -12502,7 +12502,7 @@
             <a:r>
               <a:rPr lang="ar-SA" altLang="en-US" sz="1100" dirty="0">
                 <a:solidFill>
-                  <a:srgbClr val="4A5C56"/>
+                  <a:srgbClr val="475569"/>
                 </a:solidFill>
                 <a:latin typeface="Arial" pitchFamily="34" charset="0"/>
                 <a:ea typeface="Arial" pitchFamily="34" charset="-122"/>
@@ -12541,7 +12541,7 @@
             <a:r>
               <a:rPr lang="ar-SA" altLang="en-US" sz="1250" dirty="0">
                 <a:solidFill>
-                  <a:srgbClr val="4A5C56"/>
+                  <a:srgbClr val="475569"/>
                 </a:solidFill>
                 <a:latin typeface="Arial" pitchFamily="34" charset="0"/>
                 <a:ea typeface="Arial" pitchFamily="34" charset="-122"/>
@@ -12580,7 +12580,7 @@
             <a:r>
               <a:rPr lang="ar-SA" altLang="en-US" sz="900" dirty="0">
                 <a:solidFill>
-                  <a:srgbClr val="7A8A84"/>
+                  <a:srgbClr val="64748B"/>
                 </a:solidFill>
                 <a:latin typeface="Arial" pitchFamily="34" charset="0"/>
                 <a:ea typeface="Arial" pitchFamily="34" charset="-122"/>
@@ -12619,7 +12619,7 @@
             <a:r>
               <a:rPr lang="en-US" sz="900" dirty="0">
                 <a:solidFill>
-                  <a:srgbClr val="7A8A84"/>
+                  <a:srgbClr val="64748B"/>
                 </a:solidFill>
                 <a:latin typeface="Arial" pitchFamily="34" charset="0"/>
                 <a:ea typeface="Arial" pitchFamily="34" charset="-122"/>

--- a/nabd/presentation/nabd-overview.pptx
+++ b/nabd/presentation/nabd-overview.pptx
@@ -18,9 +18,10 @@
     <p:sldId id="266" r:id="rId12"/>
     <p:sldId id="267" r:id="rId13"/>
     <p:sldId id="268" r:id="rId14"/>
+    <p:sldId id="269" r:id="rId15"/>
   </p:sldIdLst>
   <p:notesMasterIdLst>
-    <p:notesMasterId r:id="rId15"/>
+    <p:notesMasterId r:id="rId16"/>
   </p:notesMasterIdLst>
   <p:sldSz cx="9144000" cy="5143500"/>
   <p:notesSz cx="5143500" cy="9144000"/>
@@ -908,6 +909,94 @@
 </p:notes>
 </file>
 
+<file path=ppt/notesSlides/notesSlide14.xml><?xml version="1.0" encoding="utf-8"?>
+<p:notes xmlns:a="http://schemas.openxmlformats.org/drawingml/2006/main" xmlns:r="http://schemas.openxmlformats.org/officeDocument/2006/relationships" xmlns:p="http://schemas.openxmlformats.org/presentationml/2006/main">
+  <p:cSld>
+    <p:spTree>
+      <p:nvGrpSpPr>
+        <p:cNvPr id="1" name=""/>
+        <p:cNvGrpSpPr/>
+        <p:nvPr/>
+      </p:nvGrpSpPr>
+      <p:grpSpPr>
+        <a:xfrm>
+          <a:off x="0" y="0"/>
+          <a:ext cx="0" cy="0"/>
+          <a:chOff x="0" y="0"/>
+          <a:chExt cx="0" cy="0"/>
+        </a:xfrm>
+      </p:grpSpPr>
+      <p:sp>
+        <p:nvSpPr>
+          <p:cNvPr id="2" name="Slide Image Placeholder 1"/>
+          <p:cNvSpPr>
+            <a:spLocks noGrp="1" noRot="1" noChangeAspect="1"/>
+          </p:cNvSpPr>
+          <p:nvPr>
+            <p:ph type="sldImg"/>
+          </p:nvPr>
+        </p:nvSpPr>
+        <p:spPr/>
+      </p:sp>
+      <p:sp>
+        <p:nvSpPr>
+          <p:cNvPr id="3" name="Notes Placeholder 2"/>
+          <p:cNvSpPr>
+            <a:spLocks noGrp="1"/>
+          </p:cNvSpPr>
+          <p:nvPr>
+            <p:ph type="body" idx="1"/>
+          </p:nvPr>
+        </p:nvSpPr>
+        <p:spPr/>
+        <p:txBody>
+          <a:bodyPr/>
+          <a:lstStyle/>
+          <a:p>
+            <a:r>
+              <a:rPr lang="en-US" dirty="0"/>
+              <a:t/>
+            </a:r>
+            <a:endParaRPr lang="en-US" dirty="0"/>
+          </a:p>
+        </p:txBody>
+      </p:sp>
+      <p:sp>
+        <p:nvSpPr>
+          <p:cNvPr id="4" name="Slide Number Placeholder 3"/>
+          <p:cNvSpPr>
+            <a:spLocks noGrp="1"/>
+          </p:cNvSpPr>
+          <p:nvPr>
+            <p:ph type="sldNum" sz="quarter" idx="10"/>
+          </p:nvPr>
+        </p:nvSpPr>
+        <p:spPr/>
+        <p:txBody>
+          <a:bodyPr/>
+          <a:lstStyle/>
+          <a:p>
+            <a:fld id="{F7021451-1387-4CA6-816F-3879F97B5CBC}" type="slidenum">
+              <a:rPr lang="en-US"/>
+              <a:t>14</a:t>
+            </a:fld>
+            <a:endParaRPr lang="en-US"/>
+          </a:p>
+        </p:txBody>
+      </p:sp>
+    </p:spTree>
+    <p:extLst>
+      <p:ext uri="{BB962C8B-B14F-4D97-AF65-F5344CB8AC3E}">
+        <p14:creationId xmlns:p14="http://schemas.microsoft.com/office/powerpoint/2010/main" val="1024086991"/>
+      </p:ext>
+    </p:extLst>
+  </p:cSld>
+  <p:clrMapOvr>
+    <a:masterClrMapping/>
+  </p:clrMapOvr>
+</p:notes>
+</file>
+
 <file path=ppt/notesSlides/notesSlide2.xml><?xml version="1.0" encoding="utf-8"?>
 <p:notes xmlns:a="http://schemas.openxmlformats.org/drawingml/2006/main" xmlns:r="http://schemas.openxmlformats.org/officeDocument/2006/relationships" xmlns:p="http://schemas.openxmlformats.org/presentationml/2006/main">
   <p:cSld>
@@ -1394,7 +1483,7 @@
           <a:p>
             <a:r>
               <a:rPr lang="en-US" dirty="0"/>
-              <a:t/>
+              <a:t>المراحل الأولى صغيرة لأن كل طلب في البداية فرق كبير. الانتقال بين المراحل بعدد الطلبات الحقيقي من سلة، والنقاط للتحفيز.</a:t>
             </a:r>
             <a:endParaRPr lang="en-US" dirty="0"/>
           </a:p>
@@ -2213,7 +2302,7 @@
                 <a:ea typeface="Arial" pitchFamily="34" charset="-122"/>
                 <a:cs typeface="Arial" pitchFamily="34" charset="-120"/>
               </a:rPr>
-              <a:t>الخطة: 90 يومًا حتى الإطلاق</a:t>
+              <a:t>الباقات</a:t>
             </a:r>
             <a:endParaRPr lang="ar-SA" sz="3000" dirty="0"/>
           </a:p>
@@ -2252,7 +2341,7 @@
                 <a:ea typeface="Arial" pitchFamily="34" charset="-122"/>
                 <a:cs typeface="Arial" pitchFamily="34" charset="-120"/>
               </a:rPr>
-              <a:t>كل مرحلة لها شرط نجاح قبل الانتقال للتالية</a:t>
+              <a:t>كل باقة تضيف أدوات جديدة. التاجر يبدأ مجانًا ويترقّى لما يكبر متجره</a:t>
             </a:r>
             <a:endParaRPr lang="ar-SA" sz="1400" dirty="0"/>
           </a:p>
@@ -2266,14 +2355,18 @@
         </p:nvSpPr>
         <p:spPr>
           <a:xfrm>
-            <a:off x="1280160" y="1874520"/>
-            <a:ext cx="6583680" cy="0"/>
-          </a:xfrm>
-          <a:prstGeom prst="line">
-            <a:avLst/>
-          </a:prstGeom>
-          <a:noFill/>
-          <a:ln w="25400">
+            <a:off x="6766560" y="1371600"/>
+            <a:ext cx="1920240" cy="2743200"/>
+          </a:xfrm>
+          <a:prstGeom prst="roundRect">
+            <a:avLst>
+              <a:gd name="adj" fmla="val 5714"/>
+            </a:avLst>
+          </a:prstGeom>
+          <a:solidFill>
+            <a:srgbClr val="F8FAFC"/>
+          </a:solidFill>
+          <a:ln w="12700">
             <a:solidFill>
               <a:srgbClr val="E2E8F0"/>
             </a:solidFill>
@@ -2283,24 +2376,260 @@
       </p:sp>
       <p:sp>
         <p:nvSpPr>
-          <p:cNvPr id="5" name="Shape 3"/>
+          <p:cNvPr id="5" name="Text 3"/>
+          <p:cNvSpPr txBox="1"/>
+          <p:nvPr/>
+        </p:nvSpPr>
+        <p:spPr>
+          <a:xfrm>
+            <a:off x="6903720" y="1508760"/>
+            <a:ext cx="1645920" cy="365760"/>
+          </a:xfrm>
+          <a:prstGeom prst="rect">
+            <a:avLst/>
+          </a:prstGeom>
+          <a:noFill/>
+          <a:ln/>
+        </p:spPr>
+        <p:txBody>
+          <a:bodyPr wrap="square" lIns="0" tIns="0" rIns="0" bIns="0" rtlCol="0" anchor="t"/>
+          <a:lstStyle/>
+          <a:p>
+            <a:pPr rtl="1" algn="ctr" indent="0" marL="0">
+              <a:buNone/>
+            </a:pPr>
+            <a:r>
+              <a:rPr lang="ar-SA" altLang="en-US" sz="1600" b="1" dirty="0">
+                <a:solidFill>
+                  <a:srgbClr val="0F172A"/>
+                </a:solidFill>
+                <a:latin typeface="Arial" pitchFamily="34" charset="0"/>
+                <a:ea typeface="Arial" pitchFamily="34" charset="-122"/>
+                <a:cs typeface="Arial" pitchFamily="34" charset="-120"/>
+              </a:rPr>
+              <a:t>المجانية</a:t>
+            </a:r>
+            <a:endParaRPr lang="ar-SA" sz="1600" dirty="0"/>
+          </a:p>
+        </p:txBody>
+      </p:sp>
+      <p:sp>
+        <p:nvSpPr>
+          <p:cNvPr id="6" name="Text 4"/>
+          <p:cNvSpPr txBox="1"/>
+          <p:nvPr/>
+        </p:nvSpPr>
+        <p:spPr>
+          <a:xfrm>
+            <a:off x="6903720" y="1874520"/>
+            <a:ext cx="1645920" cy="548640"/>
+          </a:xfrm>
+          <a:prstGeom prst="rect">
+            <a:avLst/>
+          </a:prstGeom>
+          <a:noFill/>
+          <a:ln/>
+        </p:spPr>
+        <p:txBody>
+          <a:bodyPr wrap="square" lIns="0" tIns="0" rIns="0" bIns="0" rtlCol="0" anchor="t"/>
+          <a:lstStyle/>
+          <a:p>
+            <a:pPr rtl="1" algn="ctr" indent="0" marL="0">
+              <a:buNone/>
+            </a:pPr>
+            <a:r>
+              <a:rPr lang="ar-SA" altLang="en-US" sz="3000" b="1" dirty="0">
+                <a:solidFill>
+                  <a:srgbClr val="047857"/>
+                </a:solidFill>
+                <a:latin typeface="Arial" pitchFamily="34" charset="0"/>
+                <a:ea typeface="Arial" pitchFamily="34" charset="-122"/>
+                <a:cs typeface="Arial" pitchFamily="34" charset="-120"/>
+              </a:rPr>
+              <a:t>0</a:t>
+            </a:r>
+            <a:endParaRPr lang="ar-SA" sz="3000" dirty="0"/>
+          </a:p>
+        </p:txBody>
+      </p:sp>
+      <p:sp>
+        <p:nvSpPr>
+          <p:cNvPr id="7" name="Text 5"/>
+          <p:cNvSpPr txBox="1"/>
+          <p:nvPr/>
+        </p:nvSpPr>
+        <p:spPr>
+          <a:xfrm>
+            <a:off x="6903720" y="2423160"/>
+            <a:ext cx="1645920" cy="274320"/>
+          </a:xfrm>
+          <a:prstGeom prst="rect">
+            <a:avLst/>
+          </a:prstGeom>
+          <a:noFill/>
+          <a:ln/>
+        </p:spPr>
+        <p:txBody>
+          <a:bodyPr wrap="square" lIns="0" tIns="0" rIns="0" bIns="0" rtlCol="0" anchor="t"/>
+          <a:lstStyle/>
+          <a:p>
+            <a:pPr rtl="1" algn="ctr" indent="0" marL="0">
+              <a:buNone/>
+            </a:pPr>
+            <a:r>
+              <a:rPr lang="ar-SA" altLang="en-US" sz="1050" dirty="0">
+                <a:solidFill>
+                  <a:srgbClr val="64748B"/>
+                </a:solidFill>
+                <a:latin typeface="Arial" pitchFamily="34" charset="0"/>
+                <a:ea typeface="Arial" pitchFamily="34" charset="-122"/>
+                <a:cs typeface="Arial" pitchFamily="34" charset="-120"/>
+              </a:rPr>
+              <a:t>ريال شهريًا</a:t>
+            </a:r>
+            <a:endParaRPr lang="ar-SA" sz="1050" dirty="0"/>
+          </a:p>
+        </p:txBody>
+      </p:sp>
+      <p:sp>
+        <p:nvSpPr>
+          <p:cNvPr id="8" name="Text 6"/>
+          <p:cNvSpPr txBox="1"/>
+          <p:nvPr/>
+        </p:nvSpPr>
+        <p:spPr>
+          <a:xfrm>
+            <a:off x="6903720" y="2788920"/>
+            <a:ext cx="1645920" cy="384048"/>
+          </a:xfrm>
+          <a:prstGeom prst="rect">
+            <a:avLst/>
+          </a:prstGeom>
+          <a:noFill/>
+          <a:ln/>
+        </p:spPr>
+        <p:txBody>
+          <a:bodyPr wrap="square" lIns="0" tIns="0" rIns="0" bIns="0" rtlCol="0" anchor="t"/>
+          <a:lstStyle/>
+          <a:p>
+            <a:pPr rtl="1" algn="ctr" indent="0" marL="0">
+              <a:buNone/>
+            </a:pPr>
+            <a:r>
+              <a:rPr lang="ar-SA" altLang="en-US" sz="1050" dirty="0">
+                <a:solidFill>
+                  <a:srgbClr val="475569"/>
+                </a:solidFill>
+                <a:latin typeface="Arial" pitchFamily="34" charset="0"/>
+                <a:ea typeface="Arial" pitchFamily="34" charset="-122"/>
+                <a:cs typeface="Arial" pitchFamily="34" charset="-120"/>
+              </a:rPr>
+              <a:t>المرحلتان 1 و2 من الرحلة</a:t>
+            </a:r>
+            <a:endParaRPr lang="ar-SA" sz="1050" dirty="0"/>
+          </a:p>
+        </p:txBody>
+      </p:sp>
+      <p:sp>
+        <p:nvSpPr>
+          <p:cNvPr id="9" name="Text 7"/>
+          <p:cNvSpPr txBox="1"/>
+          <p:nvPr/>
+        </p:nvSpPr>
+        <p:spPr>
+          <a:xfrm>
+            <a:off x="6903720" y="3200400"/>
+            <a:ext cx="1645920" cy="384048"/>
+          </a:xfrm>
+          <a:prstGeom prst="rect">
+            <a:avLst/>
+          </a:prstGeom>
+          <a:noFill/>
+          <a:ln/>
+        </p:spPr>
+        <p:txBody>
+          <a:bodyPr wrap="square" lIns="0" tIns="0" rIns="0" bIns="0" rtlCol="0" anchor="t"/>
+          <a:lstStyle/>
+          <a:p>
+            <a:pPr rtl="1" algn="ctr" indent="0" marL="0">
+              <a:buNone/>
+            </a:pPr>
+            <a:r>
+              <a:rPr lang="ar-SA" altLang="en-US" sz="1050" dirty="0">
+                <a:solidFill>
+                  <a:srgbClr val="475569"/>
+                </a:solidFill>
+                <a:latin typeface="Arial" pitchFamily="34" charset="0"/>
+                <a:ea typeface="Arial" pitchFamily="34" charset="-122"/>
+                <a:cs typeface="Arial" pitchFamily="34" charset="-120"/>
+              </a:rPr>
+              <a:t>3 أدلة سلة</a:t>
+            </a:r>
+            <a:endParaRPr lang="ar-SA" sz="1050" dirty="0"/>
+          </a:p>
+        </p:txBody>
+      </p:sp>
+      <p:sp>
+        <p:nvSpPr>
+          <p:cNvPr id="10" name="Text 8"/>
+          <p:cNvSpPr txBox="1"/>
+          <p:nvPr/>
+        </p:nvSpPr>
+        <p:spPr>
+          <a:xfrm>
+            <a:off x="6903720" y="3611880"/>
+            <a:ext cx="1645920" cy="384048"/>
+          </a:xfrm>
+          <a:prstGeom prst="rect">
+            <a:avLst/>
+          </a:prstGeom>
+          <a:noFill/>
+          <a:ln/>
+        </p:spPr>
+        <p:txBody>
+          <a:bodyPr wrap="square" lIns="0" tIns="0" rIns="0" bIns="0" rtlCol="0" anchor="t"/>
+          <a:lstStyle/>
+          <a:p>
+            <a:pPr rtl="1" algn="ctr" indent="0" marL="0">
+              <a:buNone/>
+            </a:pPr>
+            <a:r>
+              <a:rPr lang="ar-SA" altLang="en-US" sz="1050" dirty="0">
+                <a:solidFill>
+                  <a:srgbClr val="475569"/>
+                </a:solidFill>
+                <a:latin typeface="Arial" pitchFamily="34" charset="0"/>
+                <a:ea typeface="Arial" pitchFamily="34" charset="-122"/>
+                <a:cs typeface="Arial" pitchFamily="34" charset="-120"/>
+              </a:rPr>
+              <a:t>النقاط والشارات</a:t>
+            </a:r>
+            <a:endParaRPr lang="ar-SA" sz="1050" dirty="0"/>
+          </a:p>
+        </p:txBody>
+      </p:sp>
+      <p:sp>
+        <p:nvSpPr>
+          <p:cNvPr id="11" name="Shape 9"/>
           <p:cNvSpPr/>
           <p:nvPr/>
         </p:nvSpPr>
         <p:spPr>
           <a:xfrm>
-            <a:off x="7708392" y="1719072"/>
-            <a:ext cx="310896" cy="310896"/>
-          </a:xfrm>
-          <a:prstGeom prst="ellipse">
-            <a:avLst/>
+            <a:off x="4663440" y="1371600"/>
+            <a:ext cx="1920240" cy="2743200"/>
+          </a:xfrm>
+          <a:prstGeom prst="roundRect">
+            <a:avLst>
+              <a:gd name="adj" fmla="val 5714"/>
+            </a:avLst>
           </a:prstGeom>
           <a:solidFill>
-            <a:srgbClr val="10B981"/>
+            <a:srgbClr val="F8FAFC"/>
           </a:solidFill>
-          <a:ln w="25400">
+          <a:ln w="12700">
             <a:solidFill>
-              <a:srgbClr val="FFFFFF"/>
+              <a:srgbClr val="E2E8F0"/>
             </a:solidFill>
             <a:prstDash val="solid"/>
           </a:ln>
@@ -2308,14 +2637,14 @@
       </p:sp>
       <p:sp>
         <p:nvSpPr>
-          <p:cNvPr id="6" name="Text 4"/>
-          <p:cNvSpPr txBox="1"/>
-          <p:nvPr/>
-        </p:nvSpPr>
-        <p:spPr>
-          <a:xfrm>
-            <a:off x="7086600" y="1325880"/>
-            <a:ext cx="1554480" cy="274320"/>
+          <p:cNvPr id="12" name="Text 10"/>
+          <p:cNvSpPr txBox="1"/>
+          <p:nvPr/>
+        </p:nvSpPr>
+        <p:spPr>
+          <a:xfrm>
+            <a:off x="4800600" y="1508760"/>
+            <a:ext cx="1645920" cy="365760"/>
           </a:xfrm>
           <a:prstGeom prst="rect">
             <a:avLst/>
@@ -2331,7 +2660,85 @@
               <a:buNone/>
             </a:pPr>
             <a:r>
-              <a:rPr lang="ar-SA" altLang="en-US" sz="1100" dirty="0">
+              <a:rPr lang="ar-SA" altLang="en-US" sz="1600" b="1" dirty="0">
+                <a:solidFill>
+                  <a:srgbClr val="0F172A"/>
+                </a:solidFill>
+                <a:latin typeface="Arial" pitchFamily="34" charset="0"/>
+                <a:ea typeface="Arial" pitchFamily="34" charset="-122"/>
+                <a:cs typeface="Arial" pitchFamily="34" charset="-120"/>
+              </a:rPr>
+              <a:t>الأساسية</a:t>
+            </a:r>
+            <a:endParaRPr lang="ar-SA" sz="1600" dirty="0"/>
+          </a:p>
+        </p:txBody>
+      </p:sp>
+      <p:sp>
+        <p:nvSpPr>
+          <p:cNvPr id="13" name="Text 11"/>
+          <p:cNvSpPr txBox="1"/>
+          <p:nvPr/>
+        </p:nvSpPr>
+        <p:spPr>
+          <a:xfrm>
+            <a:off x="4800600" y="1874520"/>
+            <a:ext cx="1645920" cy="548640"/>
+          </a:xfrm>
+          <a:prstGeom prst="rect">
+            <a:avLst/>
+          </a:prstGeom>
+          <a:noFill/>
+          <a:ln/>
+        </p:spPr>
+        <p:txBody>
+          <a:bodyPr wrap="square" lIns="0" tIns="0" rIns="0" bIns="0" rtlCol="0" anchor="t"/>
+          <a:lstStyle/>
+          <a:p>
+            <a:pPr rtl="1" algn="ctr" indent="0" marL="0">
+              <a:buNone/>
+            </a:pPr>
+            <a:r>
+              <a:rPr lang="ar-SA" altLang="en-US" sz="3000" b="1" dirty="0">
+                <a:solidFill>
+                  <a:srgbClr val="047857"/>
+                </a:solidFill>
+                <a:latin typeface="Arial" pitchFamily="34" charset="0"/>
+                <a:ea typeface="Arial" pitchFamily="34" charset="-122"/>
+                <a:cs typeface="Arial" pitchFamily="34" charset="-120"/>
+              </a:rPr>
+              <a:t>59</a:t>
+            </a:r>
+            <a:endParaRPr lang="ar-SA" sz="3000" dirty="0"/>
+          </a:p>
+        </p:txBody>
+      </p:sp>
+      <p:sp>
+        <p:nvSpPr>
+          <p:cNvPr id="14" name="Text 12"/>
+          <p:cNvSpPr txBox="1"/>
+          <p:nvPr/>
+        </p:nvSpPr>
+        <p:spPr>
+          <a:xfrm>
+            <a:off x="4800600" y="2423160"/>
+            <a:ext cx="1645920" cy="274320"/>
+          </a:xfrm>
+          <a:prstGeom prst="rect">
+            <a:avLst/>
+          </a:prstGeom>
+          <a:noFill/>
+          <a:ln/>
+        </p:spPr>
+        <p:txBody>
+          <a:bodyPr wrap="square" lIns="0" tIns="0" rIns="0" bIns="0" rtlCol="0" anchor="t"/>
+          <a:lstStyle/>
+          <a:p>
+            <a:pPr rtl="1" algn="ctr" indent="0" marL="0">
+              <a:buNone/>
+            </a:pPr>
+            <a:r>
+              <a:rPr lang="ar-SA" altLang="en-US" sz="1050" dirty="0">
                 <a:solidFill>
                   <a:srgbClr val="64748B"/>
                 </a:solidFill>
@@ -2339,22 +2746,22 @@
                 <a:ea typeface="Arial" pitchFamily="34" charset="-122"/>
                 <a:cs typeface="Arial" pitchFamily="34" charset="-120"/>
               </a:rPr>
-              <a:t>أسبوع 1–2</a:t>
-            </a:r>
-            <a:endParaRPr lang="ar-SA" sz="1100" dirty="0"/>
-          </a:p>
-        </p:txBody>
-      </p:sp>
-      <p:sp>
-        <p:nvSpPr>
-          <p:cNvPr id="7" name="Text 5"/>
-          <p:cNvSpPr txBox="1"/>
-          <p:nvPr/>
-        </p:nvSpPr>
-        <p:spPr>
-          <a:xfrm>
-            <a:off x="7086600" y="2194560"/>
-            <a:ext cx="1554480" cy="365760"/>
+              <a:t>ريال شهريًا</a:t>
+            </a:r>
+            <a:endParaRPr lang="ar-SA" sz="1050" dirty="0"/>
+          </a:p>
+        </p:txBody>
+      </p:sp>
+      <p:sp>
+        <p:nvSpPr>
+          <p:cNvPr id="15" name="Text 13"/>
+          <p:cNvSpPr txBox="1"/>
+          <p:nvPr/>
+        </p:nvSpPr>
+        <p:spPr>
+          <a:xfrm>
+            <a:off x="4800600" y="2788920"/>
+            <a:ext cx="1645920" cy="384048"/>
           </a:xfrm>
           <a:prstGeom prst="rect">
             <a:avLst/>
@@ -2370,30 +2777,30 @@
               <a:buNone/>
             </a:pPr>
             <a:r>
-              <a:rPr lang="ar-SA" altLang="en-US" sz="1500" b="1" dirty="0">
-                <a:solidFill>
-                  <a:srgbClr val="0F172A"/>
-                </a:solidFill>
-                <a:latin typeface="Arial" pitchFamily="34" charset="0"/>
-                <a:ea typeface="Arial" pitchFamily="34" charset="-122"/>
-                <a:cs typeface="Arial" pitchFamily="34" charset="-120"/>
-              </a:rPr>
-              <a:t>التحقق</a:t>
-            </a:r>
-            <a:endParaRPr lang="ar-SA" sz="1500" dirty="0"/>
-          </a:p>
-        </p:txBody>
-      </p:sp>
-      <p:sp>
-        <p:nvSpPr>
-          <p:cNvPr id="8" name="Text 6"/>
-          <p:cNvSpPr txBox="1"/>
-          <p:nvPr/>
-        </p:nvSpPr>
-        <p:spPr>
-          <a:xfrm>
-            <a:off x="7086600" y="2606040"/>
-            <a:ext cx="1554480" cy="1188720"/>
+              <a:rPr lang="ar-SA" altLang="en-US" sz="1050" dirty="0">
+                <a:solidFill>
+                  <a:srgbClr val="475569"/>
+                </a:solidFill>
+                <a:latin typeface="Arial" pitchFamily="34" charset="0"/>
+                <a:ea typeface="Arial" pitchFamily="34" charset="-122"/>
+                <a:cs typeface="Arial" pitchFamily="34" charset="-120"/>
+              </a:rPr>
+              <a:t>كل مراحل الرحلة وكل الأدلة</a:t>
+            </a:r>
+            <a:endParaRPr lang="ar-SA" sz="1050" dirty="0"/>
+          </a:p>
+        </p:txBody>
+      </p:sp>
+      <p:sp>
+        <p:nvSpPr>
+          <p:cNvPr id="16" name="Text 14"/>
+          <p:cNvSpPr txBox="1"/>
+          <p:nvPr/>
+        </p:nvSpPr>
+        <p:spPr>
+          <a:xfrm>
+            <a:off x="4800600" y="3200400"/>
+            <a:ext cx="1645920" cy="384048"/>
           </a:xfrm>
           <a:prstGeom prst="rect">
             <a:avLst/>
@@ -2409,7 +2816,7 @@
               <a:buNone/>
             </a:pPr>
             <a:r>
-              <a:rPr lang="ar-SA" altLang="en-US" sz="1100" dirty="0">
+              <a:rPr lang="ar-SA" altLang="en-US" sz="1050" dirty="0">
                 <a:solidFill>
                   <a:srgbClr val="475569"/>
                 </a:solidFill>
@@ -2417,32 +2824,73 @@
                 <a:ea typeface="Arial" pitchFamily="34" charset="-122"/>
                 <a:cs typeface="Arial" pitchFamily="34" charset="-120"/>
               </a:rPr>
-              <a:t>تقارير يدوية لـ 10 متاجر. هل ينفذون؟ هل سيدفعون؟</a:t>
-            </a:r>
-            <a:endParaRPr lang="ar-SA" sz="1100" dirty="0"/>
-          </a:p>
-        </p:txBody>
-      </p:sp>
-      <p:sp>
-        <p:nvSpPr>
-          <p:cNvPr id="9" name="Shape 7"/>
+              <a:t>صانع محتوى: 20 منشورًا</a:t>
+            </a:r>
+            <a:endParaRPr lang="ar-SA" sz="1050" dirty="0"/>
+          </a:p>
+        </p:txBody>
+      </p:sp>
+      <p:sp>
+        <p:nvSpPr>
+          <p:cNvPr id="17" name="Text 15"/>
+          <p:cNvSpPr txBox="1"/>
+          <p:nvPr/>
+        </p:nvSpPr>
+        <p:spPr>
+          <a:xfrm>
+            <a:off x="4800600" y="3611880"/>
+            <a:ext cx="1645920" cy="384048"/>
+          </a:xfrm>
+          <a:prstGeom prst="rect">
+            <a:avLst/>
+          </a:prstGeom>
+          <a:noFill/>
+          <a:ln/>
+        </p:spPr>
+        <p:txBody>
+          <a:bodyPr wrap="square" lIns="0" tIns="0" rIns="0" bIns="0" rtlCol="0" anchor="t"/>
+          <a:lstStyle/>
+          <a:p>
+            <a:pPr rtl="1" algn="ctr" indent="0" marL="0">
+              <a:buNone/>
+            </a:pPr>
+            <a:r>
+              <a:rPr lang="ar-SA" altLang="en-US" sz="1050" dirty="0">
+                <a:solidFill>
+                  <a:srgbClr val="475569"/>
+                </a:solidFill>
+                <a:latin typeface="Arial" pitchFamily="34" charset="0"/>
+                <a:ea typeface="Arial" pitchFamily="34" charset="-122"/>
+                <a:cs typeface="Arial" pitchFamily="34" charset="-120"/>
+              </a:rPr>
+              <a:t>تقويم المواسم + تقرير أسبوعي</a:t>
+            </a:r>
+            <a:endParaRPr lang="ar-SA" sz="1050" dirty="0"/>
+          </a:p>
+        </p:txBody>
+      </p:sp>
+      <p:sp>
+        <p:nvSpPr>
+          <p:cNvPr id="18" name="Shape 16"/>
           <p:cNvSpPr/>
           <p:nvPr/>
         </p:nvSpPr>
         <p:spPr>
           <a:xfrm>
-            <a:off x="6062472" y="1719072"/>
-            <a:ext cx="310896" cy="310896"/>
-          </a:xfrm>
-          <a:prstGeom prst="ellipse">
-            <a:avLst/>
+            <a:off x="2560320" y="1371600"/>
+            <a:ext cx="1920240" cy="2743200"/>
+          </a:xfrm>
+          <a:prstGeom prst="roundRect">
+            <a:avLst>
+              <a:gd name="adj" fmla="val 5714"/>
+            </a:avLst>
           </a:prstGeom>
           <a:solidFill>
-            <a:srgbClr val="10B981"/>
+            <a:srgbClr val="0F172A"/>
           </a:solidFill>
-          <a:ln w="25400">
+          <a:ln w="12700">
             <a:solidFill>
-              <a:srgbClr val="FFFFFF"/>
+              <a:srgbClr val="0F172A"/>
             </a:solidFill>
             <a:prstDash val="solid"/>
           </a:ln>
@@ -2450,14 +2898,14 @@
       </p:sp>
       <p:sp>
         <p:nvSpPr>
-          <p:cNvPr id="10" name="Text 8"/>
-          <p:cNvSpPr txBox="1"/>
-          <p:nvPr/>
-        </p:nvSpPr>
-        <p:spPr>
-          <a:xfrm>
-            <a:off x="5440680" y="1325880"/>
-            <a:ext cx="1554480" cy="274320"/>
+          <p:cNvPr id="19" name="Text 17"/>
+          <p:cNvSpPr txBox="1"/>
+          <p:nvPr/>
+        </p:nvSpPr>
+        <p:spPr>
+          <a:xfrm>
+            <a:off x="2697480" y="1508760"/>
+            <a:ext cx="1645920" cy="365760"/>
           </a:xfrm>
           <a:prstGeom prst="rect">
             <a:avLst/>
@@ -2473,30 +2921,30 @@
               <a:buNone/>
             </a:pPr>
             <a:r>
-              <a:rPr lang="ar-SA" altLang="en-US" sz="1100" dirty="0">
-                <a:solidFill>
-                  <a:srgbClr val="64748B"/>
-                </a:solidFill>
-                <a:latin typeface="Arial" pitchFamily="34" charset="0"/>
-                <a:ea typeface="Arial" pitchFamily="34" charset="-122"/>
-                <a:cs typeface="Arial" pitchFamily="34" charset="-120"/>
-              </a:rPr>
-              <a:t>أسبوع 3–5</a:t>
-            </a:r>
-            <a:endParaRPr lang="ar-SA" sz="1100" dirty="0"/>
-          </a:p>
-        </p:txBody>
-      </p:sp>
-      <p:sp>
-        <p:nvSpPr>
-          <p:cNvPr id="11" name="Text 9"/>
-          <p:cNvSpPr txBox="1"/>
-          <p:nvPr/>
-        </p:nvSpPr>
-        <p:spPr>
-          <a:xfrm>
-            <a:off x="5440680" y="2194560"/>
-            <a:ext cx="1554480" cy="365760"/>
+              <a:rPr lang="ar-SA" altLang="en-US" sz="1600" b="1" dirty="0">
+                <a:solidFill>
+                  <a:srgbClr val="FFFFFF"/>
+                </a:solidFill>
+                <a:latin typeface="Arial" pitchFamily="34" charset="0"/>
+                <a:ea typeface="Arial" pitchFamily="34" charset="-122"/>
+                <a:cs typeface="Arial" pitchFamily="34" charset="-120"/>
+              </a:rPr>
+              <a:t>النمو</a:t>
+            </a:r>
+            <a:endParaRPr lang="ar-SA" sz="1600" dirty="0"/>
+          </a:p>
+        </p:txBody>
+      </p:sp>
+      <p:sp>
+        <p:nvSpPr>
+          <p:cNvPr id="20" name="Text 18"/>
+          <p:cNvSpPr txBox="1"/>
+          <p:nvPr/>
+        </p:nvSpPr>
+        <p:spPr>
+          <a:xfrm>
+            <a:off x="2697480" y="1874520"/>
+            <a:ext cx="1645920" cy="548640"/>
           </a:xfrm>
           <a:prstGeom prst="rect">
             <a:avLst/>
@@ -2512,30 +2960,30 @@
               <a:buNone/>
             </a:pPr>
             <a:r>
-              <a:rPr lang="ar-SA" altLang="en-US" sz="1500" b="1" dirty="0">
-                <a:solidFill>
-                  <a:srgbClr val="0F172A"/>
-                </a:solidFill>
-                <a:latin typeface="Arial" pitchFamily="34" charset="0"/>
-                <a:ea typeface="Arial" pitchFamily="34" charset="-122"/>
-                <a:cs typeface="Arial" pitchFamily="34" charset="-120"/>
-              </a:rPr>
-              <a:t>أساس البيانات</a:t>
-            </a:r>
-            <a:endParaRPr lang="ar-SA" sz="1500" dirty="0"/>
-          </a:p>
-        </p:txBody>
-      </p:sp>
-      <p:sp>
-        <p:nvSpPr>
-          <p:cNvPr id="12" name="Text 10"/>
-          <p:cNvSpPr txBox="1"/>
-          <p:nvPr/>
-        </p:nvSpPr>
-        <p:spPr>
-          <a:xfrm>
-            <a:off x="5440680" y="2606040"/>
-            <a:ext cx="1554480" cy="1188720"/>
+              <a:rPr lang="ar-SA" altLang="en-US" sz="3000" b="1" dirty="0">
+                <a:solidFill>
+                  <a:srgbClr val="34D399"/>
+                </a:solidFill>
+                <a:latin typeface="Arial" pitchFamily="34" charset="0"/>
+                <a:ea typeface="Arial" pitchFamily="34" charset="-122"/>
+                <a:cs typeface="Arial" pitchFamily="34" charset="-120"/>
+              </a:rPr>
+              <a:t>120</a:t>
+            </a:r>
+            <a:endParaRPr lang="ar-SA" sz="3000" dirty="0"/>
+          </a:p>
+        </p:txBody>
+      </p:sp>
+      <p:sp>
+        <p:nvSpPr>
+          <p:cNvPr id="21" name="Text 19"/>
+          <p:cNvSpPr txBox="1"/>
+          <p:nvPr/>
+        </p:nvSpPr>
+        <p:spPr>
+          <a:xfrm>
+            <a:off x="2697480" y="2423160"/>
+            <a:ext cx="1645920" cy="274320"/>
           </a:xfrm>
           <a:prstGeom prst="rect">
             <a:avLst/>
@@ -2551,40 +2999,159 @@
               <a:buNone/>
             </a:pPr>
             <a:r>
-              <a:rPr lang="ar-SA" altLang="en-US" sz="1100" dirty="0">
-                <a:solidFill>
-                  <a:srgbClr val="475569"/>
-                </a:solidFill>
-                <a:latin typeface="Arial" pitchFamily="34" charset="0"/>
-                <a:ea typeface="Arial" pitchFamily="34" charset="-122"/>
-                <a:cs typeface="Arial" pitchFamily="34" charset="-120"/>
-              </a:rPr>
-              <a:t>الربط مع سلة، واستيراد البيانات، ومطابقة الأرقام</a:t>
-            </a:r>
-            <a:endParaRPr lang="ar-SA" sz="1100" dirty="0"/>
-          </a:p>
-        </p:txBody>
-      </p:sp>
-      <p:sp>
-        <p:nvSpPr>
-          <p:cNvPr id="13" name="Shape 11"/>
+              <a:rPr lang="ar-SA" altLang="en-US" sz="1050" dirty="0">
+                <a:solidFill>
+                  <a:srgbClr val="CBD5E1"/>
+                </a:solidFill>
+                <a:latin typeface="Arial" pitchFamily="34" charset="0"/>
+                <a:ea typeface="Arial" pitchFamily="34" charset="-122"/>
+                <a:cs typeface="Arial" pitchFamily="34" charset="-120"/>
+              </a:rPr>
+              <a:t>ريال شهريًا</a:t>
+            </a:r>
+            <a:endParaRPr lang="ar-SA" sz="1050" dirty="0"/>
+          </a:p>
+        </p:txBody>
+      </p:sp>
+      <p:sp>
+        <p:nvSpPr>
+          <p:cNvPr id="22" name="Text 20"/>
+          <p:cNvSpPr txBox="1"/>
+          <p:nvPr/>
+        </p:nvSpPr>
+        <p:spPr>
+          <a:xfrm>
+            <a:off x="2697480" y="2788920"/>
+            <a:ext cx="1645920" cy="384048"/>
+          </a:xfrm>
+          <a:prstGeom prst="rect">
+            <a:avLst/>
+          </a:prstGeom>
+          <a:noFill/>
+          <a:ln/>
+        </p:spPr>
+        <p:txBody>
+          <a:bodyPr wrap="square" lIns="0" tIns="0" rIns="0" bIns="0" rtlCol="0" anchor="t"/>
+          <a:lstStyle/>
+          <a:p>
+            <a:pPr rtl="1" algn="ctr" indent="0" marL="0">
+              <a:buNone/>
+            </a:pPr>
+            <a:r>
+              <a:rPr lang="ar-SA" altLang="en-US" sz="1050" dirty="0">
+                <a:solidFill>
+                  <a:srgbClr val="FFFFFF"/>
+                </a:solidFill>
+                <a:latin typeface="Arial" pitchFamily="34" charset="0"/>
+                <a:ea typeface="Arial" pitchFamily="34" charset="-122"/>
+                <a:cs typeface="Arial" pitchFamily="34" charset="-120"/>
+              </a:rPr>
+              <a:t>خطة تسويقية شهرية كاملة</a:t>
+            </a:r>
+            <a:endParaRPr lang="ar-SA" sz="1050" dirty="0"/>
+          </a:p>
+        </p:txBody>
+      </p:sp>
+      <p:sp>
+        <p:nvSpPr>
+          <p:cNvPr id="23" name="Text 21"/>
+          <p:cNvSpPr txBox="1"/>
+          <p:nvPr/>
+        </p:nvSpPr>
+        <p:spPr>
+          <a:xfrm>
+            <a:off x="2697480" y="3200400"/>
+            <a:ext cx="1645920" cy="384048"/>
+          </a:xfrm>
+          <a:prstGeom prst="rect">
+            <a:avLst/>
+          </a:prstGeom>
+          <a:noFill/>
+          <a:ln/>
+        </p:spPr>
+        <p:txBody>
+          <a:bodyPr wrap="square" lIns="0" tIns="0" rIns="0" bIns="0" rtlCol="0" anchor="t"/>
+          <a:lstStyle/>
+          <a:p>
+            <a:pPr rtl="1" algn="ctr" indent="0" marL="0">
+              <a:buNone/>
+            </a:pPr>
+            <a:r>
+              <a:rPr lang="ar-SA" altLang="en-US" sz="1050" dirty="0">
+                <a:solidFill>
+                  <a:srgbClr val="FFFFFF"/>
+                </a:solidFill>
+                <a:latin typeface="Arial" pitchFamily="34" charset="0"/>
+                <a:ea typeface="Arial" pitchFamily="34" charset="-122"/>
+                <a:cs typeface="Arial" pitchFamily="34" charset="-120"/>
+              </a:rPr>
+              <a:t>مراقبة السوشيال والمتجر</a:t>
+            </a:r>
+            <a:endParaRPr lang="ar-SA" sz="1050" dirty="0"/>
+          </a:p>
+        </p:txBody>
+      </p:sp>
+      <p:sp>
+        <p:nvSpPr>
+          <p:cNvPr id="24" name="Text 22"/>
+          <p:cNvSpPr txBox="1"/>
+          <p:nvPr/>
+        </p:nvSpPr>
+        <p:spPr>
+          <a:xfrm>
+            <a:off x="2697480" y="3611880"/>
+            <a:ext cx="1645920" cy="384048"/>
+          </a:xfrm>
+          <a:prstGeom prst="rect">
+            <a:avLst/>
+          </a:prstGeom>
+          <a:noFill/>
+          <a:ln/>
+        </p:spPr>
+        <p:txBody>
+          <a:bodyPr wrap="square" lIns="0" tIns="0" rIns="0" bIns="0" rtlCol="0" anchor="t"/>
+          <a:lstStyle/>
+          <a:p>
+            <a:pPr rtl="1" algn="ctr" indent="0" marL="0">
+              <a:buNone/>
+            </a:pPr>
+            <a:r>
+              <a:rPr lang="ar-SA" altLang="en-US" sz="1050" dirty="0">
+                <a:solidFill>
+                  <a:srgbClr val="FFFFFF"/>
+                </a:solidFill>
+                <a:latin typeface="Arial" pitchFamily="34" charset="0"/>
+                <a:ea typeface="Arial" pitchFamily="34" charset="-122"/>
+                <a:cs typeface="Arial" pitchFamily="34" charset="-120"/>
+              </a:rPr>
+              <a:t>«سوّها لي» + نبض الذكي</a:t>
+            </a:r>
+            <a:endParaRPr lang="ar-SA" sz="1050" dirty="0"/>
+          </a:p>
+        </p:txBody>
+      </p:sp>
+      <p:sp>
+        <p:nvSpPr>
+          <p:cNvPr id="25" name="Shape 23"/>
           <p:cNvSpPr/>
           <p:nvPr/>
         </p:nvSpPr>
         <p:spPr>
           <a:xfrm>
-            <a:off x="4416552" y="1719072"/>
-            <a:ext cx="310896" cy="310896"/>
-          </a:xfrm>
-          <a:prstGeom prst="ellipse">
-            <a:avLst/>
+            <a:off x="3017520" y="1207008"/>
+            <a:ext cx="1005840" cy="274320"/>
+          </a:xfrm>
+          <a:prstGeom prst="roundRect">
+            <a:avLst>
+              <a:gd name="adj" fmla="val 26667"/>
+            </a:avLst>
           </a:prstGeom>
           <a:solidFill>
-            <a:srgbClr val="10B981"/>
+            <a:srgbClr val="FACC15"/>
           </a:solidFill>
-          <a:ln w="25400">
+          <a:ln w="12700">
             <a:solidFill>
-              <a:srgbClr val="FFFFFF"/>
+              <a:srgbClr val="FACC15"/>
             </a:solidFill>
             <a:prstDash val="solid"/>
           </a:ln>
@@ -2592,14 +3159,14 @@
       </p:sp>
       <p:sp>
         <p:nvSpPr>
-          <p:cNvPr id="14" name="Text 12"/>
-          <p:cNvSpPr txBox="1"/>
-          <p:nvPr/>
-        </p:nvSpPr>
-        <p:spPr>
-          <a:xfrm>
-            <a:off x="3794760" y="1325880"/>
-            <a:ext cx="1554480" cy="274320"/>
+          <p:cNvPr id="26" name="Text 24"/>
+          <p:cNvSpPr txBox="1"/>
+          <p:nvPr/>
+        </p:nvSpPr>
+        <p:spPr>
+          <a:xfrm>
+            <a:off x="3017520" y="1243584"/>
+            <a:ext cx="1005840" cy="219456"/>
           </a:xfrm>
           <a:prstGeom prst="rect">
             <a:avLst/>
@@ -2615,46 +3182,7 @@
               <a:buNone/>
             </a:pPr>
             <a:r>
-              <a:rPr lang="ar-SA" altLang="en-US" sz="1100" dirty="0">
-                <a:solidFill>
-                  <a:srgbClr val="64748B"/>
-                </a:solidFill>
-                <a:latin typeface="Arial" pitchFamily="34" charset="0"/>
-                <a:ea typeface="Arial" pitchFamily="34" charset="-122"/>
-                <a:cs typeface="Arial" pitchFamily="34" charset="-120"/>
-              </a:rPr>
-              <a:t>أسبوع 6–8</a:t>
-            </a:r>
-            <a:endParaRPr lang="ar-SA" sz="1100" dirty="0"/>
-          </a:p>
-        </p:txBody>
-      </p:sp>
-      <p:sp>
-        <p:nvSpPr>
-          <p:cNvPr id="15" name="Text 13"/>
-          <p:cNvSpPr txBox="1"/>
-          <p:nvPr/>
-        </p:nvSpPr>
-        <p:spPr>
-          <a:xfrm>
-            <a:off x="3794760" y="2194560"/>
-            <a:ext cx="1554480" cy="365760"/>
-          </a:xfrm>
-          <a:prstGeom prst="rect">
-            <a:avLst/>
-          </a:prstGeom>
-          <a:noFill/>
-          <a:ln/>
-        </p:spPr>
-        <p:txBody>
-          <a:bodyPr wrap="square" lIns="0" tIns="0" rIns="0" bIns="0" rtlCol="0" anchor="t"/>
-          <a:lstStyle/>
-          <a:p>
-            <a:pPr rtl="1" algn="ctr" indent="0" marL="0">
-              <a:buNone/>
-            </a:pPr>
-            <a:r>
-              <a:rPr lang="ar-SA" altLang="en-US" sz="1500" b="1" dirty="0">
+              <a:rPr lang="ar-SA" altLang="en-US" sz="950" b="1" dirty="0">
                 <a:solidFill>
                   <a:srgbClr val="0F172A"/>
                 </a:solidFill>
@@ -2662,71 +3190,34 @@
                 <a:ea typeface="Arial" pitchFamily="34" charset="-122"/>
                 <a:cs typeface="Arial" pitchFamily="34" charset="-120"/>
               </a:rPr>
-              <a:t>محرك الفرص</a:t>
-            </a:r>
-            <a:endParaRPr lang="ar-SA" sz="1500" dirty="0"/>
-          </a:p>
-        </p:txBody>
-      </p:sp>
-      <p:sp>
-        <p:nvSpPr>
-          <p:cNvPr id="16" name="Text 14"/>
-          <p:cNvSpPr txBox="1"/>
-          <p:nvPr/>
-        </p:nvSpPr>
-        <p:spPr>
-          <a:xfrm>
-            <a:off x="3794760" y="2606040"/>
-            <a:ext cx="1554480" cy="1188720"/>
-          </a:xfrm>
-          <a:prstGeom prst="rect">
-            <a:avLst/>
-          </a:prstGeom>
-          <a:noFill/>
-          <a:ln/>
-        </p:spPr>
-        <p:txBody>
-          <a:bodyPr wrap="square" lIns="0" tIns="0" rIns="0" bIns="0" rtlCol="0" anchor="t"/>
-          <a:lstStyle/>
-          <a:p>
-            <a:pPr rtl="1" algn="ctr" indent="0" marL="0">
-              <a:buNone/>
-            </a:pPr>
-            <a:r>
-              <a:rPr lang="ar-SA" altLang="en-US" sz="1100" dirty="0">
-                <a:solidFill>
-                  <a:srgbClr val="475569"/>
-                </a:solidFill>
-                <a:latin typeface="Arial" pitchFamily="34" charset="0"/>
-                <a:ea typeface="Arial" pitchFamily="34" charset="-122"/>
-                <a:cs typeface="Arial" pitchFamily="34" charset="-120"/>
-              </a:rPr>
-              <a:t>اكتشاف الفرص، الشرح، والواجهة الأولى</a:t>
-            </a:r>
-            <a:endParaRPr lang="ar-SA" sz="1100" dirty="0"/>
-          </a:p>
-        </p:txBody>
-      </p:sp>
-      <p:sp>
-        <p:nvSpPr>
-          <p:cNvPr id="17" name="Shape 15"/>
+              <a:t>الأنسب للأغلب</a:t>
+            </a:r>
+            <a:endParaRPr lang="ar-SA" sz="950" dirty="0"/>
+          </a:p>
+        </p:txBody>
+      </p:sp>
+      <p:sp>
+        <p:nvSpPr>
+          <p:cNvPr id="27" name="Shape 25"/>
           <p:cNvSpPr/>
           <p:nvPr/>
         </p:nvSpPr>
         <p:spPr>
           <a:xfrm>
-            <a:off x="2770632" y="1719072"/>
-            <a:ext cx="310896" cy="310896"/>
-          </a:xfrm>
-          <a:prstGeom prst="ellipse">
-            <a:avLst/>
+            <a:off x="457200" y="1371600"/>
+            <a:ext cx="1920240" cy="2743200"/>
+          </a:xfrm>
+          <a:prstGeom prst="roundRect">
+            <a:avLst>
+              <a:gd name="adj" fmla="val 5714"/>
+            </a:avLst>
           </a:prstGeom>
           <a:solidFill>
-            <a:srgbClr val="10B981"/>
+            <a:srgbClr val="F8FAFC"/>
           </a:solidFill>
-          <a:ln w="25400">
+          <a:ln w="12700">
             <a:solidFill>
-              <a:srgbClr val="FFFFFF"/>
+              <a:srgbClr val="E2E8F0"/>
             </a:solidFill>
             <a:prstDash val="solid"/>
           </a:ln>
@@ -2734,14 +3225,14 @@
       </p:sp>
       <p:sp>
         <p:nvSpPr>
-          <p:cNvPr id="18" name="Text 16"/>
-          <p:cNvSpPr txBox="1"/>
-          <p:nvPr/>
-        </p:nvSpPr>
-        <p:spPr>
-          <a:xfrm>
-            <a:off x="2148840" y="1325880"/>
-            <a:ext cx="1554480" cy="274320"/>
+          <p:cNvPr id="28" name="Text 26"/>
+          <p:cNvSpPr txBox="1"/>
+          <p:nvPr/>
+        </p:nvSpPr>
+        <p:spPr>
+          <a:xfrm>
+            <a:off x="594360" y="1508760"/>
+            <a:ext cx="1645920" cy="365760"/>
           </a:xfrm>
           <a:prstGeom prst="rect">
             <a:avLst/>
@@ -2757,7 +3248,85 @@
               <a:buNone/>
             </a:pPr>
             <a:r>
-              <a:rPr lang="ar-SA" altLang="en-US" sz="1100" dirty="0">
+              <a:rPr lang="ar-SA" altLang="en-US" sz="1600" b="1" dirty="0">
+                <a:solidFill>
+                  <a:srgbClr val="0F172A"/>
+                </a:solidFill>
+                <a:latin typeface="Arial" pitchFamily="34" charset="0"/>
+                <a:ea typeface="Arial" pitchFamily="34" charset="-122"/>
+                <a:cs typeface="Arial" pitchFamily="34" charset="-120"/>
+              </a:rPr>
+              <a:t>الاحترافية</a:t>
+            </a:r>
+            <a:endParaRPr lang="ar-SA" sz="1600" dirty="0"/>
+          </a:p>
+        </p:txBody>
+      </p:sp>
+      <p:sp>
+        <p:nvSpPr>
+          <p:cNvPr id="29" name="Text 27"/>
+          <p:cNvSpPr txBox="1"/>
+          <p:nvPr/>
+        </p:nvSpPr>
+        <p:spPr>
+          <a:xfrm>
+            <a:off x="594360" y="1874520"/>
+            <a:ext cx="1645920" cy="548640"/>
+          </a:xfrm>
+          <a:prstGeom prst="rect">
+            <a:avLst/>
+          </a:prstGeom>
+          <a:noFill/>
+          <a:ln/>
+        </p:spPr>
+        <p:txBody>
+          <a:bodyPr wrap="square" lIns="0" tIns="0" rIns="0" bIns="0" rtlCol="0" anchor="t"/>
+          <a:lstStyle/>
+          <a:p>
+            <a:pPr rtl="1" algn="ctr" indent="0" marL="0">
+              <a:buNone/>
+            </a:pPr>
+            <a:r>
+              <a:rPr lang="ar-SA" altLang="en-US" sz="3000" b="1" dirty="0">
+                <a:solidFill>
+                  <a:srgbClr val="047857"/>
+                </a:solidFill>
+                <a:latin typeface="Arial" pitchFamily="34" charset="0"/>
+                <a:ea typeface="Arial" pitchFamily="34" charset="-122"/>
+                <a:cs typeface="Arial" pitchFamily="34" charset="-120"/>
+              </a:rPr>
+              <a:t>340</a:t>
+            </a:r>
+            <a:endParaRPr lang="ar-SA" sz="3000" dirty="0"/>
+          </a:p>
+        </p:txBody>
+      </p:sp>
+      <p:sp>
+        <p:nvSpPr>
+          <p:cNvPr id="30" name="Text 28"/>
+          <p:cNvSpPr txBox="1"/>
+          <p:nvPr/>
+        </p:nvSpPr>
+        <p:spPr>
+          <a:xfrm>
+            <a:off x="594360" y="2423160"/>
+            <a:ext cx="1645920" cy="274320"/>
+          </a:xfrm>
+          <a:prstGeom prst="rect">
+            <a:avLst/>
+          </a:prstGeom>
+          <a:noFill/>
+          <a:ln/>
+        </p:spPr>
+        <p:txBody>
+          <a:bodyPr wrap="square" lIns="0" tIns="0" rIns="0" bIns="0" rtlCol="0" anchor="t"/>
+          <a:lstStyle/>
+          <a:p>
+            <a:pPr rtl="1" algn="ctr" indent="0" marL="0">
+              <a:buNone/>
+            </a:pPr>
+            <a:r>
+              <a:rPr lang="ar-SA" altLang="en-US" sz="1050" dirty="0">
                 <a:solidFill>
                   <a:srgbClr val="64748B"/>
                 </a:solidFill>
@@ -2765,22 +3334,22 @@
                 <a:ea typeface="Arial" pitchFamily="34" charset="-122"/>
                 <a:cs typeface="Arial" pitchFamily="34" charset="-120"/>
               </a:rPr>
-              <a:t>أسبوع 9–11</a:t>
-            </a:r>
-            <a:endParaRPr lang="ar-SA" sz="1100" dirty="0"/>
-          </a:p>
-        </p:txBody>
-      </p:sp>
-      <p:sp>
-        <p:nvSpPr>
-          <p:cNvPr id="19" name="Text 17"/>
-          <p:cNvSpPr txBox="1"/>
-          <p:nvPr/>
-        </p:nvSpPr>
-        <p:spPr>
-          <a:xfrm>
-            <a:off x="2148840" y="2194560"/>
-            <a:ext cx="1554480" cy="365760"/>
+              <a:t>ريال شهريًا</a:t>
+            </a:r>
+            <a:endParaRPr lang="ar-SA" sz="1050" dirty="0"/>
+          </a:p>
+        </p:txBody>
+      </p:sp>
+      <p:sp>
+        <p:nvSpPr>
+          <p:cNvPr id="31" name="Text 29"/>
+          <p:cNvSpPr txBox="1"/>
+          <p:nvPr/>
+        </p:nvSpPr>
+        <p:spPr>
+          <a:xfrm>
+            <a:off x="594360" y="2788920"/>
+            <a:ext cx="1645920" cy="384048"/>
           </a:xfrm>
           <a:prstGeom prst="rect">
             <a:avLst/>
@@ -2796,30 +3365,30 @@
               <a:buNone/>
             </a:pPr>
             <a:r>
-              <a:rPr lang="ar-SA" altLang="en-US" sz="1500" b="1" dirty="0">
-                <a:solidFill>
-                  <a:srgbClr val="0F172A"/>
-                </a:solidFill>
-                <a:latin typeface="Arial" pitchFamily="34" charset="0"/>
-                <a:ea typeface="Arial" pitchFamily="34" charset="-122"/>
-                <a:cs typeface="Arial" pitchFamily="34" charset="-120"/>
-              </a:rPr>
-              <a:t>الحلقة كاملة</a:t>
-            </a:r>
-            <a:endParaRPr lang="ar-SA" sz="1500" dirty="0"/>
-          </a:p>
-        </p:txBody>
-      </p:sp>
-      <p:sp>
-        <p:nvSpPr>
-          <p:cNvPr id="20" name="Text 18"/>
-          <p:cNvSpPr txBox="1"/>
-          <p:nvPr/>
-        </p:nvSpPr>
-        <p:spPr>
-          <a:xfrm>
-            <a:off x="2148840" y="2606040"/>
-            <a:ext cx="1554480" cy="1188720"/>
+              <a:rPr lang="ar-SA" altLang="en-US" sz="1050" dirty="0">
+                <a:solidFill>
+                  <a:srgbClr val="475569"/>
+                </a:solidFill>
+                <a:latin typeface="Arial" pitchFamily="34" charset="0"/>
+                <a:ea typeface="Arial" pitchFamily="34" charset="-122"/>
+                <a:cs typeface="Arial" pitchFamily="34" charset="-120"/>
+              </a:rPr>
+              <a:t>محتوى غير محدود</a:t>
+            </a:r>
+            <a:endParaRPr lang="ar-SA" sz="1050" dirty="0"/>
+          </a:p>
+        </p:txBody>
+      </p:sp>
+      <p:sp>
+        <p:nvSpPr>
+          <p:cNvPr id="32" name="Text 30"/>
+          <p:cNvSpPr txBox="1"/>
+          <p:nvPr/>
+        </p:nvSpPr>
+        <p:spPr>
+          <a:xfrm>
+            <a:off x="594360" y="3200400"/>
+            <a:ext cx="1645920" cy="384048"/>
           </a:xfrm>
           <a:prstGeom prst="rect">
             <a:avLst/>
@@ -2835,7 +3404,7 @@
               <a:buNone/>
             </a:pPr>
             <a:r>
-              <a:rPr lang="ar-SA" altLang="en-US" sz="1100" dirty="0">
+              <a:rPr lang="ar-SA" altLang="en-US" sz="1050" dirty="0">
                 <a:solidFill>
                   <a:srgbClr val="475569"/>
                 </a:solidFill>
@@ -2843,47 +3412,22 @@
                 <a:ea typeface="Arial" pitchFamily="34" charset="-122"/>
                 <a:cs typeface="Arial" pitchFamily="34" charset="-120"/>
               </a:rPr>
-              <a:t>التجارب، التقرير الأسبوعي، لوحة الوكالات، تجربة مغلقة لـ 30 متجرًا</a:t>
-            </a:r>
-            <a:endParaRPr lang="ar-SA" sz="1100" dirty="0"/>
-          </a:p>
-        </p:txBody>
-      </p:sp>
-      <p:sp>
-        <p:nvSpPr>
-          <p:cNvPr id="21" name="Shape 19"/>
-          <p:cNvSpPr/>
-          <p:nvPr/>
-        </p:nvSpPr>
-        <p:spPr>
-          <a:xfrm>
-            <a:off x="1124712" y="1719072"/>
-            <a:ext cx="310896" cy="310896"/>
-          </a:xfrm>
-          <a:prstGeom prst="ellipse">
-            <a:avLst/>
-          </a:prstGeom>
-          <a:solidFill>
-            <a:srgbClr val="FACC15"/>
-          </a:solidFill>
-          <a:ln w="25400">
-            <a:solidFill>
-              <a:srgbClr val="FFFFFF"/>
-            </a:solidFill>
-            <a:prstDash val="solid"/>
-          </a:ln>
-        </p:spPr>
-      </p:sp>
-      <p:sp>
-        <p:nvSpPr>
-          <p:cNvPr id="22" name="Text 20"/>
-          <p:cNvSpPr txBox="1"/>
-          <p:nvPr/>
-        </p:nvSpPr>
-        <p:spPr>
-          <a:xfrm>
-            <a:off x="502920" y="1325880"/>
-            <a:ext cx="1554480" cy="274320"/>
+              <a:t>تنبيهات يومية + 10 أعضاء</a:t>
+            </a:r>
+            <a:endParaRPr lang="ar-SA" sz="1050" dirty="0"/>
+          </a:p>
+        </p:txBody>
+      </p:sp>
+      <p:sp>
+        <p:nvSpPr>
+          <p:cNvPr id="33" name="Text 31"/>
+          <p:cNvSpPr txBox="1"/>
+          <p:nvPr/>
+        </p:nvSpPr>
+        <p:spPr>
+          <a:xfrm>
+            <a:off x="594360" y="3611880"/>
+            <a:ext cx="1645920" cy="384048"/>
           </a:xfrm>
           <a:prstGeom prst="rect">
             <a:avLst/>
@@ -2899,85 +3443,7 @@
               <a:buNone/>
             </a:pPr>
             <a:r>
-              <a:rPr lang="ar-SA" altLang="en-US" sz="1100" dirty="0">
-                <a:solidFill>
-                  <a:srgbClr val="64748B"/>
-                </a:solidFill>
-                <a:latin typeface="Arial" pitchFamily="34" charset="0"/>
-                <a:ea typeface="Arial" pitchFamily="34" charset="-122"/>
-                <a:cs typeface="Arial" pitchFamily="34" charset="-120"/>
-              </a:rPr>
-              <a:t>أسبوع 12–13</a:t>
-            </a:r>
-            <a:endParaRPr lang="ar-SA" sz="1100" dirty="0"/>
-          </a:p>
-        </p:txBody>
-      </p:sp>
-      <p:sp>
-        <p:nvSpPr>
-          <p:cNvPr id="23" name="Text 21"/>
-          <p:cNvSpPr txBox="1"/>
-          <p:nvPr/>
-        </p:nvSpPr>
-        <p:spPr>
-          <a:xfrm>
-            <a:off x="502920" y="2194560"/>
-            <a:ext cx="1554480" cy="365760"/>
-          </a:xfrm>
-          <a:prstGeom prst="rect">
-            <a:avLst/>
-          </a:prstGeom>
-          <a:noFill/>
-          <a:ln/>
-        </p:spPr>
-        <p:txBody>
-          <a:bodyPr wrap="square" lIns="0" tIns="0" rIns="0" bIns="0" rtlCol="0" anchor="t"/>
-          <a:lstStyle/>
-          <a:p>
-            <a:pPr rtl="1" algn="ctr" indent="0" marL="0">
-              <a:buNone/>
-            </a:pPr>
-            <a:r>
-              <a:rPr lang="ar-SA" altLang="en-US" sz="1500" b="1" dirty="0">
-                <a:solidFill>
-                  <a:srgbClr val="0F172A"/>
-                </a:solidFill>
-                <a:latin typeface="Arial" pitchFamily="34" charset="0"/>
-                <a:ea typeface="Arial" pitchFamily="34" charset="-122"/>
-                <a:cs typeface="Arial" pitchFamily="34" charset="-120"/>
-              </a:rPr>
-              <a:t>الإطلاق</a:t>
-            </a:r>
-            <a:endParaRPr lang="ar-SA" sz="1500" dirty="0"/>
-          </a:p>
-        </p:txBody>
-      </p:sp>
-      <p:sp>
-        <p:nvSpPr>
-          <p:cNvPr id="24" name="Text 22"/>
-          <p:cNvSpPr txBox="1"/>
-          <p:nvPr/>
-        </p:nvSpPr>
-        <p:spPr>
-          <a:xfrm>
-            <a:off x="502920" y="2606040"/>
-            <a:ext cx="1554480" cy="1188720"/>
-          </a:xfrm>
-          <a:prstGeom prst="rect">
-            <a:avLst/>
-          </a:prstGeom>
-          <a:noFill/>
-          <a:ln/>
-        </p:spPr>
-        <p:txBody>
-          <a:bodyPr wrap="square" lIns="0" tIns="0" rIns="0" bIns="0" rtlCol="0" anchor="t"/>
-          <a:lstStyle/>
-          <a:p>
-            <a:pPr rtl="1" algn="ctr" indent="0" marL="0">
-              <a:buNone/>
-            </a:pPr>
-            <a:r>
-              <a:rPr lang="ar-SA" altLang="en-US" sz="1100" dirty="0">
+              <a:rPr lang="ar-SA" altLang="en-US" sz="1050" dirty="0">
                 <a:solidFill>
                   <a:srgbClr val="475569"/>
                 </a:solidFill>
@@ -2985,73 +3451,46 @@
                 <a:ea typeface="Arial" pitchFamily="34" charset="-122"/>
                 <a:cs typeface="Arial" pitchFamily="34" charset="-120"/>
               </a:rPr>
-              <a:t>النشر في متجر تطبيقات سلة</a:t>
-            </a:r>
-            <a:endParaRPr lang="ar-SA" sz="1100" dirty="0"/>
-          </a:p>
-        </p:txBody>
-      </p:sp>
-      <p:sp>
-        <p:nvSpPr>
-          <p:cNvPr id="25" name="Shape 23"/>
-          <p:cNvSpPr/>
-          <p:nvPr/>
-        </p:nvSpPr>
-        <p:spPr>
-          <a:xfrm>
-            <a:off x="457200" y="3931920"/>
-            <a:ext cx="8229600" cy="502920"/>
-          </a:xfrm>
-          <a:prstGeom prst="roundRect">
-            <a:avLst>
-              <a:gd name="adj" fmla="val 18182"/>
-            </a:avLst>
-          </a:prstGeom>
-          <a:solidFill>
-            <a:srgbClr val="FEF9C3"/>
-          </a:solidFill>
-          <a:ln w="12700">
-            <a:solidFill>
-              <a:srgbClr val="FEF9C3"/>
-            </a:solidFill>
-            <a:prstDash val="solid"/>
-          </a:ln>
-        </p:spPr>
-      </p:sp>
-      <p:sp>
-        <p:nvSpPr>
-          <p:cNvPr id="26" name="Text 24"/>
-          <p:cNvSpPr txBox="1"/>
-          <p:nvPr/>
-        </p:nvSpPr>
-        <p:spPr>
-          <a:xfrm>
-            <a:off x="640080" y="4041648"/>
-            <a:ext cx="7863840" cy="292608"/>
-          </a:xfrm>
-          <a:prstGeom prst="rect">
-            <a:avLst/>
-          </a:prstGeom>
-          <a:noFill/>
-          <a:ln/>
-        </p:spPr>
-        <p:txBody>
-          <a:bodyPr wrap="square" lIns="0" tIns="0" rIns="0" bIns="0" rtlCol="0" anchor="t"/>
-          <a:lstStyle/>
-          <a:p>
-            <a:pPr rtl="1" algn="ctr" indent="0" marL="0">
-              <a:buNone/>
-            </a:pPr>
-            <a:r>
-              <a:rPr lang="ar-SA" altLang="en-US" sz="1250" b="1" dirty="0">
-                <a:solidFill>
-                  <a:srgbClr val="A16207"/>
-                </a:solidFill>
-                <a:latin typeface="Arial" pitchFamily="34" charset="0"/>
-                <a:ea typeface="Arial" pitchFamily="34" charset="-122"/>
-                <a:cs typeface="Arial" pitchFamily="34" charset="-120"/>
-              </a:rPr>
-              <a:t>شرط البداية: إذا لم ينفذ 3 من كل 10 متاجر توصية واحدة على الأقل، نراجع القيمة قبل كتابة الكود</a:t>
+              <a:t>جلسة شهرية مع خبير</a:t>
+            </a:r>
+            <a:endParaRPr lang="ar-SA" sz="1050" dirty="0"/>
+          </a:p>
+        </p:txBody>
+      </p:sp>
+      <p:sp>
+        <p:nvSpPr>
+          <p:cNvPr id="34" name="Text 32"/>
+          <p:cNvSpPr txBox="1"/>
+          <p:nvPr/>
+        </p:nvSpPr>
+        <p:spPr>
+          <a:xfrm>
+            <a:off x="457200" y="4297680"/>
+            <a:ext cx="8229600" cy="320040"/>
+          </a:xfrm>
+          <a:prstGeom prst="rect">
+            <a:avLst/>
+          </a:prstGeom>
+          <a:noFill/>
+          <a:ln/>
+        </p:spPr>
+        <p:txBody>
+          <a:bodyPr wrap="square" lIns="0" tIns="0" rIns="0" bIns="0" rtlCol="0" anchor="t"/>
+          <a:lstStyle/>
+          <a:p>
+            <a:pPr rtl="1" algn="r" indent="0" marL="0">
+              <a:buNone/>
+            </a:pPr>
+            <a:r>
+              <a:rPr lang="ar-SA" altLang="en-US" sz="1250" dirty="0">
+                <a:solidFill>
+                  <a:srgbClr val="475569"/>
+                </a:solidFill>
+                <a:latin typeface="Arial" pitchFamily="34" charset="0"/>
+                <a:ea typeface="Arial" pitchFamily="34" charset="-122"/>
+                <a:cs typeface="Arial" pitchFamily="34" charset="-120"/>
+              </a:rPr>
+              <a:t>الوكالات: 99 ريال لكل متجر (10 متاجر فأكثر). الاشتراك عبر متجر تطبيقات سلة.</a:t>
             </a:r>
             <a:endParaRPr lang="ar-SA" sz="1250" dirty="0"/>
           </a:p>
@@ -3059,7 +3498,7 @@
       </p:sp>
       <p:sp>
         <p:nvSpPr>
-          <p:cNvPr id="27" name="Text 25"/>
+          <p:cNvPr id="35" name="Text 33"/>
           <p:cNvSpPr txBox="1"/>
           <p:nvPr/>
         </p:nvSpPr>
@@ -3098,7 +3537,7 @@
       </p:sp>
       <p:sp>
         <p:nvSpPr>
-          <p:cNvPr id="28" name="Text 26"/>
+          <p:cNvPr id="36" name="Text 34"/>
           <p:cNvSpPr txBox="1"/>
           <p:nvPr/>
         </p:nvSpPr>
@@ -3146,6 +3585,993 @@
 <file path=ppt/slides/slide11.xml><?xml version="1.0" encoding="utf-8"?>
 <p:sld xmlns:a="http://schemas.openxmlformats.org/drawingml/2006/main" xmlns:r="http://schemas.openxmlformats.org/officeDocument/2006/relationships" xmlns:p="http://schemas.openxmlformats.org/presentationml/2006/main">
   <p:cSld name="Slide 11">
+    <p:bg>
+      <p:bgPr>
+        <a:solidFill>
+          <a:srgbClr val="FFFFFF"/>
+        </a:solidFill>
+      </p:bgPr>
+    </p:bg>
+    <p:spTree>
+      <p:nvGrpSpPr>
+        <p:cNvPr id="1" name=""/>
+        <p:cNvGrpSpPr/>
+        <p:nvPr/>
+      </p:nvGrpSpPr>
+      <p:grpSpPr>
+        <a:xfrm>
+          <a:off x="0" y="0"/>
+          <a:ext cx="0" cy="0"/>
+          <a:chOff x="0" y="0"/>
+          <a:chExt cx="0" cy="0"/>
+        </a:xfrm>
+      </p:grpSpPr>
+      <p:sp>
+        <p:nvSpPr>
+          <p:cNvPr id="2" name="Text 0"/>
+          <p:cNvSpPr txBox="1"/>
+          <p:nvPr/>
+        </p:nvSpPr>
+        <p:spPr>
+          <a:xfrm>
+            <a:off x="457200" y="320040"/>
+            <a:ext cx="8229600" cy="548640"/>
+          </a:xfrm>
+          <a:prstGeom prst="rect">
+            <a:avLst/>
+          </a:prstGeom>
+          <a:noFill/>
+          <a:ln/>
+        </p:spPr>
+        <p:txBody>
+          <a:bodyPr wrap="square" lIns="0" tIns="0" rIns="0" bIns="0" rtlCol="0" anchor="t"/>
+          <a:lstStyle/>
+          <a:p>
+            <a:pPr rtl="1" algn="r" indent="0" marL="0">
+              <a:buNone/>
+            </a:pPr>
+            <a:r>
+              <a:rPr lang="ar-SA" altLang="en-US" sz="3000" b="1" dirty="0">
+                <a:solidFill>
+                  <a:srgbClr val="0F172A"/>
+                </a:solidFill>
+                <a:latin typeface="Arial" pitchFamily="34" charset="0"/>
+                <a:ea typeface="Arial" pitchFamily="34" charset="-122"/>
+                <a:cs typeface="Arial" pitchFamily="34" charset="-120"/>
+              </a:rPr>
+              <a:t>الخطة: 90 يومًا حتى الإطلاق</a:t>
+            </a:r>
+            <a:endParaRPr lang="ar-SA" sz="3000" dirty="0"/>
+          </a:p>
+        </p:txBody>
+      </p:sp>
+      <p:sp>
+        <p:nvSpPr>
+          <p:cNvPr id="3" name="Text 1"/>
+          <p:cNvSpPr txBox="1"/>
+          <p:nvPr/>
+        </p:nvSpPr>
+        <p:spPr>
+          <a:xfrm>
+            <a:off x="457200" y="868680"/>
+            <a:ext cx="8229600" cy="365760"/>
+          </a:xfrm>
+          <a:prstGeom prst="rect">
+            <a:avLst/>
+          </a:prstGeom>
+          <a:noFill/>
+          <a:ln/>
+        </p:spPr>
+        <p:txBody>
+          <a:bodyPr wrap="square" lIns="0" tIns="0" rIns="0" bIns="0" rtlCol="0" anchor="t"/>
+          <a:lstStyle/>
+          <a:p>
+            <a:pPr rtl="1" algn="r" indent="0" marL="0">
+              <a:buNone/>
+            </a:pPr>
+            <a:r>
+              <a:rPr lang="ar-SA" altLang="en-US" sz="1400" dirty="0">
+                <a:solidFill>
+                  <a:srgbClr val="475569"/>
+                </a:solidFill>
+                <a:latin typeface="Arial" pitchFamily="34" charset="0"/>
+                <a:ea typeface="Arial" pitchFamily="34" charset="-122"/>
+                <a:cs typeface="Arial" pitchFamily="34" charset="-120"/>
+              </a:rPr>
+              <a:t>كل مرحلة لها شرط نجاح قبل الانتقال للتالية</a:t>
+            </a:r>
+            <a:endParaRPr lang="ar-SA" sz="1400" dirty="0"/>
+          </a:p>
+        </p:txBody>
+      </p:sp>
+      <p:sp>
+        <p:nvSpPr>
+          <p:cNvPr id="4" name="Shape 2"/>
+          <p:cNvSpPr/>
+          <p:nvPr/>
+        </p:nvSpPr>
+        <p:spPr>
+          <a:xfrm>
+            <a:off x="1280160" y="1874520"/>
+            <a:ext cx="6583680" cy="0"/>
+          </a:xfrm>
+          <a:prstGeom prst="line">
+            <a:avLst/>
+          </a:prstGeom>
+          <a:noFill/>
+          <a:ln w="25400">
+            <a:solidFill>
+              <a:srgbClr val="E2E8F0"/>
+            </a:solidFill>
+            <a:prstDash val="solid"/>
+          </a:ln>
+        </p:spPr>
+      </p:sp>
+      <p:sp>
+        <p:nvSpPr>
+          <p:cNvPr id="5" name="Shape 3"/>
+          <p:cNvSpPr/>
+          <p:nvPr/>
+        </p:nvSpPr>
+        <p:spPr>
+          <a:xfrm>
+            <a:off x="7708392" y="1719072"/>
+            <a:ext cx="310896" cy="310896"/>
+          </a:xfrm>
+          <a:prstGeom prst="ellipse">
+            <a:avLst/>
+          </a:prstGeom>
+          <a:solidFill>
+            <a:srgbClr val="10B981"/>
+          </a:solidFill>
+          <a:ln w="25400">
+            <a:solidFill>
+              <a:srgbClr val="FFFFFF"/>
+            </a:solidFill>
+            <a:prstDash val="solid"/>
+          </a:ln>
+        </p:spPr>
+      </p:sp>
+      <p:sp>
+        <p:nvSpPr>
+          <p:cNvPr id="6" name="Text 4"/>
+          <p:cNvSpPr txBox="1"/>
+          <p:nvPr/>
+        </p:nvSpPr>
+        <p:spPr>
+          <a:xfrm>
+            <a:off x="7086600" y="1325880"/>
+            <a:ext cx="1554480" cy="274320"/>
+          </a:xfrm>
+          <a:prstGeom prst="rect">
+            <a:avLst/>
+          </a:prstGeom>
+          <a:noFill/>
+          <a:ln/>
+        </p:spPr>
+        <p:txBody>
+          <a:bodyPr wrap="square" lIns="0" tIns="0" rIns="0" bIns="0" rtlCol="0" anchor="t"/>
+          <a:lstStyle/>
+          <a:p>
+            <a:pPr rtl="1" algn="ctr" indent="0" marL="0">
+              <a:buNone/>
+            </a:pPr>
+            <a:r>
+              <a:rPr lang="ar-SA" altLang="en-US" sz="1100" dirty="0">
+                <a:solidFill>
+                  <a:srgbClr val="64748B"/>
+                </a:solidFill>
+                <a:latin typeface="Arial" pitchFamily="34" charset="0"/>
+                <a:ea typeface="Arial" pitchFamily="34" charset="-122"/>
+                <a:cs typeface="Arial" pitchFamily="34" charset="-120"/>
+              </a:rPr>
+              <a:t>أسبوع 1–2</a:t>
+            </a:r>
+            <a:endParaRPr lang="ar-SA" sz="1100" dirty="0"/>
+          </a:p>
+        </p:txBody>
+      </p:sp>
+      <p:sp>
+        <p:nvSpPr>
+          <p:cNvPr id="7" name="Text 5"/>
+          <p:cNvSpPr txBox="1"/>
+          <p:nvPr/>
+        </p:nvSpPr>
+        <p:spPr>
+          <a:xfrm>
+            <a:off x="7086600" y="2194560"/>
+            <a:ext cx="1554480" cy="365760"/>
+          </a:xfrm>
+          <a:prstGeom prst="rect">
+            <a:avLst/>
+          </a:prstGeom>
+          <a:noFill/>
+          <a:ln/>
+        </p:spPr>
+        <p:txBody>
+          <a:bodyPr wrap="square" lIns="0" tIns="0" rIns="0" bIns="0" rtlCol="0" anchor="t"/>
+          <a:lstStyle/>
+          <a:p>
+            <a:pPr rtl="1" algn="ctr" indent="0" marL="0">
+              <a:buNone/>
+            </a:pPr>
+            <a:r>
+              <a:rPr lang="ar-SA" altLang="en-US" sz="1500" b="1" dirty="0">
+                <a:solidFill>
+                  <a:srgbClr val="0F172A"/>
+                </a:solidFill>
+                <a:latin typeface="Arial" pitchFamily="34" charset="0"/>
+                <a:ea typeface="Arial" pitchFamily="34" charset="-122"/>
+                <a:cs typeface="Arial" pitchFamily="34" charset="-120"/>
+              </a:rPr>
+              <a:t>التحقق</a:t>
+            </a:r>
+            <a:endParaRPr lang="ar-SA" sz="1500" dirty="0"/>
+          </a:p>
+        </p:txBody>
+      </p:sp>
+      <p:sp>
+        <p:nvSpPr>
+          <p:cNvPr id="8" name="Text 6"/>
+          <p:cNvSpPr txBox="1"/>
+          <p:nvPr/>
+        </p:nvSpPr>
+        <p:spPr>
+          <a:xfrm>
+            <a:off x="7086600" y="2606040"/>
+            <a:ext cx="1554480" cy="1188720"/>
+          </a:xfrm>
+          <a:prstGeom prst="rect">
+            <a:avLst/>
+          </a:prstGeom>
+          <a:noFill/>
+          <a:ln/>
+        </p:spPr>
+        <p:txBody>
+          <a:bodyPr wrap="square" lIns="0" tIns="0" rIns="0" bIns="0" rtlCol="0" anchor="t"/>
+          <a:lstStyle/>
+          <a:p>
+            <a:pPr rtl="1" algn="ctr" indent="0" marL="0">
+              <a:buNone/>
+            </a:pPr>
+            <a:r>
+              <a:rPr lang="ar-SA" altLang="en-US" sz="1100" dirty="0">
+                <a:solidFill>
+                  <a:srgbClr val="475569"/>
+                </a:solidFill>
+                <a:latin typeface="Arial" pitchFamily="34" charset="0"/>
+                <a:ea typeface="Arial" pitchFamily="34" charset="-122"/>
+                <a:cs typeface="Arial" pitchFamily="34" charset="-120"/>
+              </a:rPr>
+              <a:t>تقارير يدوية لـ 10 متاجر. هل ينفذون؟ هل سيدفعون؟</a:t>
+            </a:r>
+            <a:endParaRPr lang="ar-SA" sz="1100" dirty="0"/>
+          </a:p>
+        </p:txBody>
+      </p:sp>
+      <p:sp>
+        <p:nvSpPr>
+          <p:cNvPr id="9" name="Shape 7"/>
+          <p:cNvSpPr/>
+          <p:nvPr/>
+        </p:nvSpPr>
+        <p:spPr>
+          <a:xfrm>
+            <a:off x="6062472" y="1719072"/>
+            <a:ext cx="310896" cy="310896"/>
+          </a:xfrm>
+          <a:prstGeom prst="ellipse">
+            <a:avLst/>
+          </a:prstGeom>
+          <a:solidFill>
+            <a:srgbClr val="10B981"/>
+          </a:solidFill>
+          <a:ln w="25400">
+            <a:solidFill>
+              <a:srgbClr val="FFFFFF"/>
+            </a:solidFill>
+            <a:prstDash val="solid"/>
+          </a:ln>
+        </p:spPr>
+      </p:sp>
+      <p:sp>
+        <p:nvSpPr>
+          <p:cNvPr id="10" name="Text 8"/>
+          <p:cNvSpPr txBox="1"/>
+          <p:nvPr/>
+        </p:nvSpPr>
+        <p:spPr>
+          <a:xfrm>
+            <a:off x="5440680" y="1325880"/>
+            <a:ext cx="1554480" cy="274320"/>
+          </a:xfrm>
+          <a:prstGeom prst="rect">
+            <a:avLst/>
+          </a:prstGeom>
+          <a:noFill/>
+          <a:ln/>
+        </p:spPr>
+        <p:txBody>
+          <a:bodyPr wrap="square" lIns="0" tIns="0" rIns="0" bIns="0" rtlCol="0" anchor="t"/>
+          <a:lstStyle/>
+          <a:p>
+            <a:pPr rtl="1" algn="ctr" indent="0" marL="0">
+              <a:buNone/>
+            </a:pPr>
+            <a:r>
+              <a:rPr lang="ar-SA" altLang="en-US" sz="1100" dirty="0">
+                <a:solidFill>
+                  <a:srgbClr val="64748B"/>
+                </a:solidFill>
+                <a:latin typeface="Arial" pitchFamily="34" charset="0"/>
+                <a:ea typeface="Arial" pitchFamily="34" charset="-122"/>
+                <a:cs typeface="Arial" pitchFamily="34" charset="-120"/>
+              </a:rPr>
+              <a:t>أسبوع 3–5</a:t>
+            </a:r>
+            <a:endParaRPr lang="ar-SA" sz="1100" dirty="0"/>
+          </a:p>
+        </p:txBody>
+      </p:sp>
+      <p:sp>
+        <p:nvSpPr>
+          <p:cNvPr id="11" name="Text 9"/>
+          <p:cNvSpPr txBox="1"/>
+          <p:nvPr/>
+        </p:nvSpPr>
+        <p:spPr>
+          <a:xfrm>
+            <a:off x="5440680" y="2194560"/>
+            <a:ext cx="1554480" cy="365760"/>
+          </a:xfrm>
+          <a:prstGeom prst="rect">
+            <a:avLst/>
+          </a:prstGeom>
+          <a:noFill/>
+          <a:ln/>
+        </p:spPr>
+        <p:txBody>
+          <a:bodyPr wrap="square" lIns="0" tIns="0" rIns="0" bIns="0" rtlCol="0" anchor="t"/>
+          <a:lstStyle/>
+          <a:p>
+            <a:pPr rtl="1" algn="ctr" indent="0" marL="0">
+              <a:buNone/>
+            </a:pPr>
+            <a:r>
+              <a:rPr lang="ar-SA" altLang="en-US" sz="1500" b="1" dirty="0">
+                <a:solidFill>
+                  <a:srgbClr val="0F172A"/>
+                </a:solidFill>
+                <a:latin typeface="Arial" pitchFamily="34" charset="0"/>
+                <a:ea typeface="Arial" pitchFamily="34" charset="-122"/>
+                <a:cs typeface="Arial" pitchFamily="34" charset="-120"/>
+              </a:rPr>
+              <a:t>أساس البيانات</a:t>
+            </a:r>
+            <a:endParaRPr lang="ar-SA" sz="1500" dirty="0"/>
+          </a:p>
+        </p:txBody>
+      </p:sp>
+      <p:sp>
+        <p:nvSpPr>
+          <p:cNvPr id="12" name="Text 10"/>
+          <p:cNvSpPr txBox="1"/>
+          <p:nvPr/>
+        </p:nvSpPr>
+        <p:spPr>
+          <a:xfrm>
+            <a:off x="5440680" y="2606040"/>
+            <a:ext cx="1554480" cy="1188720"/>
+          </a:xfrm>
+          <a:prstGeom prst="rect">
+            <a:avLst/>
+          </a:prstGeom>
+          <a:noFill/>
+          <a:ln/>
+        </p:spPr>
+        <p:txBody>
+          <a:bodyPr wrap="square" lIns="0" tIns="0" rIns="0" bIns="0" rtlCol="0" anchor="t"/>
+          <a:lstStyle/>
+          <a:p>
+            <a:pPr rtl="1" algn="ctr" indent="0" marL="0">
+              <a:buNone/>
+            </a:pPr>
+            <a:r>
+              <a:rPr lang="ar-SA" altLang="en-US" sz="1100" dirty="0">
+                <a:solidFill>
+                  <a:srgbClr val="475569"/>
+                </a:solidFill>
+                <a:latin typeface="Arial" pitchFamily="34" charset="0"/>
+                <a:ea typeface="Arial" pitchFamily="34" charset="-122"/>
+                <a:cs typeface="Arial" pitchFamily="34" charset="-120"/>
+              </a:rPr>
+              <a:t>الربط مع سلة، واستيراد البيانات، ومطابقة الأرقام</a:t>
+            </a:r>
+            <a:endParaRPr lang="ar-SA" sz="1100" dirty="0"/>
+          </a:p>
+        </p:txBody>
+      </p:sp>
+      <p:sp>
+        <p:nvSpPr>
+          <p:cNvPr id="13" name="Shape 11"/>
+          <p:cNvSpPr/>
+          <p:nvPr/>
+        </p:nvSpPr>
+        <p:spPr>
+          <a:xfrm>
+            <a:off x="4416552" y="1719072"/>
+            <a:ext cx="310896" cy="310896"/>
+          </a:xfrm>
+          <a:prstGeom prst="ellipse">
+            <a:avLst/>
+          </a:prstGeom>
+          <a:solidFill>
+            <a:srgbClr val="10B981"/>
+          </a:solidFill>
+          <a:ln w="25400">
+            <a:solidFill>
+              <a:srgbClr val="FFFFFF"/>
+            </a:solidFill>
+            <a:prstDash val="solid"/>
+          </a:ln>
+        </p:spPr>
+      </p:sp>
+      <p:sp>
+        <p:nvSpPr>
+          <p:cNvPr id="14" name="Text 12"/>
+          <p:cNvSpPr txBox="1"/>
+          <p:nvPr/>
+        </p:nvSpPr>
+        <p:spPr>
+          <a:xfrm>
+            <a:off x="3794760" y="1325880"/>
+            <a:ext cx="1554480" cy="274320"/>
+          </a:xfrm>
+          <a:prstGeom prst="rect">
+            <a:avLst/>
+          </a:prstGeom>
+          <a:noFill/>
+          <a:ln/>
+        </p:spPr>
+        <p:txBody>
+          <a:bodyPr wrap="square" lIns="0" tIns="0" rIns="0" bIns="0" rtlCol="0" anchor="t"/>
+          <a:lstStyle/>
+          <a:p>
+            <a:pPr rtl="1" algn="ctr" indent="0" marL="0">
+              <a:buNone/>
+            </a:pPr>
+            <a:r>
+              <a:rPr lang="ar-SA" altLang="en-US" sz="1100" dirty="0">
+                <a:solidFill>
+                  <a:srgbClr val="64748B"/>
+                </a:solidFill>
+                <a:latin typeface="Arial" pitchFamily="34" charset="0"/>
+                <a:ea typeface="Arial" pitchFamily="34" charset="-122"/>
+                <a:cs typeface="Arial" pitchFamily="34" charset="-120"/>
+              </a:rPr>
+              <a:t>أسبوع 6–8</a:t>
+            </a:r>
+            <a:endParaRPr lang="ar-SA" sz="1100" dirty="0"/>
+          </a:p>
+        </p:txBody>
+      </p:sp>
+      <p:sp>
+        <p:nvSpPr>
+          <p:cNvPr id="15" name="Text 13"/>
+          <p:cNvSpPr txBox="1"/>
+          <p:nvPr/>
+        </p:nvSpPr>
+        <p:spPr>
+          <a:xfrm>
+            <a:off x="3794760" y="2194560"/>
+            <a:ext cx="1554480" cy="365760"/>
+          </a:xfrm>
+          <a:prstGeom prst="rect">
+            <a:avLst/>
+          </a:prstGeom>
+          <a:noFill/>
+          <a:ln/>
+        </p:spPr>
+        <p:txBody>
+          <a:bodyPr wrap="square" lIns="0" tIns="0" rIns="0" bIns="0" rtlCol="0" anchor="t"/>
+          <a:lstStyle/>
+          <a:p>
+            <a:pPr rtl="1" algn="ctr" indent="0" marL="0">
+              <a:buNone/>
+            </a:pPr>
+            <a:r>
+              <a:rPr lang="ar-SA" altLang="en-US" sz="1500" b="1" dirty="0">
+                <a:solidFill>
+                  <a:srgbClr val="0F172A"/>
+                </a:solidFill>
+                <a:latin typeface="Arial" pitchFamily="34" charset="0"/>
+                <a:ea typeface="Arial" pitchFamily="34" charset="-122"/>
+                <a:cs typeface="Arial" pitchFamily="34" charset="-120"/>
+              </a:rPr>
+              <a:t>محرك الفرص</a:t>
+            </a:r>
+            <a:endParaRPr lang="ar-SA" sz="1500" dirty="0"/>
+          </a:p>
+        </p:txBody>
+      </p:sp>
+      <p:sp>
+        <p:nvSpPr>
+          <p:cNvPr id="16" name="Text 14"/>
+          <p:cNvSpPr txBox="1"/>
+          <p:nvPr/>
+        </p:nvSpPr>
+        <p:spPr>
+          <a:xfrm>
+            <a:off x="3794760" y="2606040"/>
+            <a:ext cx="1554480" cy="1188720"/>
+          </a:xfrm>
+          <a:prstGeom prst="rect">
+            <a:avLst/>
+          </a:prstGeom>
+          <a:noFill/>
+          <a:ln/>
+        </p:spPr>
+        <p:txBody>
+          <a:bodyPr wrap="square" lIns="0" tIns="0" rIns="0" bIns="0" rtlCol="0" anchor="t"/>
+          <a:lstStyle/>
+          <a:p>
+            <a:pPr rtl="1" algn="ctr" indent="0" marL="0">
+              <a:buNone/>
+            </a:pPr>
+            <a:r>
+              <a:rPr lang="ar-SA" altLang="en-US" sz="1100" dirty="0">
+                <a:solidFill>
+                  <a:srgbClr val="475569"/>
+                </a:solidFill>
+                <a:latin typeface="Arial" pitchFamily="34" charset="0"/>
+                <a:ea typeface="Arial" pitchFamily="34" charset="-122"/>
+                <a:cs typeface="Arial" pitchFamily="34" charset="-120"/>
+              </a:rPr>
+              <a:t>اكتشاف الفرص، الشرح، والواجهة الأولى</a:t>
+            </a:r>
+            <a:endParaRPr lang="ar-SA" sz="1100" dirty="0"/>
+          </a:p>
+        </p:txBody>
+      </p:sp>
+      <p:sp>
+        <p:nvSpPr>
+          <p:cNvPr id="17" name="Shape 15"/>
+          <p:cNvSpPr/>
+          <p:nvPr/>
+        </p:nvSpPr>
+        <p:spPr>
+          <a:xfrm>
+            <a:off x="2770632" y="1719072"/>
+            <a:ext cx="310896" cy="310896"/>
+          </a:xfrm>
+          <a:prstGeom prst="ellipse">
+            <a:avLst/>
+          </a:prstGeom>
+          <a:solidFill>
+            <a:srgbClr val="10B981"/>
+          </a:solidFill>
+          <a:ln w="25400">
+            <a:solidFill>
+              <a:srgbClr val="FFFFFF"/>
+            </a:solidFill>
+            <a:prstDash val="solid"/>
+          </a:ln>
+        </p:spPr>
+      </p:sp>
+      <p:sp>
+        <p:nvSpPr>
+          <p:cNvPr id="18" name="Text 16"/>
+          <p:cNvSpPr txBox="1"/>
+          <p:nvPr/>
+        </p:nvSpPr>
+        <p:spPr>
+          <a:xfrm>
+            <a:off x="2148840" y="1325880"/>
+            <a:ext cx="1554480" cy="274320"/>
+          </a:xfrm>
+          <a:prstGeom prst="rect">
+            <a:avLst/>
+          </a:prstGeom>
+          <a:noFill/>
+          <a:ln/>
+        </p:spPr>
+        <p:txBody>
+          <a:bodyPr wrap="square" lIns="0" tIns="0" rIns="0" bIns="0" rtlCol="0" anchor="t"/>
+          <a:lstStyle/>
+          <a:p>
+            <a:pPr rtl="1" algn="ctr" indent="0" marL="0">
+              <a:buNone/>
+            </a:pPr>
+            <a:r>
+              <a:rPr lang="ar-SA" altLang="en-US" sz="1100" dirty="0">
+                <a:solidFill>
+                  <a:srgbClr val="64748B"/>
+                </a:solidFill>
+                <a:latin typeface="Arial" pitchFamily="34" charset="0"/>
+                <a:ea typeface="Arial" pitchFamily="34" charset="-122"/>
+                <a:cs typeface="Arial" pitchFamily="34" charset="-120"/>
+              </a:rPr>
+              <a:t>أسبوع 9–11</a:t>
+            </a:r>
+            <a:endParaRPr lang="ar-SA" sz="1100" dirty="0"/>
+          </a:p>
+        </p:txBody>
+      </p:sp>
+      <p:sp>
+        <p:nvSpPr>
+          <p:cNvPr id="19" name="Text 17"/>
+          <p:cNvSpPr txBox="1"/>
+          <p:nvPr/>
+        </p:nvSpPr>
+        <p:spPr>
+          <a:xfrm>
+            <a:off x="2148840" y="2194560"/>
+            <a:ext cx="1554480" cy="365760"/>
+          </a:xfrm>
+          <a:prstGeom prst="rect">
+            <a:avLst/>
+          </a:prstGeom>
+          <a:noFill/>
+          <a:ln/>
+        </p:spPr>
+        <p:txBody>
+          <a:bodyPr wrap="square" lIns="0" tIns="0" rIns="0" bIns="0" rtlCol="0" anchor="t"/>
+          <a:lstStyle/>
+          <a:p>
+            <a:pPr rtl="1" algn="ctr" indent="0" marL="0">
+              <a:buNone/>
+            </a:pPr>
+            <a:r>
+              <a:rPr lang="ar-SA" altLang="en-US" sz="1500" b="1" dirty="0">
+                <a:solidFill>
+                  <a:srgbClr val="0F172A"/>
+                </a:solidFill>
+                <a:latin typeface="Arial" pitchFamily="34" charset="0"/>
+                <a:ea typeface="Arial" pitchFamily="34" charset="-122"/>
+                <a:cs typeface="Arial" pitchFamily="34" charset="-120"/>
+              </a:rPr>
+              <a:t>الحلقة كاملة</a:t>
+            </a:r>
+            <a:endParaRPr lang="ar-SA" sz="1500" dirty="0"/>
+          </a:p>
+        </p:txBody>
+      </p:sp>
+      <p:sp>
+        <p:nvSpPr>
+          <p:cNvPr id="20" name="Text 18"/>
+          <p:cNvSpPr txBox="1"/>
+          <p:nvPr/>
+        </p:nvSpPr>
+        <p:spPr>
+          <a:xfrm>
+            <a:off x="2148840" y="2606040"/>
+            <a:ext cx="1554480" cy="1188720"/>
+          </a:xfrm>
+          <a:prstGeom prst="rect">
+            <a:avLst/>
+          </a:prstGeom>
+          <a:noFill/>
+          <a:ln/>
+        </p:spPr>
+        <p:txBody>
+          <a:bodyPr wrap="square" lIns="0" tIns="0" rIns="0" bIns="0" rtlCol="0" anchor="t"/>
+          <a:lstStyle/>
+          <a:p>
+            <a:pPr rtl="1" algn="ctr" indent="0" marL="0">
+              <a:buNone/>
+            </a:pPr>
+            <a:r>
+              <a:rPr lang="ar-SA" altLang="en-US" sz="1100" dirty="0">
+                <a:solidFill>
+                  <a:srgbClr val="475569"/>
+                </a:solidFill>
+                <a:latin typeface="Arial" pitchFamily="34" charset="0"/>
+                <a:ea typeface="Arial" pitchFamily="34" charset="-122"/>
+                <a:cs typeface="Arial" pitchFamily="34" charset="-120"/>
+              </a:rPr>
+              <a:t>التجارب، التقرير الأسبوعي، لوحة الوكالات، تجربة مغلقة لـ 30 متجرًا</a:t>
+            </a:r>
+            <a:endParaRPr lang="ar-SA" sz="1100" dirty="0"/>
+          </a:p>
+        </p:txBody>
+      </p:sp>
+      <p:sp>
+        <p:nvSpPr>
+          <p:cNvPr id="21" name="Shape 19"/>
+          <p:cNvSpPr/>
+          <p:nvPr/>
+        </p:nvSpPr>
+        <p:spPr>
+          <a:xfrm>
+            <a:off x="1124712" y="1719072"/>
+            <a:ext cx="310896" cy="310896"/>
+          </a:xfrm>
+          <a:prstGeom prst="ellipse">
+            <a:avLst/>
+          </a:prstGeom>
+          <a:solidFill>
+            <a:srgbClr val="FACC15"/>
+          </a:solidFill>
+          <a:ln w="25400">
+            <a:solidFill>
+              <a:srgbClr val="FFFFFF"/>
+            </a:solidFill>
+            <a:prstDash val="solid"/>
+          </a:ln>
+        </p:spPr>
+      </p:sp>
+      <p:sp>
+        <p:nvSpPr>
+          <p:cNvPr id="22" name="Text 20"/>
+          <p:cNvSpPr txBox="1"/>
+          <p:nvPr/>
+        </p:nvSpPr>
+        <p:spPr>
+          <a:xfrm>
+            <a:off x="502920" y="1325880"/>
+            <a:ext cx="1554480" cy="274320"/>
+          </a:xfrm>
+          <a:prstGeom prst="rect">
+            <a:avLst/>
+          </a:prstGeom>
+          <a:noFill/>
+          <a:ln/>
+        </p:spPr>
+        <p:txBody>
+          <a:bodyPr wrap="square" lIns="0" tIns="0" rIns="0" bIns="0" rtlCol="0" anchor="t"/>
+          <a:lstStyle/>
+          <a:p>
+            <a:pPr rtl="1" algn="ctr" indent="0" marL="0">
+              <a:buNone/>
+            </a:pPr>
+            <a:r>
+              <a:rPr lang="ar-SA" altLang="en-US" sz="1100" dirty="0">
+                <a:solidFill>
+                  <a:srgbClr val="64748B"/>
+                </a:solidFill>
+                <a:latin typeface="Arial" pitchFamily="34" charset="0"/>
+                <a:ea typeface="Arial" pitchFamily="34" charset="-122"/>
+                <a:cs typeface="Arial" pitchFamily="34" charset="-120"/>
+              </a:rPr>
+              <a:t>أسبوع 12–13</a:t>
+            </a:r>
+            <a:endParaRPr lang="ar-SA" sz="1100" dirty="0"/>
+          </a:p>
+        </p:txBody>
+      </p:sp>
+      <p:sp>
+        <p:nvSpPr>
+          <p:cNvPr id="23" name="Text 21"/>
+          <p:cNvSpPr txBox="1"/>
+          <p:nvPr/>
+        </p:nvSpPr>
+        <p:spPr>
+          <a:xfrm>
+            <a:off x="502920" y="2194560"/>
+            <a:ext cx="1554480" cy="365760"/>
+          </a:xfrm>
+          <a:prstGeom prst="rect">
+            <a:avLst/>
+          </a:prstGeom>
+          <a:noFill/>
+          <a:ln/>
+        </p:spPr>
+        <p:txBody>
+          <a:bodyPr wrap="square" lIns="0" tIns="0" rIns="0" bIns="0" rtlCol="0" anchor="t"/>
+          <a:lstStyle/>
+          <a:p>
+            <a:pPr rtl="1" algn="ctr" indent="0" marL="0">
+              <a:buNone/>
+            </a:pPr>
+            <a:r>
+              <a:rPr lang="ar-SA" altLang="en-US" sz="1500" b="1" dirty="0">
+                <a:solidFill>
+                  <a:srgbClr val="0F172A"/>
+                </a:solidFill>
+                <a:latin typeface="Arial" pitchFamily="34" charset="0"/>
+                <a:ea typeface="Arial" pitchFamily="34" charset="-122"/>
+                <a:cs typeface="Arial" pitchFamily="34" charset="-120"/>
+              </a:rPr>
+              <a:t>الإطلاق</a:t>
+            </a:r>
+            <a:endParaRPr lang="ar-SA" sz="1500" dirty="0"/>
+          </a:p>
+        </p:txBody>
+      </p:sp>
+      <p:sp>
+        <p:nvSpPr>
+          <p:cNvPr id="24" name="Text 22"/>
+          <p:cNvSpPr txBox="1"/>
+          <p:nvPr/>
+        </p:nvSpPr>
+        <p:spPr>
+          <a:xfrm>
+            <a:off x="502920" y="2606040"/>
+            <a:ext cx="1554480" cy="1188720"/>
+          </a:xfrm>
+          <a:prstGeom prst="rect">
+            <a:avLst/>
+          </a:prstGeom>
+          <a:noFill/>
+          <a:ln/>
+        </p:spPr>
+        <p:txBody>
+          <a:bodyPr wrap="square" lIns="0" tIns="0" rIns="0" bIns="0" rtlCol="0" anchor="t"/>
+          <a:lstStyle/>
+          <a:p>
+            <a:pPr rtl="1" algn="ctr" indent="0" marL="0">
+              <a:buNone/>
+            </a:pPr>
+            <a:r>
+              <a:rPr lang="ar-SA" altLang="en-US" sz="1100" dirty="0">
+                <a:solidFill>
+                  <a:srgbClr val="475569"/>
+                </a:solidFill>
+                <a:latin typeface="Arial" pitchFamily="34" charset="0"/>
+                <a:ea typeface="Arial" pitchFamily="34" charset="-122"/>
+                <a:cs typeface="Arial" pitchFamily="34" charset="-120"/>
+              </a:rPr>
+              <a:t>النشر في متجر تطبيقات سلة</a:t>
+            </a:r>
+            <a:endParaRPr lang="ar-SA" sz="1100" dirty="0"/>
+          </a:p>
+        </p:txBody>
+      </p:sp>
+      <p:sp>
+        <p:nvSpPr>
+          <p:cNvPr id="25" name="Shape 23"/>
+          <p:cNvSpPr/>
+          <p:nvPr/>
+        </p:nvSpPr>
+        <p:spPr>
+          <a:xfrm>
+            <a:off x="457200" y="3931920"/>
+            <a:ext cx="8229600" cy="502920"/>
+          </a:xfrm>
+          <a:prstGeom prst="roundRect">
+            <a:avLst>
+              <a:gd name="adj" fmla="val 18182"/>
+            </a:avLst>
+          </a:prstGeom>
+          <a:solidFill>
+            <a:srgbClr val="FEF9C3"/>
+          </a:solidFill>
+          <a:ln w="12700">
+            <a:solidFill>
+              <a:srgbClr val="FEF9C3"/>
+            </a:solidFill>
+            <a:prstDash val="solid"/>
+          </a:ln>
+        </p:spPr>
+      </p:sp>
+      <p:sp>
+        <p:nvSpPr>
+          <p:cNvPr id="26" name="Text 24"/>
+          <p:cNvSpPr txBox="1"/>
+          <p:nvPr/>
+        </p:nvSpPr>
+        <p:spPr>
+          <a:xfrm>
+            <a:off x="640080" y="4041648"/>
+            <a:ext cx="7863840" cy="292608"/>
+          </a:xfrm>
+          <a:prstGeom prst="rect">
+            <a:avLst/>
+          </a:prstGeom>
+          <a:noFill/>
+          <a:ln/>
+        </p:spPr>
+        <p:txBody>
+          <a:bodyPr wrap="square" lIns="0" tIns="0" rIns="0" bIns="0" rtlCol="0" anchor="t"/>
+          <a:lstStyle/>
+          <a:p>
+            <a:pPr rtl="1" algn="ctr" indent="0" marL="0">
+              <a:buNone/>
+            </a:pPr>
+            <a:r>
+              <a:rPr lang="ar-SA" altLang="en-US" sz="1250" b="1" dirty="0">
+                <a:solidFill>
+                  <a:srgbClr val="A16207"/>
+                </a:solidFill>
+                <a:latin typeface="Arial" pitchFamily="34" charset="0"/>
+                <a:ea typeface="Arial" pitchFamily="34" charset="-122"/>
+                <a:cs typeface="Arial" pitchFamily="34" charset="-120"/>
+              </a:rPr>
+              <a:t>شرط البداية: إذا لم ينفذ 3 من كل 10 متاجر توصية واحدة على الأقل، نراجع القيمة قبل كتابة الكود</a:t>
+            </a:r>
+            <a:endParaRPr lang="ar-SA" sz="1250" dirty="0"/>
+          </a:p>
+        </p:txBody>
+      </p:sp>
+      <p:sp>
+        <p:nvSpPr>
+          <p:cNvPr id="27" name="Text 25"/>
+          <p:cNvSpPr txBox="1"/>
+          <p:nvPr/>
+        </p:nvSpPr>
+        <p:spPr>
+          <a:xfrm>
+            <a:off x="6858000" y="4754880"/>
+            <a:ext cx="1828800" cy="228600"/>
+          </a:xfrm>
+          <a:prstGeom prst="rect">
+            <a:avLst/>
+          </a:prstGeom>
+          <a:noFill/>
+          <a:ln/>
+        </p:spPr>
+        <p:txBody>
+          <a:bodyPr wrap="square" lIns="0" tIns="0" rIns="0" bIns="0" rtlCol="0" anchor="t"/>
+          <a:lstStyle/>
+          <a:p>
+            <a:pPr rtl="1" algn="r" indent="0" marL="0">
+              <a:buNone/>
+            </a:pPr>
+            <a:r>
+              <a:rPr lang="ar-SA" altLang="en-US" sz="900" dirty="0">
+                <a:solidFill>
+                  <a:srgbClr val="64748B"/>
+                </a:solidFill>
+                <a:latin typeface="Arial" pitchFamily="34" charset="0"/>
+                <a:ea typeface="Arial" pitchFamily="34" charset="-122"/>
+                <a:cs typeface="Arial" pitchFamily="34" charset="-120"/>
+              </a:rPr>
+              <a:t>نبض | NABD</a:t>
+            </a:r>
+            <a:endParaRPr lang="ar-SA" sz="900" dirty="0"/>
+          </a:p>
+        </p:txBody>
+      </p:sp>
+      <p:sp>
+        <p:nvSpPr>
+          <p:cNvPr id="28" name="Text 26"/>
+          <p:cNvSpPr txBox="1"/>
+          <p:nvPr/>
+        </p:nvSpPr>
+        <p:spPr>
+          <a:xfrm>
+            <a:off x="457200" y="4754880"/>
+            <a:ext cx="457200" cy="228600"/>
+          </a:xfrm>
+          <a:prstGeom prst="rect">
+            <a:avLst/>
+          </a:prstGeom>
+          <a:noFill/>
+          <a:ln/>
+        </p:spPr>
+        <p:txBody>
+          <a:bodyPr wrap="square" lIns="0" tIns="0" rIns="0" bIns="0" rtlCol="0" anchor="ctr"/>
+          <a:lstStyle/>
+          <a:p>
+            <a:pPr indent="0" marL="0">
+              <a:buNone/>
+            </a:pPr>
+            <a:r>
+              <a:rPr lang="en-US" sz="900" dirty="0">
+                <a:solidFill>
+                  <a:srgbClr val="64748B"/>
+                </a:solidFill>
+                <a:latin typeface="Arial" pitchFamily="34" charset="0"/>
+                <a:ea typeface="Arial" pitchFamily="34" charset="-122"/>
+                <a:cs typeface="Arial" pitchFamily="34" charset="-120"/>
+              </a:rPr>
+              <a:t>11</a:t>
+            </a:r>
+            <a:endParaRPr lang="en-US" sz="900" dirty="0"/>
+          </a:p>
+        </p:txBody>
+      </p:sp>
+    </p:spTree>
+  </p:cSld>
+  <p:clrMapOvr>
+    <a:masterClrMapping/>
+  </p:clrMapOvr>
+</p:sld>
+</file>
+
+<file path=ppt/slides/slide12.xml><?xml version="1.0" encoding="utf-8"?>
+<p:sld xmlns:a="http://schemas.openxmlformats.org/drawingml/2006/main" xmlns:r="http://schemas.openxmlformats.org/officeDocument/2006/relationships" xmlns:p="http://schemas.openxmlformats.org/presentationml/2006/main">
+  <p:cSld name="Slide 12">
     <p:bg>
       <p:bgPr>
         <a:solidFill>
@@ -3960,7 +5386,7 @@
                 <a:ea typeface="Arial" pitchFamily="34" charset="-122"/>
                 <a:cs typeface="Arial" pitchFamily="34" charset="-120"/>
               </a:rPr>
-              <a:t>11</a:t>
+              <a:t>12</a:t>
             </a:r>
             <a:endParaRPr lang="en-US" sz="900" dirty="0"/>
           </a:p>
@@ -3974,9 +5400,9 @@
 </p:sld>
 </file>
 
-<file path=ppt/slides/slide12.xml><?xml version="1.0" encoding="utf-8"?>
+<file path=ppt/slides/slide13.xml><?xml version="1.0" encoding="utf-8"?>
 <p:sld xmlns:a="http://schemas.openxmlformats.org/drawingml/2006/main" xmlns:r="http://schemas.openxmlformats.org/officeDocument/2006/relationships" xmlns:p="http://schemas.openxmlformats.org/presentationml/2006/main">
-  <p:cSld name="Slide 12">
+  <p:cSld name="Slide 13">
     <p:bg>
       <p:bgPr>
         <a:solidFill>
@@ -4760,7 +6186,7 @@
                 <a:ea typeface="Arial" pitchFamily="34" charset="-122"/>
                 <a:cs typeface="Arial" pitchFamily="34" charset="-120"/>
               </a:rPr>
-              <a:t>12</a:t>
+              <a:t>13</a:t>
             </a:r>
             <a:endParaRPr lang="en-US" sz="900" dirty="0"/>
           </a:p>
@@ -4774,9 +6200,9 @@
 </p:sld>
 </file>
 
-<file path=ppt/slides/slide13.xml><?xml version="1.0" encoding="utf-8"?>
+<file path=ppt/slides/slide14.xml><?xml version="1.0" encoding="utf-8"?>
 <p:sld xmlns:a="http://schemas.openxmlformats.org/drawingml/2006/main" xmlns:r="http://schemas.openxmlformats.org/officeDocument/2006/relationships" xmlns:p="http://schemas.openxmlformats.org/presentationml/2006/main">
-  <p:cSld name="Slide 13">
+  <p:cSld name="Slide 14">
     <p:bg>
       <p:bgPr>
         <a:solidFill>
@@ -10213,6 +11639,1547 @@
     <p:bg>
       <p:bgPr>
         <a:solidFill>
+          <a:srgbClr val="F8FAFC"/>
+        </a:solidFill>
+      </p:bgPr>
+    </p:bg>
+    <p:spTree>
+      <p:nvGrpSpPr>
+        <p:cNvPr id="1" name=""/>
+        <p:cNvGrpSpPr/>
+        <p:nvPr/>
+      </p:nvGrpSpPr>
+      <p:grpSpPr>
+        <a:xfrm>
+          <a:off x="0" y="0"/>
+          <a:ext cx="0" cy="0"/>
+          <a:chOff x="0" y="0"/>
+          <a:chExt cx="0" cy="0"/>
+        </a:xfrm>
+      </p:grpSpPr>
+      <p:sp>
+        <p:nvSpPr>
+          <p:cNvPr id="2" name="Text 0"/>
+          <p:cNvSpPr txBox="1"/>
+          <p:nvPr/>
+        </p:nvSpPr>
+        <p:spPr>
+          <a:xfrm>
+            <a:off x="457200" y="320040"/>
+            <a:ext cx="8229600" cy="548640"/>
+          </a:xfrm>
+          <a:prstGeom prst="rect">
+            <a:avLst/>
+          </a:prstGeom>
+          <a:noFill/>
+          <a:ln/>
+        </p:spPr>
+        <p:txBody>
+          <a:bodyPr wrap="square" lIns="0" tIns="0" rIns="0" bIns="0" rtlCol="0" anchor="t"/>
+          <a:lstStyle/>
+          <a:p>
+            <a:pPr rtl="1" algn="r" indent="0" marL="0">
+              <a:buNone/>
+            </a:pPr>
+            <a:r>
+              <a:rPr lang="ar-SA" altLang="en-US" sz="3000" b="1" dirty="0">
+                <a:solidFill>
+                  <a:srgbClr val="0F172A"/>
+                </a:solidFill>
+                <a:latin typeface="Arial" pitchFamily="34" charset="0"/>
+                <a:ea typeface="Arial" pitchFamily="34" charset="-122"/>
+                <a:cs typeface="Arial" pitchFamily="34" charset="-120"/>
+              </a:rPr>
+              <a:t>رحلة التاجر: من صفر طلب إلى متجر محترف</a:t>
+            </a:r>
+            <a:endParaRPr lang="ar-SA" sz="3000" dirty="0"/>
+          </a:p>
+        </p:txBody>
+      </p:sp>
+      <p:sp>
+        <p:nvSpPr>
+          <p:cNvPr id="3" name="Text 1"/>
+          <p:cNvSpPr txBox="1"/>
+          <p:nvPr/>
+        </p:nvSpPr>
+        <p:spPr>
+          <a:xfrm>
+            <a:off x="457200" y="868680"/>
+            <a:ext cx="8229600" cy="365760"/>
+          </a:xfrm>
+          <a:prstGeom prst="rect">
+            <a:avLst/>
+          </a:prstGeom>
+          <a:noFill/>
+          <a:ln/>
+        </p:spPr>
+        <p:txBody>
+          <a:bodyPr wrap="square" lIns="0" tIns="0" rIns="0" bIns="0" rtlCol="0" anchor="t"/>
+          <a:lstStyle/>
+          <a:p>
+            <a:pPr rtl="1" algn="r" indent="0" marL="0">
+              <a:buNone/>
+            </a:pPr>
+            <a:r>
+              <a:rPr lang="ar-SA" altLang="en-US" sz="1400" dirty="0">
+                <a:solidFill>
+                  <a:srgbClr val="475569"/>
+                </a:solidFill>
+                <a:latin typeface="Arial" pitchFamily="34" charset="0"/>
+                <a:ea typeface="Arial" pitchFamily="34" charset="-122"/>
+                <a:cs typeface="Arial" pitchFamily="34" charset="-120"/>
+              </a:rPr>
+              <a:t>التاجر يتعلّم كطالب: 7 مراحل حسب عدد الطلبات، ولكل مرحلة مهام مع شرح ونقاط</a:t>
+            </a:r>
+            <a:endParaRPr lang="ar-SA" sz="1400" dirty="0"/>
+          </a:p>
+        </p:txBody>
+      </p:sp>
+      <p:sp>
+        <p:nvSpPr>
+          <p:cNvPr id="4" name="Shape 2"/>
+          <p:cNvSpPr/>
+          <p:nvPr/>
+        </p:nvSpPr>
+        <p:spPr>
+          <a:xfrm>
+            <a:off x="1045029" y="1828800"/>
+            <a:ext cx="7053943" cy="0"/>
+          </a:xfrm>
+          <a:prstGeom prst="line">
+            <a:avLst/>
+          </a:prstGeom>
+          <a:noFill/>
+          <a:ln w="25400">
+            <a:solidFill>
+              <a:srgbClr val="E2E8F0"/>
+            </a:solidFill>
+            <a:prstDash val="solid"/>
+          </a:ln>
+        </p:spPr>
+      </p:sp>
+      <p:sp>
+        <p:nvSpPr>
+          <p:cNvPr id="5" name="Shape 3"/>
+          <p:cNvSpPr/>
+          <p:nvPr/>
+        </p:nvSpPr>
+        <p:spPr>
+          <a:xfrm>
+            <a:off x="7824651" y="1554480"/>
+            <a:ext cx="548640" cy="548640"/>
+          </a:xfrm>
+          <a:prstGeom prst="ellipse">
+            <a:avLst/>
+          </a:prstGeom>
+          <a:solidFill>
+            <a:srgbClr val="10B981"/>
+          </a:solidFill>
+          <a:ln w="25400">
+            <a:solidFill>
+              <a:srgbClr val="FFFFFF"/>
+            </a:solidFill>
+            <a:prstDash val="solid"/>
+          </a:ln>
+        </p:spPr>
+      </p:sp>
+      <p:sp>
+        <p:nvSpPr>
+          <p:cNvPr id="6" name="Text 4"/>
+          <p:cNvSpPr txBox="1"/>
+          <p:nvPr/>
+        </p:nvSpPr>
+        <p:spPr>
+          <a:xfrm>
+            <a:off x="7824651" y="1682496"/>
+            <a:ext cx="548640" cy="292608"/>
+          </a:xfrm>
+          <a:prstGeom prst="rect">
+            <a:avLst/>
+          </a:prstGeom>
+          <a:noFill/>
+          <a:ln/>
+        </p:spPr>
+        <p:txBody>
+          <a:bodyPr wrap="square" lIns="0" tIns="0" rIns="0" bIns="0" rtlCol="0" anchor="t"/>
+          <a:lstStyle/>
+          <a:p>
+            <a:pPr rtl="1" algn="ctr" indent="0" marL="0">
+              <a:buNone/>
+            </a:pPr>
+            <a:r>
+              <a:rPr lang="ar-SA" altLang="en-US" sz="1400" b="1" dirty="0">
+                <a:solidFill>
+                  <a:srgbClr val="0F172A"/>
+                </a:solidFill>
+                <a:latin typeface="Arial" pitchFamily="34" charset="0"/>
+                <a:ea typeface="Arial" pitchFamily="34" charset="-122"/>
+                <a:cs typeface="Arial" pitchFamily="34" charset="-120"/>
+              </a:rPr>
+              <a:t>1</a:t>
+            </a:r>
+            <a:endParaRPr lang="ar-SA" sz="1400" dirty="0"/>
+          </a:p>
+        </p:txBody>
+      </p:sp>
+      <p:sp>
+        <p:nvSpPr>
+          <p:cNvPr id="7" name="Text 5"/>
+          <p:cNvSpPr txBox="1"/>
+          <p:nvPr/>
+        </p:nvSpPr>
+        <p:spPr>
+          <a:xfrm>
+            <a:off x="7513755" y="2240280"/>
+            <a:ext cx="1170432" cy="320040"/>
+          </a:xfrm>
+          <a:prstGeom prst="rect">
+            <a:avLst/>
+          </a:prstGeom>
+          <a:noFill/>
+          <a:ln/>
+        </p:spPr>
+        <p:txBody>
+          <a:bodyPr wrap="square" lIns="0" tIns="0" rIns="0" bIns="0" rtlCol="0" anchor="t"/>
+          <a:lstStyle/>
+          <a:p>
+            <a:pPr rtl="1" algn="ctr" indent="0" marL="0">
+              <a:buNone/>
+            </a:pPr>
+            <a:r>
+              <a:rPr lang="ar-SA" altLang="en-US" sz="1250" b="1" dirty="0">
+                <a:solidFill>
+                  <a:srgbClr val="0F172A"/>
+                </a:solidFill>
+                <a:latin typeface="Arial" pitchFamily="34" charset="0"/>
+                <a:ea typeface="Arial" pitchFamily="34" charset="-122"/>
+                <a:cs typeface="Arial" pitchFamily="34" charset="-120"/>
+              </a:rPr>
+              <a:t>التأسيس</a:t>
+            </a:r>
+            <a:endParaRPr lang="ar-SA" sz="1250" dirty="0"/>
+          </a:p>
+        </p:txBody>
+      </p:sp>
+      <p:sp>
+        <p:nvSpPr>
+          <p:cNvPr id="8" name="Text 6"/>
+          <p:cNvSpPr txBox="1"/>
+          <p:nvPr/>
+        </p:nvSpPr>
+        <p:spPr>
+          <a:xfrm>
+            <a:off x="7513755" y="2560320"/>
+            <a:ext cx="1170432" cy="274320"/>
+          </a:xfrm>
+          <a:prstGeom prst="rect">
+            <a:avLst/>
+          </a:prstGeom>
+          <a:noFill/>
+          <a:ln/>
+        </p:spPr>
+        <p:txBody>
+          <a:bodyPr wrap="square" lIns="0" tIns="0" rIns="0" bIns="0" rtlCol="0" anchor="t"/>
+          <a:lstStyle/>
+          <a:p>
+            <a:pPr rtl="1" algn="ctr" indent="0" marL="0">
+              <a:buNone/>
+            </a:pPr>
+            <a:r>
+              <a:rPr lang="ar-SA" altLang="en-US" sz="1000" dirty="0">
+                <a:solidFill>
+                  <a:srgbClr val="475569"/>
+                </a:solidFill>
+                <a:latin typeface="Arial" pitchFamily="34" charset="0"/>
+                <a:ea typeface="Arial" pitchFamily="34" charset="-122"/>
+                <a:cs typeface="Arial" pitchFamily="34" charset="-120"/>
+              </a:rPr>
+              <a:t>قبل أول طلب</a:t>
+            </a:r>
+            <a:endParaRPr lang="ar-SA" sz="1000" dirty="0"/>
+          </a:p>
+        </p:txBody>
+      </p:sp>
+      <p:sp>
+        <p:nvSpPr>
+          <p:cNvPr id="9" name="Shape 7"/>
+          <p:cNvSpPr/>
+          <p:nvPr/>
+        </p:nvSpPr>
+        <p:spPr>
+          <a:xfrm>
+            <a:off x="6648994" y="1554480"/>
+            <a:ext cx="548640" cy="548640"/>
+          </a:xfrm>
+          <a:prstGeom prst="ellipse">
+            <a:avLst/>
+          </a:prstGeom>
+          <a:solidFill>
+            <a:srgbClr val="10B981"/>
+          </a:solidFill>
+          <a:ln w="25400">
+            <a:solidFill>
+              <a:srgbClr val="FFFFFF"/>
+            </a:solidFill>
+            <a:prstDash val="solid"/>
+          </a:ln>
+        </p:spPr>
+      </p:sp>
+      <p:sp>
+        <p:nvSpPr>
+          <p:cNvPr id="10" name="Text 8"/>
+          <p:cNvSpPr txBox="1"/>
+          <p:nvPr/>
+        </p:nvSpPr>
+        <p:spPr>
+          <a:xfrm>
+            <a:off x="6648994" y="1682496"/>
+            <a:ext cx="548640" cy="292608"/>
+          </a:xfrm>
+          <a:prstGeom prst="rect">
+            <a:avLst/>
+          </a:prstGeom>
+          <a:noFill/>
+          <a:ln/>
+        </p:spPr>
+        <p:txBody>
+          <a:bodyPr wrap="square" lIns="0" tIns="0" rIns="0" bIns="0" rtlCol="0" anchor="t"/>
+          <a:lstStyle/>
+          <a:p>
+            <a:pPr rtl="1" algn="ctr" indent="0" marL="0">
+              <a:buNone/>
+            </a:pPr>
+            <a:r>
+              <a:rPr lang="ar-SA" altLang="en-US" sz="1400" b="1" dirty="0">
+                <a:solidFill>
+                  <a:srgbClr val="0F172A"/>
+                </a:solidFill>
+                <a:latin typeface="Arial" pitchFamily="34" charset="0"/>
+                <a:ea typeface="Arial" pitchFamily="34" charset="-122"/>
+                <a:cs typeface="Arial" pitchFamily="34" charset="-120"/>
+              </a:rPr>
+              <a:t>2</a:t>
+            </a:r>
+            <a:endParaRPr lang="ar-SA" sz="1400" dirty="0"/>
+          </a:p>
+        </p:txBody>
+      </p:sp>
+      <p:sp>
+        <p:nvSpPr>
+          <p:cNvPr id="11" name="Text 9"/>
+          <p:cNvSpPr txBox="1"/>
+          <p:nvPr/>
+        </p:nvSpPr>
+        <p:spPr>
+          <a:xfrm>
+            <a:off x="6338098" y="2240280"/>
+            <a:ext cx="1170432" cy="320040"/>
+          </a:xfrm>
+          <a:prstGeom prst="rect">
+            <a:avLst/>
+          </a:prstGeom>
+          <a:noFill/>
+          <a:ln/>
+        </p:spPr>
+        <p:txBody>
+          <a:bodyPr wrap="square" lIns="0" tIns="0" rIns="0" bIns="0" rtlCol="0" anchor="t"/>
+          <a:lstStyle/>
+          <a:p>
+            <a:pPr rtl="1" algn="ctr" indent="0" marL="0">
+              <a:buNone/>
+            </a:pPr>
+            <a:r>
+              <a:rPr lang="ar-SA" altLang="en-US" sz="1250" b="1" dirty="0">
+                <a:solidFill>
+                  <a:srgbClr val="0F172A"/>
+                </a:solidFill>
+                <a:latin typeface="Arial" pitchFamily="34" charset="0"/>
+                <a:ea typeface="Arial" pitchFamily="34" charset="-122"/>
+                <a:cs typeface="Arial" pitchFamily="34" charset="-120"/>
+              </a:rPr>
+              <a:t>أول الطريق</a:t>
+            </a:r>
+            <a:endParaRPr lang="ar-SA" sz="1250" dirty="0"/>
+          </a:p>
+        </p:txBody>
+      </p:sp>
+      <p:sp>
+        <p:nvSpPr>
+          <p:cNvPr id="12" name="Text 10"/>
+          <p:cNvSpPr txBox="1"/>
+          <p:nvPr/>
+        </p:nvSpPr>
+        <p:spPr>
+          <a:xfrm>
+            <a:off x="6338098" y="2560320"/>
+            <a:ext cx="1170432" cy="274320"/>
+          </a:xfrm>
+          <a:prstGeom prst="rect">
+            <a:avLst/>
+          </a:prstGeom>
+          <a:noFill/>
+          <a:ln/>
+        </p:spPr>
+        <p:txBody>
+          <a:bodyPr wrap="square" lIns="0" tIns="0" rIns="0" bIns="0" rtlCol="0" anchor="t"/>
+          <a:lstStyle/>
+          <a:p>
+            <a:pPr rtl="1" algn="ctr" indent="0" marL="0">
+              <a:buNone/>
+            </a:pPr>
+            <a:r>
+              <a:rPr lang="ar-SA" altLang="en-US" sz="1000" dirty="0">
+                <a:solidFill>
+                  <a:srgbClr val="475569"/>
+                </a:solidFill>
+                <a:latin typeface="Arial" pitchFamily="34" charset="0"/>
+                <a:ea typeface="Arial" pitchFamily="34" charset="-122"/>
+                <a:cs typeface="Arial" pitchFamily="34" charset="-120"/>
+              </a:rPr>
+              <a:t>1 – 10 طلب</a:t>
+            </a:r>
+            <a:endParaRPr lang="ar-SA" sz="1000" dirty="0"/>
+          </a:p>
+        </p:txBody>
+      </p:sp>
+      <p:sp>
+        <p:nvSpPr>
+          <p:cNvPr id="13" name="Shape 11"/>
+          <p:cNvSpPr/>
+          <p:nvPr/>
+        </p:nvSpPr>
+        <p:spPr>
+          <a:xfrm>
+            <a:off x="5473337" y="1554480"/>
+            <a:ext cx="548640" cy="548640"/>
+          </a:xfrm>
+          <a:prstGeom prst="ellipse">
+            <a:avLst/>
+          </a:prstGeom>
+          <a:solidFill>
+            <a:srgbClr val="10B981"/>
+          </a:solidFill>
+          <a:ln w="25400">
+            <a:solidFill>
+              <a:srgbClr val="FFFFFF"/>
+            </a:solidFill>
+            <a:prstDash val="solid"/>
+          </a:ln>
+        </p:spPr>
+      </p:sp>
+      <p:sp>
+        <p:nvSpPr>
+          <p:cNvPr id="14" name="Text 12"/>
+          <p:cNvSpPr txBox="1"/>
+          <p:nvPr/>
+        </p:nvSpPr>
+        <p:spPr>
+          <a:xfrm>
+            <a:off x="5473337" y="1682496"/>
+            <a:ext cx="548640" cy="292608"/>
+          </a:xfrm>
+          <a:prstGeom prst="rect">
+            <a:avLst/>
+          </a:prstGeom>
+          <a:noFill/>
+          <a:ln/>
+        </p:spPr>
+        <p:txBody>
+          <a:bodyPr wrap="square" lIns="0" tIns="0" rIns="0" bIns="0" rtlCol="0" anchor="t"/>
+          <a:lstStyle/>
+          <a:p>
+            <a:pPr rtl="1" algn="ctr" indent="0" marL="0">
+              <a:buNone/>
+            </a:pPr>
+            <a:r>
+              <a:rPr lang="ar-SA" altLang="en-US" sz="1400" b="1" dirty="0">
+                <a:solidFill>
+                  <a:srgbClr val="0F172A"/>
+                </a:solidFill>
+                <a:latin typeface="Arial" pitchFamily="34" charset="0"/>
+                <a:ea typeface="Arial" pitchFamily="34" charset="-122"/>
+                <a:cs typeface="Arial" pitchFamily="34" charset="-120"/>
+              </a:rPr>
+              <a:t>3</a:t>
+            </a:r>
+            <a:endParaRPr lang="ar-SA" sz="1400" dirty="0"/>
+          </a:p>
+        </p:txBody>
+      </p:sp>
+      <p:sp>
+        <p:nvSpPr>
+          <p:cNvPr id="15" name="Text 13"/>
+          <p:cNvSpPr txBox="1"/>
+          <p:nvPr/>
+        </p:nvSpPr>
+        <p:spPr>
+          <a:xfrm>
+            <a:off x="5162441" y="2240280"/>
+            <a:ext cx="1170432" cy="320040"/>
+          </a:xfrm>
+          <a:prstGeom prst="rect">
+            <a:avLst/>
+          </a:prstGeom>
+          <a:noFill/>
+          <a:ln/>
+        </p:spPr>
+        <p:txBody>
+          <a:bodyPr wrap="square" lIns="0" tIns="0" rIns="0" bIns="0" rtlCol="0" anchor="t"/>
+          <a:lstStyle/>
+          <a:p>
+            <a:pPr rtl="1" algn="ctr" indent="0" marL="0">
+              <a:buNone/>
+            </a:pPr>
+            <a:r>
+              <a:rPr lang="ar-SA" altLang="en-US" sz="1250" b="1" dirty="0">
+                <a:solidFill>
+                  <a:srgbClr val="0F172A"/>
+                </a:solidFill>
+                <a:latin typeface="Arial" pitchFamily="34" charset="0"/>
+                <a:ea typeface="Arial" pitchFamily="34" charset="-122"/>
+                <a:cs typeface="Arial" pitchFamily="34" charset="-120"/>
+              </a:rPr>
+              <a:t>بناء الثقة</a:t>
+            </a:r>
+            <a:endParaRPr lang="ar-SA" sz="1250" dirty="0"/>
+          </a:p>
+        </p:txBody>
+      </p:sp>
+      <p:sp>
+        <p:nvSpPr>
+          <p:cNvPr id="16" name="Text 14"/>
+          <p:cNvSpPr txBox="1"/>
+          <p:nvPr/>
+        </p:nvSpPr>
+        <p:spPr>
+          <a:xfrm>
+            <a:off x="5162441" y="2560320"/>
+            <a:ext cx="1170432" cy="274320"/>
+          </a:xfrm>
+          <a:prstGeom prst="rect">
+            <a:avLst/>
+          </a:prstGeom>
+          <a:noFill/>
+          <a:ln/>
+        </p:spPr>
+        <p:txBody>
+          <a:bodyPr wrap="square" lIns="0" tIns="0" rIns="0" bIns="0" rtlCol="0" anchor="t"/>
+          <a:lstStyle/>
+          <a:p>
+            <a:pPr rtl="1" algn="ctr" indent="0" marL="0">
+              <a:buNone/>
+            </a:pPr>
+            <a:r>
+              <a:rPr lang="ar-SA" altLang="en-US" sz="1000" dirty="0">
+                <a:solidFill>
+                  <a:srgbClr val="475569"/>
+                </a:solidFill>
+                <a:latin typeface="Arial" pitchFamily="34" charset="0"/>
+                <a:ea typeface="Arial" pitchFamily="34" charset="-122"/>
+                <a:cs typeface="Arial" pitchFamily="34" charset="-120"/>
+              </a:rPr>
+              <a:t>10 – 20 طلب</a:t>
+            </a:r>
+            <a:endParaRPr lang="ar-SA" sz="1000" dirty="0"/>
+          </a:p>
+        </p:txBody>
+      </p:sp>
+      <p:sp>
+        <p:nvSpPr>
+          <p:cNvPr id="17" name="Shape 15"/>
+          <p:cNvSpPr/>
+          <p:nvPr/>
+        </p:nvSpPr>
+        <p:spPr>
+          <a:xfrm>
+            <a:off x="4297680" y="1554480"/>
+            <a:ext cx="548640" cy="548640"/>
+          </a:xfrm>
+          <a:prstGeom prst="ellipse">
+            <a:avLst/>
+          </a:prstGeom>
+          <a:solidFill>
+            <a:srgbClr val="10B981"/>
+          </a:solidFill>
+          <a:ln w="25400">
+            <a:solidFill>
+              <a:srgbClr val="FFFFFF"/>
+            </a:solidFill>
+            <a:prstDash val="solid"/>
+          </a:ln>
+        </p:spPr>
+      </p:sp>
+      <p:sp>
+        <p:nvSpPr>
+          <p:cNvPr id="18" name="Text 16"/>
+          <p:cNvSpPr txBox="1"/>
+          <p:nvPr/>
+        </p:nvSpPr>
+        <p:spPr>
+          <a:xfrm>
+            <a:off x="4297680" y="1682496"/>
+            <a:ext cx="548640" cy="292608"/>
+          </a:xfrm>
+          <a:prstGeom prst="rect">
+            <a:avLst/>
+          </a:prstGeom>
+          <a:noFill/>
+          <a:ln/>
+        </p:spPr>
+        <p:txBody>
+          <a:bodyPr wrap="square" lIns="0" tIns="0" rIns="0" bIns="0" rtlCol="0" anchor="t"/>
+          <a:lstStyle/>
+          <a:p>
+            <a:pPr rtl="1" algn="ctr" indent="0" marL="0">
+              <a:buNone/>
+            </a:pPr>
+            <a:r>
+              <a:rPr lang="ar-SA" altLang="en-US" sz="1400" b="1" dirty="0">
+                <a:solidFill>
+                  <a:srgbClr val="0F172A"/>
+                </a:solidFill>
+                <a:latin typeface="Arial" pitchFamily="34" charset="0"/>
+                <a:ea typeface="Arial" pitchFamily="34" charset="-122"/>
+                <a:cs typeface="Arial" pitchFamily="34" charset="-120"/>
+              </a:rPr>
+              <a:t>4</a:t>
+            </a:r>
+            <a:endParaRPr lang="ar-SA" sz="1400" dirty="0"/>
+          </a:p>
+        </p:txBody>
+      </p:sp>
+      <p:sp>
+        <p:nvSpPr>
+          <p:cNvPr id="19" name="Text 17"/>
+          <p:cNvSpPr txBox="1"/>
+          <p:nvPr/>
+        </p:nvSpPr>
+        <p:spPr>
+          <a:xfrm>
+            <a:off x="3986784" y="2240280"/>
+            <a:ext cx="1170432" cy="320040"/>
+          </a:xfrm>
+          <a:prstGeom prst="rect">
+            <a:avLst/>
+          </a:prstGeom>
+          <a:noFill/>
+          <a:ln/>
+        </p:spPr>
+        <p:txBody>
+          <a:bodyPr wrap="square" lIns="0" tIns="0" rIns="0" bIns="0" rtlCol="0" anchor="t"/>
+          <a:lstStyle/>
+          <a:p>
+            <a:pPr rtl="1" algn="ctr" indent="0" marL="0">
+              <a:buNone/>
+            </a:pPr>
+            <a:r>
+              <a:rPr lang="ar-SA" altLang="en-US" sz="1250" b="1" dirty="0">
+                <a:solidFill>
+                  <a:srgbClr val="0F172A"/>
+                </a:solidFill>
+                <a:latin typeface="Arial" pitchFamily="34" charset="0"/>
+                <a:ea typeface="Arial" pitchFamily="34" charset="-122"/>
+                <a:cs typeface="Arial" pitchFamily="34" charset="-120"/>
+              </a:rPr>
+              <a:t>الانتشار</a:t>
+            </a:r>
+            <a:endParaRPr lang="ar-SA" sz="1250" dirty="0"/>
+          </a:p>
+        </p:txBody>
+      </p:sp>
+      <p:sp>
+        <p:nvSpPr>
+          <p:cNvPr id="20" name="Text 18"/>
+          <p:cNvSpPr txBox="1"/>
+          <p:nvPr/>
+        </p:nvSpPr>
+        <p:spPr>
+          <a:xfrm>
+            <a:off x="3986784" y="2560320"/>
+            <a:ext cx="1170432" cy="274320"/>
+          </a:xfrm>
+          <a:prstGeom prst="rect">
+            <a:avLst/>
+          </a:prstGeom>
+          <a:noFill/>
+          <a:ln/>
+        </p:spPr>
+        <p:txBody>
+          <a:bodyPr wrap="square" lIns="0" tIns="0" rIns="0" bIns="0" rtlCol="0" anchor="t"/>
+          <a:lstStyle/>
+          <a:p>
+            <a:pPr rtl="1" algn="ctr" indent="0" marL="0">
+              <a:buNone/>
+            </a:pPr>
+            <a:r>
+              <a:rPr lang="ar-SA" altLang="en-US" sz="1000" dirty="0">
+                <a:solidFill>
+                  <a:srgbClr val="475569"/>
+                </a:solidFill>
+                <a:latin typeface="Arial" pitchFamily="34" charset="0"/>
+                <a:ea typeface="Arial" pitchFamily="34" charset="-122"/>
+                <a:cs typeface="Arial" pitchFamily="34" charset="-120"/>
+              </a:rPr>
+              <a:t>20 – 50 طلب</a:t>
+            </a:r>
+            <a:endParaRPr lang="ar-SA" sz="1000" dirty="0"/>
+          </a:p>
+        </p:txBody>
+      </p:sp>
+      <p:sp>
+        <p:nvSpPr>
+          <p:cNvPr id="21" name="Shape 19"/>
+          <p:cNvSpPr/>
+          <p:nvPr/>
+        </p:nvSpPr>
+        <p:spPr>
+          <a:xfrm>
+            <a:off x="3122023" y="1554480"/>
+            <a:ext cx="548640" cy="548640"/>
+          </a:xfrm>
+          <a:prstGeom prst="ellipse">
+            <a:avLst/>
+          </a:prstGeom>
+          <a:solidFill>
+            <a:srgbClr val="10B981"/>
+          </a:solidFill>
+          <a:ln w="25400">
+            <a:solidFill>
+              <a:srgbClr val="FFFFFF"/>
+            </a:solidFill>
+            <a:prstDash val="solid"/>
+          </a:ln>
+        </p:spPr>
+      </p:sp>
+      <p:sp>
+        <p:nvSpPr>
+          <p:cNvPr id="22" name="Text 20"/>
+          <p:cNvSpPr txBox="1"/>
+          <p:nvPr/>
+        </p:nvSpPr>
+        <p:spPr>
+          <a:xfrm>
+            <a:off x="3122023" y="1682496"/>
+            <a:ext cx="548640" cy="292608"/>
+          </a:xfrm>
+          <a:prstGeom prst="rect">
+            <a:avLst/>
+          </a:prstGeom>
+          <a:noFill/>
+          <a:ln/>
+        </p:spPr>
+        <p:txBody>
+          <a:bodyPr wrap="square" lIns="0" tIns="0" rIns="0" bIns="0" rtlCol="0" anchor="t"/>
+          <a:lstStyle/>
+          <a:p>
+            <a:pPr rtl="1" algn="ctr" indent="0" marL="0">
+              <a:buNone/>
+            </a:pPr>
+            <a:r>
+              <a:rPr lang="ar-SA" altLang="en-US" sz="1400" b="1" dirty="0">
+                <a:solidFill>
+                  <a:srgbClr val="0F172A"/>
+                </a:solidFill>
+                <a:latin typeface="Arial" pitchFamily="34" charset="0"/>
+                <a:ea typeface="Arial" pitchFamily="34" charset="-122"/>
+                <a:cs typeface="Arial" pitchFamily="34" charset="-120"/>
+              </a:rPr>
+              <a:t>5</a:t>
+            </a:r>
+            <a:endParaRPr lang="ar-SA" sz="1400" dirty="0"/>
+          </a:p>
+        </p:txBody>
+      </p:sp>
+      <p:sp>
+        <p:nvSpPr>
+          <p:cNvPr id="23" name="Text 21"/>
+          <p:cNvSpPr txBox="1"/>
+          <p:nvPr/>
+        </p:nvSpPr>
+        <p:spPr>
+          <a:xfrm>
+            <a:off x="2811127" y="2240280"/>
+            <a:ext cx="1170432" cy="320040"/>
+          </a:xfrm>
+          <a:prstGeom prst="rect">
+            <a:avLst/>
+          </a:prstGeom>
+          <a:noFill/>
+          <a:ln/>
+        </p:spPr>
+        <p:txBody>
+          <a:bodyPr wrap="square" lIns="0" tIns="0" rIns="0" bIns="0" rtlCol="0" anchor="t"/>
+          <a:lstStyle/>
+          <a:p>
+            <a:pPr rtl="1" algn="ctr" indent="0" marL="0">
+              <a:buNone/>
+            </a:pPr>
+            <a:r>
+              <a:rPr lang="ar-SA" altLang="en-US" sz="1250" b="1" dirty="0">
+                <a:solidFill>
+                  <a:srgbClr val="0F172A"/>
+                </a:solidFill>
+                <a:latin typeface="Arial" pitchFamily="34" charset="0"/>
+                <a:ea typeface="Arial" pitchFamily="34" charset="-122"/>
+                <a:cs typeface="Arial" pitchFamily="34" charset="-120"/>
+              </a:rPr>
+              <a:t>الثبات</a:t>
+            </a:r>
+            <a:endParaRPr lang="ar-SA" sz="1250" dirty="0"/>
+          </a:p>
+        </p:txBody>
+      </p:sp>
+      <p:sp>
+        <p:nvSpPr>
+          <p:cNvPr id="24" name="Text 22"/>
+          <p:cNvSpPr txBox="1"/>
+          <p:nvPr/>
+        </p:nvSpPr>
+        <p:spPr>
+          <a:xfrm>
+            <a:off x="2811127" y="2560320"/>
+            <a:ext cx="1170432" cy="274320"/>
+          </a:xfrm>
+          <a:prstGeom prst="rect">
+            <a:avLst/>
+          </a:prstGeom>
+          <a:noFill/>
+          <a:ln/>
+        </p:spPr>
+        <p:txBody>
+          <a:bodyPr wrap="square" lIns="0" tIns="0" rIns="0" bIns="0" rtlCol="0" anchor="t"/>
+          <a:lstStyle/>
+          <a:p>
+            <a:pPr rtl="1" algn="ctr" indent="0" marL="0">
+              <a:buNone/>
+            </a:pPr>
+            <a:r>
+              <a:rPr lang="ar-SA" altLang="en-US" sz="1000" dirty="0">
+                <a:solidFill>
+                  <a:srgbClr val="475569"/>
+                </a:solidFill>
+                <a:latin typeface="Arial" pitchFamily="34" charset="0"/>
+                <a:ea typeface="Arial" pitchFamily="34" charset="-122"/>
+                <a:cs typeface="Arial" pitchFamily="34" charset="-120"/>
+              </a:rPr>
+              <a:t>50 – 100 طلب</a:t>
+            </a:r>
+            <a:endParaRPr lang="ar-SA" sz="1000" dirty="0"/>
+          </a:p>
+        </p:txBody>
+      </p:sp>
+      <p:sp>
+        <p:nvSpPr>
+          <p:cNvPr id="25" name="Shape 23"/>
+          <p:cNvSpPr/>
+          <p:nvPr/>
+        </p:nvSpPr>
+        <p:spPr>
+          <a:xfrm>
+            <a:off x="1946366" y="1554480"/>
+            <a:ext cx="548640" cy="548640"/>
+          </a:xfrm>
+          <a:prstGeom prst="ellipse">
+            <a:avLst/>
+          </a:prstGeom>
+          <a:solidFill>
+            <a:srgbClr val="FACC15"/>
+          </a:solidFill>
+          <a:ln w="25400">
+            <a:solidFill>
+              <a:srgbClr val="FFFFFF"/>
+            </a:solidFill>
+            <a:prstDash val="solid"/>
+          </a:ln>
+        </p:spPr>
+      </p:sp>
+      <p:sp>
+        <p:nvSpPr>
+          <p:cNvPr id="26" name="Text 24"/>
+          <p:cNvSpPr txBox="1"/>
+          <p:nvPr/>
+        </p:nvSpPr>
+        <p:spPr>
+          <a:xfrm>
+            <a:off x="1946366" y="1682496"/>
+            <a:ext cx="548640" cy="292608"/>
+          </a:xfrm>
+          <a:prstGeom prst="rect">
+            <a:avLst/>
+          </a:prstGeom>
+          <a:noFill/>
+          <a:ln/>
+        </p:spPr>
+        <p:txBody>
+          <a:bodyPr wrap="square" lIns="0" tIns="0" rIns="0" bIns="0" rtlCol="0" anchor="t"/>
+          <a:lstStyle/>
+          <a:p>
+            <a:pPr rtl="1" algn="ctr" indent="0" marL="0">
+              <a:buNone/>
+            </a:pPr>
+            <a:r>
+              <a:rPr lang="ar-SA" altLang="en-US" sz="1400" b="1" dirty="0">
+                <a:solidFill>
+                  <a:srgbClr val="0F172A"/>
+                </a:solidFill>
+                <a:latin typeface="Arial" pitchFamily="34" charset="0"/>
+                <a:ea typeface="Arial" pitchFamily="34" charset="-122"/>
+                <a:cs typeface="Arial" pitchFamily="34" charset="-120"/>
+              </a:rPr>
+              <a:t>6</a:t>
+            </a:r>
+            <a:endParaRPr lang="ar-SA" sz="1400" dirty="0"/>
+          </a:p>
+        </p:txBody>
+      </p:sp>
+      <p:sp>
+        <p:nvSpPr>
+          <p:cNvPr id="27" name="Text 25"/>
+          <p:cNvSpPr txBox="1"/>
+          <p:nvPr/>
+        </p:nvSpPr>
+        <p:spPr>
+          <a:xfrm>
+            <a:off x="1635470" y="2240280"/>
+            <a:ext cx="1170432" cy="320040"/>
+          </a:xfrm>
+          <a:prstGeom prst="rect">
+            <a:avLst/>
+          </a:prstGeom>
+          <a:noFill/>
+          <a:ln/>
+        </p:spPr>
+        <p:txBody>
+          <a:bodyPr wrap="square" lIns="0" tIns="0" rIns="0" bIns="0" rtlCol="0" anchor="t"/>
+          <a:lstStyle/>
+          <a:p>
+            <a:pPr rtl="1" algn="ctr" indent="0" marL="0">
+              <a:buNone/>
+            </a:pPr>
+            <a:r>
+              <a:rPr lang="ar-SA" altLang="en-US" sz="1250" b="1" dirty="0">
+                <a:solidFill>
+                  <a:srgbClr val="0F172A"/>
+                </a:solidFill>
+                <a:latin typeface="Arial" pitchFamily="34" charset="0"/>
+                <a:ea typeface="Arial" pitchFamily="34" charset="-122"/>
+                <a:cs typeface="Arial" pitchFamily="34" charset="-120"/>
+              </a:rPr>
+              <a:t>النمو الذكي</a:t>
+            </a:r>
+            <a:endParaRPr lang="ar-SA" sz="1250" dirty="0"/>
+          </a:p>
+        </p:txBody>
+      </p:sp>
+      <p:sp>
+        <p:nvSpPr>
+          <p:cNvPr id="28" name="Text 26"/>
+          <p:cNvSpPr txBox="1"/>
+          <p:nvPr/>
+        </p:nvSpPr>
+        <p:spPr>
+          <a:xfrm>
+            <a:off x="1635470" y="2560320"/>
+            <a:ext cx="1170432" cy="274320"/>
+          </a:xfrm>
+          <a:prstGeom prst="rect">
+            <a:avLst/>
+          </a:prstGeom>
+          <a:noFill/>
+          <a:ln/>
+        </p:spPr>
+        <p:txBody>
+          <a:bodyPr wrap="square" lIns="0" tIns="0" rIns="0" bIns="0" rtlCol="0" anchor="t"/>
+          <a:lstStyle/>
+          <a:p>
+            <a:pPr rtl="1" algn="ctr" indent="0" marL="0">
+              <a:buNone/>
+            </a:pPr>
+            <a:r>
+              <a:rPr lang="ar-SA" altLang="en-US" sz="1000" dirty="0">
+                <a:solidFill>
+                  <a:srgbClr val="475569"/>
+                </a:solidFill>
+                <a:latin typeface="Arial" pitchFamily="34" charset="0"/>
+                <a:ea typeface="Arial" pitchFamily="34" charset="-122"/>
+                <a:cs typeface="Arial" pitchFamily="34" charset="-120"/>
+              </a:rPr>
+              <a:t>100 – 300 طلب</a:t>
+            </a:r>
+            <a:endParaRPr lang="ar-SA" sz="1000" dirty="0"/>
+          </a:p>
+        </p:txBody>
+      </p:sp>
+      <p:sp>
+        <p:nvSpPr>
+          <p:cNvPr id="29" name="Shape 27"/>
+          <p:cNvSpPr/>
+          <p:nvPr/>
+        </p:nvSpPr>
+        <p:spPr>
+          <a:xfrm>
+            <a:off x="770709" y="1554480"/>
+            <a:ext cx="548640" cy="548640"/>
+          </a:xfrm>
+          <a:prstGeom prst="ellipse">
+            <a:avLst/>
+          </a:prstGeom>
+          <a:solidFill>
+            <a:srgbClr val="10B981"/>
+          </a:solidFill>
+          <a:ln w="25400">
+            <a:solidFill>
+              <a:srgbClr val="FFFFFF"/>
+            </a:solidFill>
+            <a:prstDash val="solid"/>
+          </a:ln>
+        </p:spPr>
+      </p:sp>
+      <p:sp>
+        <p:nvSpPr>
+          <p:cNvPr id="30" name="Text 28"/>
+          <p:cNvSpPr txBox="1"/>
+          <p:nvPr/>
+        </p:nvSpPr>
+        <p:spPr>
+          <a:xfrm>
+            <a:off x="770709" y="1682496"/>
+            <a:ext cx="548640" cy="292608"/>
+          </a:xfrm>
+          <a:prstGeom prst="rect">
+            <a:avLst/>
+          </a:prstGeom>
+          <a:noFill/>
+          <a:ln/>
+        </p:spPr>
+        <p:txBody>
+          <a:bodyPr wrap="square" lIns="0" tIns="0" rIns="0" bIns="0" rtlCol="0" anchor="t"/>
+          <a:lstStyle/>
+          <a:p>
+            <a:pPr rtl="1" algn="ctr" indent="0" marL="0">
+              <a:buNone/>
+            </a:pPr>
+            <a:r>
+              <a:rPr lang="ar-SA" altLang="en-US" sz="1400" b="1" dirty="0">
+                <a:solidFill>
+                  <a:srgbClr val="0F172A"/>
+                </a:solidFill>
+                <a:latin typeface="Arial" pitchFamily="34" charset="0"/>
+                <a:ea typeface="Arial" pitchFamily="34" charset="-122"/>
+                <a:cs typeface="Arial" pitchFamily="34" charset="-120"/>
+              </a:rPr>
+              <a:t>7</a:t>
+            </a:r>
+            <a:endParaRPr lang="ar-SA" sz="1400" dirty="0"/>
+          </a:p>
+        </p:txBody>
+      </p:sp>
+      <p:sp>
+        <p:nvSpPr>
+          <p:cNvPr id="31" name="Text 29"/>
+          <p:cNvSpPr txBox="1"/>
+          <p:nvPr/>
+        </p:nvSpPr>
+        <p:spPr>
+          <a:xfrm>
+            <a:off x="459813" y="2240280"/>
+            <a:ext cx="1170432" cy="320040"/>
+          </a:xfrm>
+          <a:prstGeom prst="rect">
+            <a:avLst/>
+          </a:prstGeom>
+          <a:noFill/>
+          <a:ln/>
+        </p:spPr>
+        <p:txBody>
+          <a:bodyPr wrap="square" lIns="0" tIns="0" rIns="0" bIns="0" rtlCol="0" anchor="t"/>
+          <a:lstStyle/>
+          <a:p>
+            <a:pPr rtl="1" algn="ctr" indent="0" marL="0">
+              <a:buNone/>
+            </a:pPr>
+            <a:r>
+              <a:rPr lang="ar-SA" altLang="en-US" sz="1250" b="1" dirty="0">
+                <a:solidFill>
+                  <a:srgbClr val="0F172A"/>
+                </a:solidFill>
+                <a:latin typeface="Arial" pitchFamily="34" charset="0"/>
+                <a:ea typeface="Arial" pitchFamily="34" charset="-122"/>
+                <a:cs typeface="Arial" pitchFamily="34" charset="-120"/>
+              </a:rPr>
+              <a:t>الاحتراف</a:t>
+            </a:r>
+            <a:endParaRPr lang="ar-SA" sz="1250" dirty="0"/>
+          </a:p>
+        </p:txBody>
+      </p:sp>
+      <p:sp>
+        <p:nvSpPr>
+          <p:cNvPr id="32" name="Text 30"/>
+          <p:cNvSpPr txBox="1"/>
+          <p:nvPr/>
+        </p:nvSpPr>
+        <p:spPr>
+          <a:xfrm>
+            <a:off x="459813" y="2560320"/>
+            <a:ext cx="1170432" cy="274320"/>
+          </a:xfrm>
+          <a:prstGeom prst="rect">
+            <a:avLst/>
+          </a:prstGeom>
+          <a:noFill/>
+          <a:ln/>
+        </p:spPr>
+        <p:txBody>
+          <a:bodyPr wrap="square" lIns="0" tIns="0" rIns="0" bIns="0" rtlCol="0" anchor="t"/>
+          <a:lstStyle/>
+          <a:p>
+            <a:pPr rtl="1" algn="ctr" indent="0" marL="0">
+              <a:buNone/>
+            </a:pPr>
+            <a:r>
+              <a:rPr lang="ar-SA" altLang="en-US" sz="1000" dirty="0">
+                <a:solidFill>
+                  <a:srgbClr val="475569"/>
+                </a:solidFill>
+                <a:latin typeface="Arial" pitchFamily="34" charset="0"/>
+                <a:ea typeface="Arial" pitchFamily="34" charset="-122"/>
+                <a:cs typeface="Arial" pitchFamily="34" charset="-120"/>
+              </a:rPr>
+              <a:t>300+ طلب</a:t>
+            </a:r>
+            <a:endParaRPr lang="ar-SA" sz="1000" dirty="0"/>
+          </a:p>
+        </p:txBody>
+      </p:sp>
+      <p:sp>
+        <p:nvSpPr>
+          <p:cNvPr id="33" name="Shape 31"/>
+          <p:cNvSpPr/>
+          <p:nvPr/>
+        </p:nvSpPr>
+        <p:spPr>
+          <a:xfrm>
+            <a:off x="6062472" y="3154680"/>
+            <a:ext cx="2624328" cy="1188720"/>
+          </a:xfrm>
+          <a:prstGeom prst="roundRect">
+            <a:avLst>
+              <a:gd name="adj" fmla="val 9231"/>
+            </a:avLst>
+          </a:prstGeom>
+          <a:solidFill>
+            <a:srgbClr val="FFFFFF"/>
+          </a:solidFill>
+          <a:ln w="9525">
+            <a:solidFill>
+              <a:srgbClr val="E2E8F0"/>
+            </a:solidFill>
+            <a:prstDash val="solid"/>
+          </a:ln>
+          <a:effectLst>
+            <a:outerShdw sx="100000" sy="100000" kx="0" ky="0" algn="bl" rotWithShape="0" blurRad="76200" dist="25400" dir="5400000">
+              <a:srgbClr val="000000">
+                <a:alpha val="8000"/>
+              </a:srgbClr>
+            </a:outerShdw>
+          </a:effectLst>
+        </p:spPr>
+      </p:sp>
+      <p:sp>
+        <p:nvSpPr>
+          <p:cNvPr id="34" name="Text 32"/>
+          <p:cNvSpPr txBox="1"/>
+          <p:nvPr/>
+        </p:nvSpPr>
+        <p:spPr>
+          <a:xfrm>
+            <a:off x="6245352" y="3291840"/>
+            <a:ext cx="2258568" cy="320040"/>
+          </a:xfrm>
+          <a:prstGeom prst="rect">
+            <a:avLst/>
+          </a:prstGeom>
+          <a:noFill/>
+          <a:ln/>
+        </p:spPr>
+        <p:txBody>
+          <a:bodyPr wrap="square" lIns="0" tIns="0" rIns="0" bIns="0" rtlCol="0" anchor="t"/>
+          <a:lstStyle/>
+          <a:p>
+            <a:pPr rtl="1" algn="r" indent="0" marL="0">
+              <a:buNone/>
+            </a:pPr>
+            <a:r>
+              <a:rPr lang="ar-SA" altLang="en-US" sz="1400" b="1" dirty="0">
+                <a:solidFill>
+                  <a:srgbClr val="047857"/>
+                </a:solidFill>
+                <a:latin typeface="Arial" pitchFamily="34" charset="0"/>
+                <a:ea typeface="Arial" pitchFamily="34" charset="-122"/>
+                <a:cs typeface="Arial" pitchFamily="34" charset="-120"/>
+              </a:rPr>
+              <a:t>كل مهمة فيها</a:t>
+            </a:r>
+            <a:endParaRPr lang="ar-SA" sz="1400" dirty="0"/>
+          </a:p>
+        </p:txBody>
+      </p:sp>
+      <p:sp>
+        <p:nvSpPr>
+          <p:cNvPr id="35" name="Text 33"/>
+          <p:cNvSpPr txBox="1"/>
+          <p:nvPr/>
+        </p:nvSpPr>
+        <p:spPr>
+          <a:xfrm>
+            <a:off x="6245352" y="3657600"/>
+            <a:ext cx="2258568" cy="594360"/>
+          </a:xfrm>
+          <a:prstGeom prst="rect">
+            <a:avLst/>
+          </a:prstGeom>
+          <a:noFill/>
+          <a:ln/>
+        </p:spPr>
+        <p:txBody>
+          <a:bodyPr wrap="square" lIns="0" tIns="0" rIns="0" bIns="0" rtlCol="0" anchor="t"/>
+          <a:lstStyle/>
+          <a:p>
+            <a:pPr rtl="1" algn="r" indent="0" marL="0">
+              <a:buNone/>
+            </a:pPr>
+            <a:r>
+              <a:rPr lang="ar-SA" altLang="en-US" sz="1150" dirty="0">
+                <a:solidFill>
+                  <a:srgbClr val="475569"/>
+                </a:solidFill>
+                <a:latin typeface="Arial" pitchFamily="34" charset="0"/>
+                <a:ea typeface="Arial" pitchFamily="34" charset="-122"/>
+                <a:cs typeface="Arial" pitchFamily="34" charset="-120"/>
+              </a:rPr>
+              <a:t>ليش مهمة، وكيف تسويها بـ 3 خطوات، ونقاط</a:t>
+            </a:r>
+            <a:endParaRPr lang="ar-SA" sz="1150" dirty="0"/>
+          </a:p>
+        </p:txBody>
+      </p:sp>
+      <p:sp>
+        <p:nvSpPr>
+          <p:cNvPr id="36" name="Shape 34"/>
+          <p:cNvSpPr/>
+          <p:nvPr/>
+        </p:nvSpPr>
+        <p:spPr>
+          <a:xfrm>
+            <a:off x="3255264" y="3154680"/>
+            <a:ext cx="2624328" cy="1188720"/>
+          </a:xfrm>
+          <a:prstGeom prst="roundRect">
+            <a:avLst>
+              <a:gd name="adj" fmla="val 9231"/>
+            </a:avLst>
+          </a:prstGeom>
+          <a:solidFill>
+            <a:srgbClr val="FFFFFF"/>
+          </a:solidFill>
+          <a:ln w="9525">
+            <a:solidFill>
+              <a:srgbClr val="E2E8F0"/>
+            </a:solidFill>
+            <a:prstDash val="solid"/>
+          </a:ln>
+          <a:effectLst>
+            <a:outerShdw sx="100000" sy="100000" kx="0" ky="0" algn="bl" rotWithShape="0" blurRad="76200" dist="25400" dir="5400000">
+              <a:srgbClr val="000000">
+                <a:alpha val="8000"/>
+              </a:srgbClr>
+            </a:outerShdw>
+          </a:effectLst>
+        </p:spPr>
+      </p:sp>
+      <p:sp>
+        <p:nvSpPr>
+          <p:cNvPr id="37" name="Text 35"/>
+          <p:cNvSpPr txBox="1"/>
+          <p:nvPr/>
+        </p:nvSpPr>
+        <p:spPr>
+          <a:xfrm>
+            <a:off x="3438144" y="3291840"/>
+            <a:ext cx="2258568" cy="320040"/>
+          </a:xfrm>
+          <a:prstGeom prst="rect">
+            <a:avLst/>
+          </a:prstGeom>
+          <a:noFill/>
+          <a:ln/>
+        </p:spPr>
+        <p:txBody>
+          <a:bodyPr wrap="square" lIns="0" tIns="0" rIns="0" bIns="0" rtlCol="0" anchor="t"/>
+          <a:lstStyle/>
+          <a:p>
+            <a:pPr rtl="1" algn="r" indent="0" marL="0">
+              <a:buNone/>
+            </a:pPr>
+            <a:r>
+              <a:rPr lang="ar-SA" altLang="en-US" sz="1400" b="1" dirty="0">
+                <a:solidFill>
+                  <a:srgbClr val="047857"/>
+                </a:solidFill>
+                <a:latin typeface="Arial" pitchFamily="34" charset="0"/>
+                <a:ea typeface="Arial" pitchFamily="34" charset="-122"/>
+                <a:cs typeface="Arial" pitchFamily="34" charset="-120"/>
+              </a:rPr>
+              <a:t>أدلة سلة</a:t>
+            </a:r>
+            <a:endParaRPr lang="ar-SA" sz="1400" dirty="0"/>
+          </a:p>
+        </p:txBody>
+      </p:sp>
+      <p:sp>
+        <p:nvSpPr>
+          <p:cNvPr id="38" name="Text 36"/>
+          <p:cNvSpPr txBox="1"/>
+          <p:nvPr/>
+        </p:nvSpPr>
+        <p:spPr>
+          <a:xfrm>
+            <a:off x="3438144" y="3657600"/>
+            <a:ext cx="2258568" cy="594360"/>
+          </a:xfrm>
+          <a:prstGeom prst="rect">
+            <a:avLst/>
+          </a:prstGeom>
+          <a:noFill/>
+          <a:ln/>
+        </p:spPr>
+        <p:txBody>
+          <a:bodyPr wrap="square" lIns="0" tIns="0" rIns="0" bIns="0" rtlCol="0" anchor="t"/>
+          <a:lstStyle/>
+          <a:p>
+            <a:pPr rtl="1" algn="r" indent="0" marL="0">
+              <a:buNone/>
+            </a:pPr>
+            <a:r>
+              <a:rPr lang="ar-SA" altLang="en-US" sz="1150" dirty="0">
+                <a:solidFill>
+                  <a:srgbClr val="475569"/>
+                </a:solidFill>
+                <a:latin typeface="Arial" pitchFamily="34" charset="0"/>
+                <a:ea typeface="Arial" pitchFamily="34" charset="-122"/>
+                <a:cs typeface="Arial" pitchFamily="34" charset="-120"/>
+              </a:rPr>
+              <a:t>خطوة بخطوة: وين تضغط بالضبط في لوحة سلة</a:t>
+            </a:r>
+            <a:endParaRPr lang="ar-SA" sz="1150" dirty="0"/>
+          </a:p>
+        </p:txBody>
+      </p:sp>
+      <p:sp>
+        <p:nvSpPr>
+          <p:cNvPr id="39" name="Shape 37"/>
+          <p:cNvSpPr/>
+          <p:nvPr/>
+        </p:nvSpPr>
+        <p:spPr>
+          <a:xfrm>
+            <a:off x="448056" y="3154680"/>
+            <a:ext cx="2624328" cy="1188720"/>
+          </a:xfrm>
+          <a:prstGeom prst="roundRect">
+            <a:avLst>
+              <a:gd name="adj" fmla="val 9231"/>
+            </a:avLst>
+          </a:prstGeom>
+          <a:solidFill>
+            <a:srgbClr val="FFFFFF"/>
+          </a:solidFill>
+          <a:ln w="9525">
+            <a:solidFill>
+              <a:srgbClr val="E2E8F0"/>
+            </a:solidFill>
+            <a:prstDash val="solid"/>
+          </a:ln>
+          <a:effectLst>
+            <a:outerShdw sx="100000" sy="100000" kx="0" ky="0" algn="bl" rotWithShape="0" blurRad="76200" dist="25400" dir="5400000">
+              <a:srgbClr val="000000">
+                <a:alpha val="8000"/>
+              </a:srgbClr>
+            </a:outerShdw>
+          </a:effectLst>
+        </p:spPr>
+      </p:sp>
+      <p:sp>
+        <p:nvSpPr>
+          <p:cNvPr id="40" name="Text 38"/>
+          <p:cNvSpPr txBox="1"/>
+          <p:nvPr/>
+        </p:nvSpPr>
+        <p:spPr>
+          <a:xfrm>
+            <a:off x="630936" y="3291840"/>
+            <a:ext cx="2258568" cy="320040"/>
+          </a:xfrm>
+          <a:prstGeom prst="rect">
+            <a:avLst/>
+          </a:prstGeom>
+          <a:noFill/>
+          <a:ln/>
+        </p:spPr>
+        <p:txBody>
+          <a:bodyPr wrap="square" lIns="0" tIns="0" rIns="0" bIns="0" rtlCol="0" anchor="t"/>
+          <a:lstStyle/>
+          <a:p>
+            <a:pPr rtl="1" algn="r" indent="0" marL="0">
+              <a:buNone/>
+            </a:pPr>
+            <a:r>
+              <a:rPr lang="ar-SA" altLang="en-US" sz="1400" b="1" dirty="0">
+                <a:solidFill>
+                  <a:srgbClr val="047857"/>
+                </a:solidFill>
+                <a:latin typeface="Arial" pitchFamily="34" charset="0"/>
+                <a:ea typeface="Arial" pitchFamily="34" charset="-122"/>
+                <a:cs typeface="Arial" pitchFamily="34" charset="-120"/>
+              </a:rPr>
+              <a:t>من 100 طلب</a:t>
+            </a:r>
+            <a:endParaRPr lang="ar-SA" sz="1400" dirty="0"/>
+          </a:p>
+        </p:txBody>
+      </p:sp>
+      <p:sp>
+        <p:nvSpPr>
+          <p:cNvPr id="41" name="Text 39"/>
+          <p:cNvSpPr txBox="1"/>
+          <p:nvPr/>
+        </p:nvSpPr>
+        <p:spPr>
+          <a:xfrm>
+            <a:off x="630936" y="3657600"/>
+            <a:ext cx="2258568" cy="594360"/>
+          </a:xfrm>
+          <a:prstGeom prst="rect">
+            <a:avLst/>
+          </a:prstGeom>
+          <a:noFill/>
+          <a:ln/>
+        </p:spPr>
+        <p:txBody>
+          <a:bodyPr wrap="square" lIns="0" tIns="0" rIns="0" bIns="0" rtlCol="0" anchor="t"/>
+          <a:lstStyle/>
+          <a:p>
+            <a:pPr rtl="1" algn="r" indent="0" marL="0">
+              <a:buNone/>
+            </a:pPr>
+            <a:r>
+              <a:rPr lang="ar-SA" altLang="en-US" sz="1150" dirty="0">
+                <a:solidFill>
+                  <a:srgbClr val="475569"/>
+                </a:solidFill>
+                <a:latin typeface="Arial" pitchFamily="34" charset="0"/>
+                <a:ea typeface="Arial" pitchFamily="34" charset="-122"/>
+                <a:cs typeface="Arial" pitchFamily="34" charset="-120"/>
+              </a:rPr>
+              <a:t>يفتح «نبض الذكي»: الفرص والتجارب</a:t>
+            </a:r>
+            <a:endParaRPr lang="ar-SA" sz="1150" dirty="0"/>
+          </a:p>
+        </p:txBody>
+      </p:sp>
+      <p:sp>
+        <p:nvSpPr>
+          <p:cNvPr id="42" name="Text 40"/>
+          <p:cNvSpPr txBox="1"/>
+          <p:nvPr/>
+        </p:nvSpPr>
+        <p:spPr>
+          <a:xfrm>
+            <a:off x="6858000" y="4754880"/>
+            <a:ext cx="1828800" cy="228600"/>
+          </a:xfrm>
+          <a:prstGeom prst="rect">
+            <a:avLst/>
+          </a:prstGeom>
+          <a:noFill/>
+          <a:ln/>
+        </p:spPr>
+        <p:txBody>
+          <a:bodyPr wrap="square" lIns="0" tIns="0" rIns="0" bIns="0" rtlCol="0" anchor="t"/>
+          <a:lstStyle/>
+          <a:p>
+            <a:pPr rtl="1" algn="r" indent="0" marL="0">
+              <a:buNone/>
+            </a:pPr>
+            <a:r>
+              <a:rPr lang="ar-SA" altLang="en-US" sz="900" dirty="0">
+                <a:solidFill>
+                  <a:srgbClr val="64748B"/>
+                </a:solidFill>
+                <a:latin typeface="Arial" pitchFamily="34" charset="0"/>
+                <a:ea typeface="Arial" pitchFamily="34" charset="-122"/>
+                <a:cs typeface="Arial" pitchFamily="34" charset="-120"/>
+              </a:rPr>
+              <a:t>نبض | NABD</a:t>
+            </a:r>
+            <a:endParaRPr lang="ar-SA" sz="900" dirty="0"/>
+          </a:p>
+        </p:txBody>
+      </p:sp>
+      <p:sp>
+        <p:nvSpPr>
+          <p:cNvPr id="43" name="Text 41"/>
+          <p:cNvSpPr txBox="1"/>
+          <p:nvPr/>
+        </p:nvSpPr>
+        <p:spPr>
+          <a:xfrm>
+            <a:off x="457200" y="4754880"/>
+            <a:ext cx="457200" cy="228600"/>
+          </a:xfrm>
+          <a:prstGeom prst="rect">
+            <a:avLst/>
+          </a:prstGeom>
+          <a:noFill/>
+          <a:ln/>
+        </p:spPr>
+        <p:txBody>
+          <a:bodyPr wrap="square" lIns="0" tIns="0" rIns="0" bIns="0" rtlCol="0" anchor="ctr"/>
+          <a:lstStyle/>
+          <a:p>
+            <a:pPr indent="0" marL="0">
+              <a:buNone/>
+            </a:pPr>
+            <a:r>
+              <a:rPr lang="en-US" sz="900" dirty="0">
+                <a:solidFill>
+                  <a:srgbClr val="64748B"/>
+                </a:solidFill>
+                <a:latin typeface="Arial" pitchFamily="34" charset="0"/>
+                <a:ea typeface="Arial" pitchFamily="34" charset="-122"/>
+                <a:cs typeface="Arial" pitchFamily="34" charset="-120"/>
+              </a:rPr>
+              <a:t>7</a:t>
+            </a:r>
+            <a:endParaRPr lang="en-US" sz="900" dirty="0"/>
+          </a:p>
+        </p:txBody>
+      </p:sp>
+    </p:spTree>
+  </p:cSld>
+  <p:clrMapOvr>
+    <a:masterClrMapping/>
+  </p:clrMapOvr>
+</p:sld>
+</file>
+
+<file path=ppt/slides/slide8.xml><?xml version="1.0" encoding="utf-8"?>
+<p:sld xmlns:a="http://schemas.openxmlformats.org/drawingml/2006/main" xmlns:r="http://schemas.openxmlformats.org/officeDocument/2006/relationships" xmlns:p="http://schemas.openxmlformats.org/presentationml/2006/main">
+  <p:cSld name="Slide 8">
+    <p:bg>
+      <p:bgPr>
+        <a:solidFill>
           <a:srgbClr val="FFFFFF"/>
         </a:solidFill>
       </p:bgPr>
@@ -10600,7 +13567,7 @@
                 <a:ea typeface="Arial" pitchFamily="34" charset="-122"/>
                 <a:cs typeface="Arial" pitchFamily="34" charset="-120"/>
               </a:rPr>
-              <a:t>7–13 ألف</a:t>
+              <a:t>7 مراحل</a:t>
             </a:r>
             <a:endParaRPr lang="ar-SA" sz="3000" dirty="0"/>
           </a:p>
@@ -10639,7 +13606,7 @@
                 <a:ea typeface="Arial" pitchFamily="34" charset="-122"/>
                 <a:cs typeface="Arial" pitchFamily="34" charset="-120"/>
               </a:rPr>
-              <a:t>متجر في الشريحة المستهدفة (تقدير)</a:t>
+              <a:t>نخدم التاجر من صفر طلب</a:t>
             </a:r>
             <a:endParaRPr lang="ar-SA" sz="1200" dirty="0"/>
           </a:p>
@@ -10678,7 +13645,7 @@
                 <a:ea typeface="Arial" pitchFamily="34" charset="-122"/>
                 <a:cs typeface="Arial" pitchFamily="34" charset="-120"/>
               </a:rPr>
-              <a:t>العميل المستهدف: متاجر بين 100 و3,000 طلب شهريًا. عندها بيانات كافية، وتستطيع الدفع.</a:t>
+              <a:t>العميل المستهدف: كل تاجر في سلة، من المتجر الجديد بصفر طلب إلى المتجر الكبير.</a:t>
             </a:r>
             <a:endParaRPr lang="ar-SA" sz="1400" dirty="0"/>
           </a:p>
@@ -10756,7 +13723,7 @@
                 <a:ea typeface="Arial" pitchFamily="34" charset="-122"/>
                 <a:cs typeface="Arial" pitchFamily="34" charset="-120"/>
               </a:rPr>
-              <a:t>المصدر: صفحة سلة الرسمية 2025. تقدير الشريحة افتراض يحتاج تأكيدًا من سلة.</a:t>
+              <a:t>المصدر: صفحة سلة الرسمية 2025.</a:t>
             </a:r>
             <a:endParaRPr lang="ar-SA" sz="900" dirty="0"/>
           </a:p>
@@ -10834,7 +13801,7 @@
                 <a:ea typeface="Arial" pitchFamily="34" charset="-122"/>
                 <a:cs typeface="Arial" pitchFamily="34" charset="-120"/>
               </a:rPr>
-              <a:t>7</a:t>
+              <a:t>8</a:t>
             </a:r>
             <a:endParaRPr lang="en-US" sz="900" dirty="0"/>
           </a:p>
@@ -10848,9 +13815,9 @@
 </p:sld>
 </file>
 
-<file path=ppt/slides/slide8.xml><?xml version="1.0" encoding="utf-8"?>
+<file path=ppt/slides/slide9.xml><?xml version="1.0" encoding="utf-8"?>
 <p:sld xmlns:a="http://schemas.openxmlformats.org/drawingml/2006/main" xmlns:r="http://schemas.openxmlformats.org/officeDocument/2006/relationships" xmlns:p="http://schemas.openxmlformats.org/presentationml/2006/main">
-  <p:cSld name="Slide 8">
+  <p:cSld name="Slide 9">
     <p:bg>
       <p:bgPr>
         <a:solidFill>
@@ -11636,965 +14603,6 @@
       <p:sp>
         <p:nvSpPr>
           <p:cNvPr id="25" name="Text 19"/>
-          <p:cNvSpPr txBox="1"/>
-          <p:nvPr/>
-        </p:nvSpPr>
-        <p:spPr>
-          <a:xfrm>
-            <a:off x="457200" y="4754880"/>
-            <a:ext cx="457200" cy="228600"/>
-          </a:xfrm>
-          <a:prstGeom prst="rect">
-            <a:avLst/>
-          </a:prstGeom>
-          <a:noFill/>
-          <a:ln/>
-        </p:spPr>
-        <p:txBody>
-          <a:bodyPr wrap="square" lIns="0" tIns="0" rIns="0" bIns="0" rtlCol="0" anchor="ctr"/>
-          <a:lstStyle/>
-          <a:p>
-            <a:pPr indent="0" marL="0">
-              <a:buNone/>
-            </a:pPr>
-            <a:r>
-              <a:rPr lang="en-US" sz="900" dirty="0">
-                <a:solidFill>
-                  <a:srgbClr val="64748B"/>
-                </a:solidFill>
-                <a:latin typeface="Arial" pitchFamily="34" charset="0"/>
-                <a:ea typeface="Arial" pitchFamily="34" charset="-122"/>
-                <a:cs typeface="Arial" pitchFamily="34" charset="-120"/>
-              </a:rPr>
-              <a:t>8</a:t>
-            </a:r>
-            <a:endParaRPr lang="en-US" sz="900" dirty="0"/>
-          </a:p>
-        </p:txBody>
-      </p:sp>
-    </p:spTree>
-  </p:cSld>
-  <p:clrMapOvr>
-    <a:masterClrMapping/>
-  </p:clrMapOvr>
-</p:sld>
-</file>
-
-<file path=ppt/slides/slide9.xml><?xml version="1.0" encoding="utf-8"?>
-<p:sld xmlns:a="http://schemas.openxmlformats.org/drawingml/2006/main" xmlns:r="http://schemas.openxmlformats.org/officeDocument/2006/relationships" xmlns:p="http://schemas.openxmlformats.org/presentationml/2006/main">
-  <p:cSld name="Slide 9">
-    <p:bg>
-      <p:bgPr>
-        <a:solidFill>
-          <a:srgbClr val="FFFFFF"/>
-        </a:solidFill>
-      </p:bgPr>
-    </p:bg>
-    <p:spTree>
-      <p:nvGrpSpPr>
-        <p:cNvPr id="1" name=""/>
-        <p:cNvGrpSpPr/>
-        <p:nvPr/>
-      </p:nvGrpSpPr>
-      <p:grpSpPr>
-        <a:xfrm>
-          <a:off x="0" y="0"/>
-          <a:ext cx="0" cy="0"/>
-          <a:chOff x="0" y="0"/>
-          <a:chExt cx="0" cy="0"/>
-        </a:xfrm>
-      </p:grpSpPr>
-      <p:sp>
-        <p:nvSpPr>
-          <p:cNvPr id="2" name="Text 0"/>
-          <p:cNvSpPr txBox="1"/>
-          <p:nvPr/>
-        </p:nvSpPr>
-        <p:spPr>
-          <a:xfrm>
-            <a:off x="457200" y="320040"/>
-            <a:ext cx="8229600" cy="548640"/>
-          </a:xfrm>
-          <a:prstGeom prst="rect">
-            <a:avLst/>
-          </a:prstGeom>
-          <a:noFill/>
-          <a:ln/>
-        </p:spPr>
-        <p:txBody>
-          <a:bodyPr wrap="square" lIns="0" tIns="0" rIns="0" bIns="0" rtlCol="0" anchor="t"/>
-          <a:lstStyle/>
-          <a:p>
-            <a:pPr rtl="1" algn="r" indent="0" marL="0">
-              <a:buNone/>
-            </a:pPr>
-            <a:r>
-              <a:rPr lang="ar-SA" altLang="en-US" sz="3000" b="1" dirty="0">
-                <a:solidFill>
-                  <a:srgbClr val="0F172A"/>
-                </a:solidFill>
-                <a:latin typeface="Arial" pitchFamily="34" charset="0"/>
-                <a:ea typeface="Arial" pitchFamily="34" charset="-122"/>
-                <a:cs typeface="Arial" pitchFamily="34" charset="-120"/>
-              </a:rPr>
-              <a:t>نموذج الربح</a:t>
-            </a:r>
-            <a:endParaRPr lang="ar-SA" sz="3000" dirty="0"/>
-          </a:p>
-        </p:txBody>
-      </p:sp>
-      <p:sp>
-        <p:nvSpPr>
-          <p:cNvPr id="3" name="Text 1"/>
-          <p:cNvSpPr txBox="1"/>
-          <p:nvPr/>
-        </p:nvSpPr>
-        <p:spPr>
-          <a:xfrm>
-            <a:off x="457200" y="868680"/>
-            <a:ext cx="8229600" cy="365760"/>
-          </a:xfrm>
-          <a:prstGeom prst="rect">
-            <a:avLst/>
-          </a:prstGeom>
-          <a:noFill/>
-          <a:ln/>
-        </p:spPr>
-        <p:txBody>
-          <a:bodyPr wrap="square" lIns="0" tIns="0" rIns="0" bIns="0" rtlCol="0" anchor="t"/>
-          <a:lstStyle/>
-          <a:p>
-            <a:pPr rtl="1" algn="r" indent="0" marL="0">
-              <a:buNone/>
-            </a:pPr>
-            <a:r>
-              <a:rPr lang="ar-SA" altLang="en-US" sz="1400" dirty="0">
-                <a:solidFill>
-                  <a:srgbClr val="475569"/>
-                </a:solidFill>
-                <a:latin typeface="Arial" pitchFamily="34" charset="0"/>
-                <a:ea typeface="Arial" pitchFamily="34" charset="-122"/>
-                <a:cs typeface="Arial" pitchFamily="34" charset="-120"/>
-              </a:rPr>
-              <a:t>اشتراك شهري حسب حجم المتجر (أسعار مبدئية للاختبار)</a:t>
-            </a:r>
-            <a:endParaRPr lang="ar-SA" sz="1400" dirty="0"/>
-          </a:p>
-        </p:txBody>
-      </p:sp>
-      <p:sp>
-        <p:nvSpPr>
-          <p:cNvPr id="4" name="Shape 2"/>
-          <p:cNvSpPr/>
-          <p:nvPr/>
-        </p:nvSpPr>
-        <p:spPr>
-          <a:xfrm>
-            <a:off x="6766560" y="1463040"/>
-            <a:ext cx="1920240" cy="2194560"/>
-          </a:xfrm>
-          <a:prstGeom prst="roundRect">
-            <a:avLst>
-              <a:gd name="adj" fmla="val 5714"/>
-            </a:avLst>
-          </a:prstGeom>
-          <a:solidFill>
-            <a:srgbClr val="F8FAFC"/>
-          </a:solidFill>
-          <a:ln w="12700">
-            <a:solidFill>
-              <a:srgbClr val="E2E8F0"/>
-            </a:solidFill>
-            <a:prstDash val="solid"/>
-          </a:ln>
-        </p:spPr>
-      </p:sp>
-      <p:sp>
-        <p:nvSpPr>
-          <p:cNvPr id="5" name="Text 3"/>
-          <p:cNvSpPr txBox="1"/>
-          <p:nvPr/>
-        </p:nvSpPr>
-        <p:spPr>
-          <a:xfrm>
-            <a:off x="6903720" y="1645920"/>
-            <a:ext cx="1645920" cy="365760"/>
-          </a:xfrm>
-          <a:prstGeom prst="rect">
-            <a:avLst/>
-          </a:prstGeom>
-          <a:noFill/>
-          <a:ln/>
-        </p:spPr>
-        <p:txBody>
-          <a:bodyPr wrap="square" lIns="0" tIns="0" rIns="0" bIns="0" rtlCol="0" anchor="t"/>
-          <a:lstStyle/>
-          <a:p>
-            <a:pPr rtl="1" algn="ctr" indent="0" marL="0">
-              <a:buNone/>
-            </a:pPr>
-            <a:r>
-              <a:rPr lang="ar-SA" altLang="en-US" sz="1600" b="1" dirty="0">
-                <a:solidFill>
-                  <a:srgbClr val="0F172A"/>
-                </a:solidFill>
-                <a:latin typeface="Arial" pitchFamily="34" charset="0"/>
-                <a:ea typeface="Arial" pitchFamily="34" charset="-122"/>
-                <a:cs typeface="Arial" pitchFamily="34" charset="-120"/>
-              </a:rPr>
-              <a:t>Starter</a:t>
-            </a:r>
-            <a:endParaRPr lang="ar-SA" sz="1600" dirty="0"/>
-          </a:p>
-        </p:txBody>
-      </p:sp>
-      <p:sp>
-        <p:nvSpPr>
-          <p:cNvPr id="6" name="Text 4"/>
-          <p:cNvSpPr txBox="1"/>
-          <p:nvPr/>
-        </p:nvSpPr>
-        <p:spPr>
-          <a:xfrm>
-            <a:off x="6903720" y="2103120"/>
-            <a:ext cx="1645920" cy="640080"/>
-          </a:xfrm>
-          <a:prstGeom prst="rect">
-            <a:avLst/>
-          </a:prstGeom>
-          <a:noFill/>
-          <a:ln/>
-        </p:spPr>
-        <p:txBody>
-          <a:bodyPr wrap="square" lIns="0" tIns="0" rIns="0" bIns="0" rtlCol="0" anchor="t"/>
-          <a:lstStyle/>
-          <a:p>
-            <a:pPr rtl="1" algn="ctr" indent="0" marL="0">
-              <a:buNone/>
-            </a:pPr>
-            <a:r>
-              <a:rPr lang="ar-SA" altLang="en-US" sz="3000" b="1" dirty="0">
-                <a:solidFill>
-                  <a:srgbClr val="047857"/>
-                </a:solidFill>
-                <a:latin typeface="Arial" pitchFamily="34" charset="0"/>
-                <a:ea typeface="Arial" pitchFamily="34" charset="-122"/>
-                <a:cs typeface="Arial" pitchFamily="34" charset="-120"/>
-              </a:rPr>
-              <a:t>149</a:t>
-            </a:r>
-            <a:endParaRPr lang="ar-SA" sz="3000" dirty="0"/>
-          </a:p>
-        </p:txBody>
-      </p:sp>
-      <p:sp>
-        <p:nvSpPr>
-          <p:cNvPr id="7" name="Text 5"/>
-          <p:cNvSpPr txBox="1"/>
-          <p:nvPr/>
-        </p:nvSpPr>
-        <p:spPr>
-          <a:xfrm>
-            <a:off x="6903720" y="2743200"/>
-            <a:ext cx="1645920" cy="274320"/>
-          </a:xfrm>
-          <a:prstGeom prst="rect">
-            <a:avLst/>
-          </a:prstGeom>
-          <a:noFill/>
-          <a:ln/>
-        </p:spPr>
-        <p:txBody>
-          <a:bodyPr wrap="square" lIns="0" tIns="0" rIns="0" bIns="0" rtlCol="0" anchor="t"/>
-          <a:lstStyle/>
-          <a:p>
-            <a:pPr rtl="1" algn="ctr" indent="0" marL="0">
-              <a:buNone/>
-            </a:pPr>
-            <a:r>
-              <a:rPr lang="ar-SA" altLang="en-US" sz="1100" dirty="0">
-                <a:solidFill>
-                  <a:srgbClr val="64748B"/>
-                </a:solidFill>
-                <a:latin typeface="Arial" pitchFamily="34" charset="0"/>
-                <a:ea typeface="Arial" pitchFamily="34" charset="-122"/>
-                <a:cs typeface="Arial" pitchFamily="34" charset="-120"/>
-              </a:rPr>
-              <a:t>ريال شهريًا</a:t>
-            </a:r>
-            <a:endParaRPr lang="ar-SA" sz="1100" dirty="0"/>
-          </a:p>
-        </p:txBody>
-      </p:sp>
-      <p:sp>
-        <p:nvSpPr>
-          <p:cNvPr id="8" name="Text 6"/>
-          <p:cNvSpPr txBox="1"/>
-          <p:nvPr/>
-        </p:nvSpPr>
-        <p:spPr>
-          <a:xfrm>
-            <a:off x="6903720" y="3108960"/>
-            <a:ext cx="1645920" cy="365760"/>
-          </a:xfrm>
-          <a:prstGeom prst="rect">
-            <a:avLst/>
-          </a:prstGeom>
-          <a:noFill/>
-          <a:ln/>
-        </p:spPr>
-        <p:txBody>
-          <a:bodyPr wrap="square" lIns="0" tIns="0" rIns="0" bIns="0" rtlCol="0" anchor="t"/>
-          <a:lstStyle/>
-          <a:p>
-            <a:pPr rtl="1" algn="ctr" indent="0" marL="0">
-              <a:buNone/>
-            </a:pPr>
-            <a:r>
-              <a:rPr lang="ar-SA" altLang="en-US" sz="1100" dirty="0">
-                <a:solidFill>
-                  <a:srgbClr val="475569"/>
-                </a:solidFill>
-                <a:latin typeface="Arial" pitchFamily="34" charset="0"/>
-                <a:ea typeface="Arial" pitchFamily="34" charset="-122"/>
-                <a:cs typeface="Arial" pitchFamily="34" charset="-120"/>
-              </a:rPr>
-              <a:t>حتى 300 طلب/شهر</a:t>
-            </a:r>
-            <a:endParaRPr lang="ar-SA" sz="1100" dirty="0"/>
-          </a:p>
-        </p:txBody>
-      </p:sp>
-      <p:sp>
-        <p:nvSpPr>
-          <p:cNvPr id="9" name="Shape 7"/>
-          <p:cNvSpPr/>
-          <p:nvPr/>
-        </p:nvSpPr>
-        <p:spPr>
-          <a:xfrm>
-            <a:off x="4663440" y="1463040"/>
-            <a:ext cx="1920240" cy="2194560"/>
-          </a:xfrm>
-          <a:prstGeom prst="roundRect">
-            <a:avLst>
-              <a:gd name="adj" fmla="val 5714"/>
-            </a:avLst>
-          </a:prstGeom>
-          <a:solidFill>
-            <a:srgbClr val="0F172A"/>
-          </a:solidFill>
-          <a:ln w="12700">
-            <a:solidFill>
-              <a:srgbClr val="0F172A"/>
-            </a:solidFill>
-            <a:prstDash val="solid"/>
-          </a:ln>
-        </p:spPr>
-      </p:sp>
-      <p:sp>
-        <p:nvSpPr>
-          <p:cNvPr id="10" name="Text 8"/>
-          <p:cNvSpPr txBox="1"/>
-          <p:nvPr/>
-        </p:nvSpPr>
-        <p:spPr>
-          <a:xfrm>
-            <a:off x="4800600" y="1645920"/>
-            <a:ext cx="1645920" cy="365760"/>
-          </a:xfrm>
-          <a:prstGeom prst="rect">
-            <a:avLst/>
-          </a:prstGeom>
-          <a:noFill/>
-          <a:ln/>
-        </p:spPr>
-        <p:txBody>
-          <a:bodyPr wrap="square" lIns="0" tIns="0" rIns="0" bIns="0" rtlCol="0" anchor="t"/>
-          <a:lstStyle/>
-          <a:p>
-            <a:pPr rtl="1" algn="ctr" indent="0" marL="0">
-              <a:buNone/>
-            </a:pPr>
-            <a:r>
-              <a:rPr lang="ar-SA" altLang="en-US" sz="1600" b="1" dirty="0">
-                <a:solidFill>
-                  <a:srgbClr val="FFFFFF"/>
-                </a:solidFill>
-                <a:latin typeface="Arial" pitchFamily="34" charset="0"/>
-                <a:ea typeface="Arial" pitchFamily="34" charset="-122"/>
-                <a:cs typeface="Arial" pitchFamily="34" charset="-120"/>
-              </a:rPr>
-              <a:t>Growth</a:t>
-            </a:r>
-            <a:endParaRPr lang="ar-SA" sz="1600" dirty="0"/>
-          </a:p>
-        </p:txBody>
-      </p:sp>
-      <p:sp>
-        <p:nvSpPr>
-          <p:cNvPr id="11" name="Text 9"/>
-          <p:cNvSpPr txBox="1"/>
-          <p:nvPr/>
-        </p:nvSpPr>
-        <p:spPr>
-          <a:xfrm>
-            <a:off x="4800600" y="2103120"/>
-            <a:ext cx="1645920" cy="640080"/>
-          </a:xfrm>
-          <a:prstGeom prst="rect">
-            <a:avLst/>
-          </a:prstGeom>
-          <a:noFill/>
-          <a:ln/>
-        </p:spPr>
-        <p:txBody>
-          <a:bodyPr wrap="square" lIns="0" tIns="0" rIns="0" bIns="0" rtlCol="0" anchor="t"/>
-          <a:lstStyle/>
-          <a:p>
-            <a:pPr rtl="1" algn="ctr" indent="0" marL="0">
-              <a:buNone/>
-            </a:pPr>
-            <a:r>
-              <a:rPr lang="ar-SA" altLang="en-US" sz="3000" b="1" dirty="0">
-                <a:solidFill>
-                  <a:srgbClr val="34D399"/>
-                </a:solidFill>
-                <a:latin typeface="Arial" pitchFamily="34" charset="0"/>
-                <a:ea typeface="Arial" pitchFamily="34" charset="-122"/>
-                <a:cs typeface="Arial" pitchFamily="34" charset="-120"/>
-              </a:rPr>
-              <a:t>349</a:t>
-            </a:r>
-            <a:endParaRPr lang="ar-SA" sz="3000" dirty="0"/>
-          </a:p>
-        </p:txBody>
-      </p:sp>
-      <p:sp>
-        <p:nvSpPr>
-          <p:cNvPr id="12" name="Text 10"/>
-          <p:cNvSpPr txBox="1"/>
-          <p:nvPr/>
-        </p:nvSpPr>
-        <p:spPr>
-          <a:xfrm>
-            <a:off x="4800600" y="2743200"/>
-            <a:ext cx="1645920" cy="274320"/>
-          </a:xfrm>
-          <a:prstGeom prst="rect">
-            <a:avLst/>
-          </a:prstGeom>
-          <a:noFill/>
-          <a:ln/>
-        </p:spPr>
-        <p:txBody>
-          <a:bodyPr wrap="square" lIns="0" tIns="0" rIns="0" bIns="0" rtlCol="0" anchor="t"/>
-          <a:lstStyle/>
-          <a:p>
-            <a:pPr rtl="1" algn="ctr" indent="0" marL="0">
-              <a:buNone/>
-            </a:pPr>
-            <a:r>
-              <a:rPr lang="ar-SA" altLang="en-US" sz="1100" dirty="0">
-                <a:solidFill>
-                  <a:srgbClr val="CBD5E1"/>
-                </a:solidFill>
-                <a:latin typeface="Arial" pitchFamily="34" charset="0"/>
-                <a:ea typeface="Arial" pitchFamily="34" charset="-122"/>
-                <a:cs typeface="Arial" pitchFamily="34" charset="-120"/>
-              </a:rPr>
-              <a:t>ريال شهريًا</a:t>
-            </a:r>
-            <a:endParaRPr lang="ar-SA" sz="1100" dirty="0"/>
-          </a:p>
-        </p:txBody>
-      </p:sp>
-      <p:sp>
-        <p:nvSpPr>
-          <p:cNvPr id="13" name="Text 11"/>
-          <p:cNvSpPr txBox="1"/>
-          <p:nvPr/>
-        </p:nvSpPr>
-        <p:spPr>
-          <a:xfrm>
-            <a:off x="4800600" y="3108960"/>
-            <a:ext cx="1645920" cy="365760"/>
-          </a:xfrm>
-          <a:prstGeom prst="rect">
-            <a:avLst/>
-          </a:prstGeom>
-          <a:noFill/>
-          <a:ln/>
-        </p:spPr>
-        <p:txBody>
-          <a:bodyPr wrap="square" lIns="0" tIns="0" rIns="0" bIns="0" rtlCol="0" anchor="t"/>
-          <a:lstStyle/>
-          <a:p>
-            <a:pPr rtl="1" algn="ctr" indent="0" marL="0">
-              <a:buNone/>
-            </a:pPr>
-            <a:r>
-              <a:rPr lang="ar-SA" altLang="en-US" sz="1100" dirty="0">
-                <a:solidFill>
-                  <a:srgbClr val="FFFFFF"/>
-                </a:solidFill>
-                <a:latin typeface="Arial" pitchFamily="34" charset="0"/>
-                <a:ea typeface="Arial" pitchFamily="34" charset="-122"/>
-                <a:cs typeface="Arial" pitchFamily="34" charset="-120"/>
-              </a:rPr>
-              <a:t>حتى 1,500 طلب/شهر</a:t>
-            </a:r>
-            <a:endParaRPr lang="ar-SA" sz="1100" dirty="0"/>
-          </a:p>
-        </p:txBody>
-      </p:sp>
-      <p:sp>
-        <p:nvSpPr>
-          <p:cNvPr id="14" name="Shape 12"/>
-          <p:cNvSpPr/>
-          <p:nvPr/>
-        </p:nvSpPr>
-        <p:spPr>
-          <a:xfrm>
-            <a:off x="2560320" y="1463040"/>
-            <a:ext cx="1920240" cy="2194560"/>
-          </a:xfrm>
-          <a:prstGeom prst="roundRect">
-            <a:avLst>
-              <a:gd name="adj" fmla="val 5714"/>
-            </a:avLst>
-          </a:prstGeom>
-          <a:solidFill>
-            <a:srgbClr val="F8FAFC"/>
-          </a:solidFill>
-          <a:ln w="12700">
-            <a:solidFill>
-              <a:srgbClr val="E2E8F0"/>
-            </a:solidFill>
-            <a:prstDash val="solid"/>
-          </a:ln>
-        </p:spPr>
-      </p:sp>
-      <p:sp>
-        <p:nvSpPr>
-          <p:cNvPr id="15" name="Text 13"/>
-          <p:cNvSpPr txBox="1"/>
-          <p:nvPr/>
-        </p:nvSpPr>
-        <p:spPr>
-          <a:xfrm>
-            <a:off x="2697480" y="1645920"/>
-            <a:ext cx="1645920" cy="365760"/>
-          </a:xfrm>
-          <a:prstGeom prst="rect">
-            <a:avLst/>
-          </a:prstGeom>
-          <a:noFill/>
-          <a:ln/>
-        </p:spPr>
-        <p:txBody>
-          <a:bodyPr wrap="square" lIns="0" tIns="0" rIns="0" bIns="0" rtlCol="0" anchor="t"/>
-          <a:lstStyle/>
-          <a:p>
-            <a:pPr rtl="1" algn="ctr" indent="0" marL="0">
-              <a:buNone/>
-            </a:pPr>
-            <a:r>
-              <a:rPr lang="ar-SA" altLang="en-US" sz="1600" b="1" dirty="0">
-                <a:solidFill>
-                  <a:srgbClr val="0F172A"/>
-                </a:solidFill>
-                <a:latin typeface="Arial" pitchFamily="34" charset="0"/>
-                <a:ea typeface="Arial" pitchFamily="34" charset="-122"/>
-                <a:cs typeface="Arial" pitchFamily="34" charset="-120"/>
-              </a:rPr>
-              <a:t>Pro</a:t>
-            </a:r>
-            <a:endParaRPr lang="ar-SA" sz="1600" dirty="0"/>
-          </a:p>
-        </p:txBody>
-      </p:sp>
-      <p:sp>
-        <p:nvSpPr>
-          <p:cNvPr id="16" name="Text 14"/>
-          <p:cNvSpPr txBox="1"/>
-          <p:nvPr/>
-        </p:nvSpPr>
-        <p:spPr>
-          <a:xfrm>
-            <a:off x="2697480" y="2103120"/>
-            <a:ext cx="1645920" cy="640080"/>
-          </a:xfrm>
-          <a:prstGeom prst="rect">
-            <a:avLst/>
-          </a:prstGeom>
-          <a:noFill/>
-          <a:ln/>
-        </p:spPr>
-        <p:txBody>
-          <a:bodyPr wrap="square" lIns="0" tIns="0" rIns="0" bIns="0" rtlCol="0" anchor="t"/>
-          <a:lstStyle/>
-          <a:p>
-            <a:pPr rtl="1" algn="ctr" indent="0" marL="0">
-              <a:buNone/>
-            </a:pPr>
-            <a:r>
-              <a:rPr lang="ar-SA" altLang="en-US" sz="3000" b="1" dirty="0">
-                <a:solidFill>
-                  <a:srgbClr val="047857"/>
-                </a:solidFill>
-                <a:latin typeface="Arial" pitchFamily="34" charset="0"/>
-                <a:ea typeface="Arial" pitchFamily="34" charset="-122"/>
-                <a:cs typeface="Arial" pitchFamily="34" charset="-120"/>
-              </a:rPr>
-              <a:t>799</a:t>
-            </a:r>
-            <a:endParaRPr lang="ar-SA" sz="3000" dirty="0"/>
-          </a:p>
-        </p:txBody>
-      </p:sp>
-      <p:sp>
-        <p:nvSpPr>
-          <p:cNvPr id="17" name="Text 15"/>
-          <p:cNvSpPr txBox="1"/>
-          <p:nvPr/>
-        </p:nvSpPr>
-        <p:spPr>
-          <a:xfrm>
-            <a:off x="2697480" y="2743200"/>
-            <a:ext cx="1645920" cy="274320"/>
-          </a:xfrm>
-          <a:prstGeom prst="rect">
-            <a:avLst/>
-          </a:prstGeom>
-          <a:noFill/>
-          <a:ln/>
-        </p:spPr>
-        <p:txBody>
-          <a:bodyPr wrap="square" lIns="0" tIns="0" rIns="0" bIns="0" rtlCol="0" anchor="t"/>
-          <a:lstStyle/>
-          <a:p>
-            <a:pPr rtl="1" algn="ctr" indent="0" marL="0">
-              <a:buNone/>
-            </a:pPr>
-            <a:r>
-              <a:rPr lang="ar-SA" altLang="en-US" sz="1100" dirty="0">
-                <a:solidFill>
-                  <a:srgbClr val="64748B"/>
-                </a:solidFill>
-                <a:latin typeface="Arial" pitchFamily="34" charset="0"/>
-                <a:ea typeface="Arial" pitchFamily="34" charset="-122"/>
-                <a:cs typeface="Arial" pitchFamily="34" charset="-120"/>
-              </a:rPr>
-              <a:t>ريال شهريًا</a:t>
-            </a:r>
-            <a:endParaRPr lang="ar-SA" sz="1100" dirty="0"/>
-          </a:p>
-        </p:txBody>
-      </p:sp>
-      <p:sp>
-        <p:nvSpPr>
-          <p:cNvPr id="18" name="Text 16"/>
-          <p:cNvSpPr txBox="1"/>
-          <p:nvPr/>
-        </p:nvSpPr>
-        <p:spPr>
-          <a:xfrm>
-            <a:off x="2697480" y="3108960"/>
-            <a:ext cx="1645920" cy="365760"/>
-          </a:xfrm>
-          <a:prstGeom prst="rect">
-            <a:avLst/>
-          </a:prstGeom>
-          <a:noFill/>
-          <a:ln/>
-        </p:spPr>
-        <p:txBody>
-          <a:bodyPr wrap="square" lIns="0" tIns="0" rIns="0" bIns="0" rtlCol="0" anchor="t"/>
-          <a:lstStyle/>
-          <a:p>
-            <a:pPr rtl="1" algn="ctr" indent="0" marL="0">
-              <a:buNone/>
-            </a:pPr>
-            <a:r>
-              <a:rPr lang="ar-SA" altLang="en-US" sz="1100" dirty="0">
-                <a:solidFill>
-                  <a:srgbClr val="475569"/>
-                </a:solidFill>
-                <a:latin typeface="Arial" pitchFamily="34" charset="0"/>
-                <a:ea typeface="Arial" pitchFamily="34" charset="-122"/>
-                <a:cs typeface="Arial" pitchFamily="34" charset="-120"/>
-              </a:rPr>
-              <a:t>حتى 6,000 طلب/شهر</a:t>
-            </a:r>
-            <a:endParaRPr lang="ar-SA" sz="1100" dirty="0"/>
-          </a:p>
-        </p:txBody>
-      </p:sp>
-      <p:sp>
-        <p:nvSpPr>
-          <p:cNvPr id="19" name="Shape 17"/>
-          <p:cNvSpPr/>
-          <p:nvPr/>
-        </p:nvSpPr>
-        <p:spPr>
-          <a:xfrm>
-            <a:off x="457200" y="1463040"/>
-            <a:ext cx="1920240" cy="2194560"/>
-          </a:xfrm>
-          <a:prstGeom prst="roundRect">
-            <a:avLst>
-              <a:gd name="adj" fmla="val 5714"/>
-            </a:avLst>
-          </a:prstGeom>
-          <a:solidFill>
-            <a:srgbClr val="F8FAFC"/>
-          </a:solidFill>
-          <a:ln w="12700">
-            <a:solidFill>
-              <a:srgbClr val="E2E8F0"/>
-            </a:solidFill>
-            <a:prstDash val="solid"/>
-          </a:ln>
-        </p:spPr>
-      </p:sp>
-      <p:sp>
-        <p:nvSpPr>
-          <p:cNvPr id="20" name="Text 18"/>
-          <p:cNvSpPr txBox="1"/>
-          <p:nvPr/>
-        </p:nvSpPr>
-        <p:spPr>
-          <a:xfrm>
-            <a:off x="594360" y="1645920"/>
-            <a:ext cx="1645920" cy="365760"/>
-          </a:xfrm>
-          <a:prstGeom prst="rect">
-            <a:avLst/>
-          </a:prstGeom>
-          <a:noFill/>
-          <a:ln/>
-        </p:spPr>
-        <p:txBody>
-          <a:bodyPr wrap="square" lIns="0" tIns="0" rIns="0" bIns="0" rtlCol="0" anchor="t"/>
-          <a:lstStyle/>
-          <a:p>
-            <a:pPr rtl="1" algn="ctr" indent="0" marL="0">
-              <a:buNone/>
-            </a:pPr>
-            <a:r>
-              <a:rPr lang="ar-SA" altLang="en-US" sz="1600" b="1" dirty="0">
-                <a:solidFill>
-                  <a:srgbClr val="0F172A"/>
-                </a:solidFill>
-                <a:latin typeface="Arial" pitchFamily="34" charset="0"/>
-                <a:ea typeface="Arial" pitchFamily="34" charset="-122"/>
-                <a:cs typeface="Arial" pitchFamily="34" charset="-120"/>
-              </a:rPr>
-              <a:t>وكالات</a:t>
-            </a:r>
-            <a:endParaRPr lang="ar-SA" sz="1600" dirty="0"/>
-          </a:p>
-        </p:txBody>
-      </p:sp>
-      <p:sp>
-        <p:nvSpPr>
-          <p:cNvPr id="21" name="Text 19"/>
-          <p:cNvSpPr txBox="1"/>
-          <p:nvPr/>
-        </p:nvSpPr>
-        <p:spPr>
-          <a:xfrm>
-            <a:off x="594360" y="2103120"/>
-            <a:ext cx="1645920" cy="640080"/>
-          </a:xfrm>
-          <a:prstGeom prst="rect">
-            <a:avLst/>
-          </a:prstGeom>
-          <a:noFill/>
-          <a:ln/>
-        </p:spPr>
-        <p:txBody>
-          <a:bodyPr wrap="square" lIns="0" tIns="0" rIns="0" bIns="0" rtlCol="0" anchor="t"/>
-          <a:lstStyle/>
-          <a:p>
-            <a:pPr rtl="1" algn="ctr" indent="0" marL="0">
-              <a:buNone/>
-            </a:pPr>
-            <a:r>
-              <a:rPr lang="ar-SA" altLang="en-US" sz="3000" b="1" dirty="0">
-                <a:solidFill>
-                  <a:srgbClr val="047857"/>
-                </a:solidFill>
-                <a:latin typeface="Arial" pitchFamily="34" charset="0"/>
-                <a:ea typeface="Arial" pitchFamily="34" charset="-122"/>
-                <a:cs typeface="Arial" pitchFamily="34" charset="-120"/>
-              </a:rPr>
-              <a:t>99–149</a:t>
-            </a:r>
-            <a:endParaRPr lang="ar-SA" sz="3000" dirty="0"/>
-          </a:p>
-        </p:txBody>
-      </p:sp>
-      <p:sp>
-        <p:nvSpPr>
-          <p:cNvPr id="22" name="Text 20"/>
-          <p:cNvSpPr txBox="1"/>
-          <p:nvPr/>
-        </p:nvSpPr>
-        <p:spPr>
-          <a:xfrm>
-            <a:off x="594360" y="2743200"/>
-            <a:ext cx="1645920" cy="274320"/>
-          </a:xfrm>
-          <a:prstGeom prst="rect">
-            <a:avLst/>
-          </a:prstGeom>
-          <a:noFill/>
-          <a:ln/>
-        </p:spPr>
-        <p:txBody>
-          <a:bodyPr wrap="square" lIns="0" tIns="0" rIns="0" bIns="0" rtlCol="0" anchor="t"/>
-          <a:lstStyle/>
-          <a:p>
-            <a:pPr rtl="1" algn="ctr" indent="0" marL="0">
-              <a:buNone/>
-            </a:pPr>
-            <a:r>
-              <a:rPr lang="ar-SA" altLang="en-US" sz="1100" dirty="0">
-                <a:solidFill>
-                  <a:srgbClr val="64748B"/>
-                </a:solidFill>
-                <a:latin typeface="Arial" pitchFamily="34" charset="0"/>
-                <a:ea typeface="Arial" pitchFamily="34" charset="-122"/>
-                <a:cs typeface="Arial" pitchFamily="34" charset="-120"/>
-              </a:rPr>
-              <a:t>ريال شهريًا</a:t>
-            </a:r>
-            <a:endParaRPr lang="ar-SA" sz="1100" dirty="0"/>
-          </a:p>
-        </p:txBody>
-      </p:sp>
-      <p:sp>
-        <p:nvSpPr>
-          <p:cNvPr id="23" name="Text 21"/>
-          <p:cNvSpPr txBox="1"/>
-          <p:nvPr/>
-        </p:nvSpPr>
-        <p:spPr>
-          <a:xfrm>
-            <a:off x="594360" y="3108960"/>
-            <a:ext cx="1645920" cy="365760"/>
-          </a:xfrm>
-          <a:prstGeom prst="rect">
-            <a:avLst/>
-          </a:prstGeom>
-          <a:noFill/>
-          <a:ln/>
-        </p:spPr>
-        <p:txBody>
-          <a:bodyPr wrap="square" lIns="0" tIns="0" rIns="0" bIns="0" rtlCol="0" anchor="t"/>
-          <a:lstStyle/>
-          <a:p>
-            <a:pPr rtl="1" algn="ctr" indent="0" marL="0">
-              <a:buNone/>
-            </a:pPr>
-            <a:r>
-              <a:rPr lang="ar-SA" altLang="en-US" sz="1100" dirty="0">
-                <a:solidFill>
-                  <a:srgbClr val="475569"/>
-                </a:solidFill>
-                <a:latin typeface="Arial" pitchFamily="34" charset="0"/>
-                <a:ea typeface="Arial" pitchFamily="34" charset="-122"/>
-                <a:cs typeface="Arial" pitchFamily="34" charset="-120"/>
-              </a:rPr>
-              <a:t>لكل متجر، 10 متاجر فأكثر</a:t>
-            </a:r>
-            <a:endParaRPr lang="ar-SA" sz="1100" dirty="0"/>
-          </a:p>
-        </p:txBody>
-      </p:sp>
-      <p:sp>
-        <p:nvSpPr>
-          <p:cNvPr id="24" name="Text 22"/>
-          <p:cNvSpPr txBox="1"/>
-          <p:nvPr/>
-        </p:nvSpPr>
-        <p:spPr>
-          <a:xfrm>
-            <a:off x="457200" y="3886200"/>
-            <a:ext cx="8229600" cy="548640"/>
-          </a:xfrm>
-          <a:prstGeom prst="rect">
-            <a:avLst/>
-          </a:prstGeom>
-          <a:noFill/>
-          <a:ln/>
-        </p:spPr>
-        <p:txBody>
-          <a:bodyPr wrap="square" lIns="0" tIns="0" rIns="0" bIns="0" rtlCol="0" anchor="t"/>
-          <a:lstStyle/>
-          <a:p>
-            <a:pPr rtl="1" algn="r" indent="0" marL="0">
-              <a:buNone/>
-            </a:pPr>
-            <a:r>
-              <a:rPr lang="ar-SA" altLang="en-US" sz="1250" dirty="0">
-                <a:solidFill>
-                  <a:srgbClr val="475569"/>
-                </a:solidFill>
-                <a:latin typeface="Arial" pitchFamily="34" charset="0"/>
-                <a:ea typeface="Arial" pitchFamily="34" charset="-122"/>
-                <a:cs typeface="Arial" pitchFamily="34" charset="-120"/>
-              </a:rPr>
-              <a:t>تجربة مجانية 14 يومًا. متجر بإيراد 150 ألف ريال شهريًا يدفع 0.23% من إيراده، وتجربة ناجحة واحدة تغطي الاشتراك عدة مرات.</a:t>
-            </a:r>
-            <a:endParaRPr lang="ar-SA" sz="1250" dirty="0"/>
-          </a:p>
-        </p:txBody>
-      </p:sp>
-      <p:sp>
-        <p:nvSpPr>
-          <p:cNvPr id="25" name="Text 23"/>
-          <p:cNvSpPr txBox="1"/>
-          <p:nvPr/>
-        </p:nvSpPr>
-        <p:spPr>
-          <a:xfrm>
-            <a:off x="6858000" y="4754880"/>
-            <a:ext cx="1828800" cy="228600"/>
-          </a:xfrm>
-          <a:prstGeom prst="rect">
-            <a:avLst/>
-          </a:prstGeom>
-          <a:noFill/>
-          <a:ln/>
-        </p:spPr>
-        <p:txBody>
-          <a:bodyPr wrap="square" lIns="0" tIns="0" rIns="0" bIns="0" rtlCol="0" anchor="t"/>
-          <a:lstStyle/>
-          <a:p>
-            <a:pPr rtl="1" algn="r" indent="0" marL="0">
-              <a:buNone/>
-            </a:pPr>
-            <a:r>
-              <a:rPr lang="ar-SA" altLang="en-US" sz="900" dirty="0">
-                <a:solidFill>
-                  <a:srgbClr val="64748B"/>
-                </a:solidFill>
-                <a:latin typeface="Arial" pitchFamily="34" charset="0"/>
-                <a:ea typeface="Arial" pitchFamily="34" charset="-122"/>
-                <a:cs typeface="Arial" pitchFamily="34" charset="-120"/>
-              </a:rPr>
-              <a:t>نبض | NABD</a:t>
-            </a:r>
-            <a:endParaRPr lang="ar-SA" sz="900" dirty="0"/>
-          </a:p>
-        </p:txBody>
-      </p:sp>
-      <p:sp>
-        <p:nvSpPr>
-          <p:cNvPr id="26" name="Text 24"/>
           <p:cNvSpPr txBox="1"/>
           <p:nvPr/>
         </p:nvSpPr>
